--- a/ATM_Inventory_FullSystem_ERD.pptx
+++ b/ATM_Inventory_FullSystem_ERD.pptx
@@ -3238,7 +3238,7 @@
         <p:spPr>
           <a:xfrm>
             <a:off x="274320" y="365760"/>
-            <a:ext cx="8229600" cy="182880"/>
+            <a:ext cx="10972800" cy="182880"/>
           </a:xfrm>
           <a:prstGeom prst="rect">
             <a:avLst/>
@@ -3259,7 +3259,7 @@
                 </a:solidFill>
                 <a:latin typeface="Calibri"/>
               </a:rPr>
-              <a:t>เส้นทึบ = FK บังคับจริง   ·   เส้นประ = เชื่อมหลวมด้วย PartNo (string, ไม่มี FK)</a:t>
+              <a:t>เส้นทึบ = FK บังคับจริง (เชื่อมครบทุก transaction แล้ว)   ·   เส้นประ = เหลือ Ticket / EquivalentPart ที่ยังอ้างด้วย PartNo</a:t>
             </a:r>
           </a:p>
         </p:txBody>
@@ -6518,7 +6518,7 @@
         <p:spPr>
           <a:xfrm>
             <a:off x="6309360" y="3246120"/>
-            <a:ext cx="1554480" cy="896112"/>
+            <a:ext cx="1554480" cy="1051560"/>
           </a:xfrm>
           <a:prstGeom prst="roundRect">
             <a:avLst/>
@@ -6769,7 +6769,7 @@
                 </a:solidFill>
                 <a:latin typeface="Consolas"/>
               </a:rPr>
-              <a:t>PartId  *NEW*</a:t>
+              <a:t>PartId</a:t>
             </a:r>
           </a:p>
         </p:txBody>
@@ -6782,7 +6782,42 @@
         </p:nvSpPr>
         <p:spPr>
           <a:xfrm>
-            <a:off x="6391656" y="3840480"/>
+            <a:off x="6355080" y="3840480"/>
+            <a:ext cx="274320" cy="155448"/>
+          </a:xfrm>
+          <a:prstGeom prst="rect">
+            <a:avLst/>
+          </a:prstGeom>
+          <a:noFill/>
+        </p:spPr>
+        <p:txBody>
+          <a:bodyPr wrap="square" lIns="18288" rIns="18288" tIns="0" bIns="0" anchor="ctr">
+            <a:spAutoFit/>
+          </a:bodyPr>
+          <a:lstStyle/>
+          <a:p>
+            <a:pPr algn="l"/>
+            <a:r>
+              <a:rPr sz="650" b="1" i="0">
+                <a:solidFill>
+                  <a:srgbClr val="059669"/>
+                </a:solidFill>
+                <a:latin typeface="Calibri"/>
+              </a:rPr>
+              <a:t>FK</a:t>
+            </a:r>
+          </a:p>
+        </p:txBody>
+      </p:sp>
+      <p:sp>
+        <p:nvSpPr>
+          <p:cNvPr id="101" name="TextBox 100"/>
+          <p:cNvSpPr txBox="1"/>
+          <p:nvPr/>
+        </p:nvSpPr>
+        <p:spPr>
+          <a:xfrm>
+            <a:off x="6620256" y="3840480"/>
             <a:ext cx="1188719" cy="155448"/>
           </a:xfrm>
           <a:prstGeom prst="rect">
@@ -6804,14 +6839,14 @@
                 </a:solidFill>
                 <a:latin typeface="Consolas"/>
               </a:rPr>
-              <a:t>From/ToLoc</a:t>
-            </a:r>
-          </a:p>
-        </p:txBody>
-      </p:sp>
-      <p:sp>
-        <p:nvSpPr>
-          <p:cNvPr id="101" name="TextBox 100"/>
+              <a:t>PartUnitId</a:t>
+            </a:r>
+          </a:p>
+        </p:txBody>
+      </p:sp>
+      <p:sp>
+        <p:nvSpPr>
+          <p:cNvPr id="102" name="TextBox 101"/>
           <p:cNvSpPr txBox="1"/>
           <p:nvPr/>
         </p:nvSpPr>
@@ -6839,6 +6874,41 @@
                 </a:solidFill>
                 <a:latin typeface="Consolas"/>
               </a:rPr>
+              <a:t>From/ToLoc</a:t>
+            </a:r>
+          </a:p>
+        </p:txBody>
+      </p:sp>
+      <p:sp>
+        <p:nvSpPr>
+          <p:cNvPr id="103" name="TextBox 102"/>
+          <p:cNvSpPr txBox="1"/>
+          <p:nvPr/>
+        </p:nvSpPr>
+        <p:spPr>
+          <a:xfrm>
+            <a:off x="6391656" y="4151376"/>
+            <a:ext cx="1188719" cy="155448"/>
+          </a:xfrm>
+          <a:prstGeom prst="rect">
+            <a:avLst/>
+          </a:prstGeom>
+          <a:noFill/>
+        </p:spPr>
+        <p:txBody>
+          <a:bodyPr wrap="square" lIns="18288" rIns="18288" tIns="0" bIns="0" anchor="ctr">
+            <a:spAutoFit/>
+          </a:bodyPr>
+          <a:lstStyle/>
+          <a:p>
+            <a:pPr algn="l"/>
+            <a:r>
+              <a:rPr sz="700" b="0" i="0">
+                <a:solidFill>
+                  <a:srgbClr val="1E2D40"/>
+                </a:solidFill>
+                <a:latin typeface="Consolas"/>
+              </a:rPr>
               <a:t>Type/Qty</a:t>
             </a:r>
           </a:p>
@@ -6846,7 +6916,7 @@
       </p:sp>
       <p:sp>
         <p:nvSpPr>
-          <p:cNvPr id="102" name="TextBox 101"/>
+          <p:cNvPr id="104" name="TextBox 103"/>
           <p:cNvSpPr txBox="1"/>
           <p:nvPr/>
         </p:nvSpPr>
@@ -6881,7 +6951,7 @@
       </p:sp>
       <p:sp>
         <p:nvSpPr>
-          <p:cNvPr id="103" name="Rounded Rectangle 102"/>
+          <p:cNvPr id="105" name="Rounded Rectangle 104"/>
           <p:cNvSpPr/>
           <p:nvPr/>
         </p:nvSpPr>
@@ -6927,7 +6997,7 @@
       </p:sp>
       <p:sp>
         <p:nvSpPr>
-          <p:cNvPr id="104" name="Rectangle 103"/>
+          <p:cNvPr id="106" name="Rectangle 105"/>
           <p:cNvSpPr/>
           <p:nvPr/>
         </p:nvSpPr>
@@ -6971,7 +7041,7 @@
       </p:sp>
       <p:sp>
         <p:nvSpPr>
-          <p:cNvPr id="105" name="TextBox 104"/>
+          <p:cNvPr id="107" name="TextBox 106"/>
           <p:cNvSpPr txBox="1"/>
           <p:nvPr/>
         </p:nvSpPr>
@@ -7006,7 +7076,7 @@
       </p:sp>
       <p:sp>
         <p:nvSpPr>
-          <p:cNvPr id="106" name="TextBox 105"/>
+          <p:cNvPr id="108" name="TextBox 107"/>
           <p:cNvSpPr txBox="1"/>
           <p:nvPr/>
         </p:nvSpPr>
@@ -7041,7 +7111,7 @@
       </p:sp>
       <p:sp>
         <p:nvSpPr>
-          <p:cNvPr id="107" name="TextBox 106"/>
+          <p:cNvPr id="109" name="TextBox 108"/>
           <p:cNvSpPr txBox="1"/>
           <p:nvPr/>
         </p:nvSpPr>
@@ -7076,7 +7146,7 @@
       </p:sp>
       <p:sp>
         <p:nvSpPr>
-          <p:cNvPr id="108" name="TextBox 107"/>
+          <p:cNvPr id="110" name="TextBox 109"/>
           <p:cNvSpPr txBox="1"/>
           <p:nvPr/>
         </p:nvSpPr>
@@ -7111,7 +7181,7 @@
       </p:sp>
       <p:sp>
         <p:nvSpPr>
-          <p:cNvPr id="109" name="TextBox 108"/>
+          <p:cNvPr id="111" name="TextBox 110"/>
           <p:cNvSpPr txBox="1"/>
           <p:nvPr/>
         </p:nvSpPr>
@@ -7146,7 +7216,7 @@
       </p:sp>
       <p:sp>
         <p:nvSpPr>
-          <p:cNvPr id="110" name="TextBox 109"/>
+          <p:cNvPr id="112" name="TextBox 111"/>
           <p:cNvSpPr txBox="1"/>
           <p:nvPr/>
         </p:nvSpPr>
@@ -7170,18 +7240,18 @@
             <a:r>
               <a:rPr sz="650" b="1" i="0">
                 <a:solidFill>
-                  <a:srgbClr val="6B7280"/>
-                </a:solidFill>
-                <a:latin typeface="Calibri"/>
-              </a:rPr>
-              <a:t>~</a:t>
-            </a:r>
-          </a:p>
-        </p:txBody>
-      </p:sp>
-      <p:sp>
-        <p:nvSpPr>
-          <p:cNvPr id="111" name="TextBox 110"/>
+                  <a:srgbClr val="059669"/>
+                </a:solidFill>
+                <a:latin typeface="Calibri"/>
+              </a:rPr>
+              <a:t>FK</a:t>
+            </a:r>
+          </a:p>
+        </p:txBody>
+      </p:sp>
+      <p:sp>
+        <p:nvSpPr>
+          <p:cNvPr id="113" name="TextBox 112"/>
           <p:cNvSpPr txBox="1"/>
           <p:nvPr/>
         </p:nvSpPr>
@@ -7209,14 +7279,14 @@
                 </a:solidFill>
                 <a:latin typeface="Consolas"/>
               </a:rPr>
-              <a:t>PartNo</a:t>
-            </a:r>
-          </a:p>
-        </p:txBody>
-      </p:sp>
-      <p:sp>
-        <p:nvSpPr>
-          <p:cNvPr id="112" name="Rounded Rectangle 111"/>
+              <a:t>PartId</a:t>
+            </a:r>
+          </a:p>
+        </p:txBody>
+      </p:sp>
+      <p:sp>
+        <p:nvSpPr>
+          <p:cNvPr id="114" name="Rounded Rectangle 113"/>
           <p:cNvSpPr/>
           <p:nvPr/>
         </p:nvSpPr>
@@ -7262,7 +7332,7 @@
       </p:sp>
       <p:sp>
         <p:nvSpPr>
-          <p:cNvPr id="113" name="Rectangle 112"/>
+          <p:cNvPr id="115" name="Rectangle 114"/>
           <p:cNvSpPr/>
           <p:nvPr/>
         </p:nvSpPr>
@@ -7306,7 +7376,7 @@
       </p:sp>
       <p:sp>
         <p:nvSpPr>
-          <p:cNvPr id="114" name="TextBox 113"/>
+          <p:cNvPr id="116" name="TextBox 115"/>
           <p:cNvSpPr txBox="1"/>
           <p:nvPr/>
         </p:nvSpPr>
@@ -7341,7 +7411,7 @@
       </p:sp>
       <p:sp>
         <p:nvSpPr>
-          <p:cNvPr id="115" name="TextBox 114"/>
+          <p:cNvPr id="117" name="TextBox 116"/>
           <p:cNvSpPr txBox="1"/>
           <p:nvPr/>
         </p:nvSpPr>
@@ -7376,7 +7446,7 @@
       </p:sp>
       <p:sp>
         <p:nvSpPr>
-          <p:cNvPr id="116" name="TextBox 115"/>
+          <p:cNvPr id="118" name="TextBox 117"/>
           <p:cNvSpPr txBox="1"/>
           <p:nvPr/>
         </p:nvSpPr>
@@ -7411,7 +7481,7 @@
       </p:sp>
       <p:sp>
         <p:nvSpPr>
-          <p:cNvPr id="117" name="TextBox 116"/>
+          <p:cNvPr id="119" name="TextBox 118"/>
           <p:cNvSpPr txBox="1"/>
           <p:nvPr/>
         </p:nvSpPr>
@@ -7446,7 +7516,7 @@
       </p:sp>
       <p:sp>
         <p:nvSpPr>
-          <p:cNvPr id="118" name="Rounded Rectangle 117"/>
+          <p:cNvPr id="120" name="Rounded Rectangle 119"/>
           <p:cNvSpPr/>
           <p:nvPr/>
         </p:nvSpPr>
@@ -7492,7 +7562,7 @@
       </p:sp>
       <p:sp>
         <p:nvSpPr>
-          <p:cNvPr id="119" name="Rectangle 118"/>
+          <p:cNvPr id="121" name="Rectangle 120"/>
           <p:cNvSpPr/>
           <p:nvPr/>
         </p:nvSpPr>
@@ -7536,7 +7606,7 @@
       </p:sp>
       <p:sp>
         <p:nvSpPr>
-          <p:cNvPr id="120" name="TextBox 119"/>
+          <p:cNvPr id="122" name="TextBox 121"/>
           <p:cNvSpPr txBox="1"/>
           <p:nvPr/>
         </p:nvSpPr>
@@ -7571,7 +7641,7 @@
       </p:sp>
       <p:sp>
         <p:nvSpPr>
-          <p:cNvPr id="121" name="TextBox 120"/>
+          <p:cNvPr id="123" name="TextBox 122"/>
           <p:cNvSpPr txBox="1"/>
           <p:nvPr/>
         </p:nvSpPr>
@@ -7606,7 +7676,7 @@
       </p:sp>
       <p:sp>
         <p:nvSpPr>
-          <p:cNvPr id="122" name="TextBox 121"/>
+          <p:cNvPr id="124" name="TextBox 123"/>
           <p:cNvSpPr txBox="1"/>
           <p:nvPr/>
         </p:nvSpPr>
@@ -7641,7 +7711,7 @@
       </p:sp>
       <p:sp>
         <p:nvSpPr>
-          <p:cNvPr id="123" name="TextBox 122"/>
+          <p:cNvPr id="125" name="TextBox 124"/>
           <p:cNvSpPr txBox="1"/>
           <p:nvPr/>
         </p:nvSpPr>
@@ -7676,7 +7746,7 @@
       </p:sp>
       <p:sp>
         <p:nvSpPr>
-          <p:cNvPr id="124" name="TextBox 123"/>
+          <p:cNvPr id="126" name="TextBox 125"/>
           <p:cNvSpPr txBox="1"/>
           <p:nvPr/>
         </p:nvSpPr>
@@ -7711,7 +7781,7 @@
       </p:sp>
       <p:sp>
         <p:nvSpPr>
-          <p:cNvPr id="125" name="TextBox 124"/>
+          <p:cNvPr id="127" name="TextBox 126"/>
           <p:cNvSpPr txBox="1"/>
           <p:nvPr/>
         </p:nvSpPr>
@@ -7735,18 +7805,18 @@
             <a:r>
               <a:rPr sz="650" b="1" i="0">
                 <a:solidFill>
-                  <a:srgbClr val="6B7280"/>
-                </a:solidFill>
-                <a:latin typeface="Calibri"/>
-              </a:rPr>
-              <a:t>~</a:t>
-            </a:r>
-          </a:p>
-        </p:txBody>
-      </p:sp>
-      <p:sp>
-        <p:nvSpPr>
-          <p:cNvPr id="126" name="TextBox 125"/>
+                  <a:srgbClr val="059669"/>
+                </a:solidFill>
+                <a:latin typeface="Calibri"/>
+              </a:rPr>
+              <a:t>FK</a:t>
+            </a:r>
+          </a:p>
+        </p:txBody>
+      </p:sp>
+      <p:sp>
+        <p:nvSpPr>
+          <p:cNvPr id="128" name="TextBox 127"/>
           <p:cNvSpPr txBox="1"/>
           <p:nvPr/>
         </p:nvSpPr>
@@ -7774,14 +7844,14 @@
                 </a:solidFill>
                 <a:latin typeface="Consolas"/>
               </a:rPr>
-              <a:t>PartNo</a:t>
-            </a:r>
-          </a:p>
-        </p:txBody>
-      </p:sp>
-      <p:sp>
-        <p:nvSpPr>
-          <p:cNvPr id="127" name="Rounded Rectangle 126"/>
+              <a:t>PartId</a:t>
+            </a:r>
+          </a:p>
+        </p:txBody>
+      </p:sp>
+      <p:sp>
+        <p:nvSpPr>
+          <p:cNvPr id="129" name="Rounded Rectangle 128"/>
           <p:cNvSpPr/>
           <p:nvPr/>
         </p:nvSpPr>
@@ -7827,7 +7897,7 @@
       </p:sp>
       <p:sp>
         <p:nvSpPr>
-          <p:cNvPr id="128" name="Rectangle 127"/>
+          <p:cNvPr id="130" name="Rectangle 129"/>
           <p:cNvSpPr/>
           <p:nvPr/>
         </p:nvSpPr>
@@ -7871,7 +7941,7 @@
       </p:sp>
       <p:sp>
         <p:nvSpPr>
-          <p:cNvPr id="129" name="TextBox 128"/>
+          <p:cNvPr id="131" name="TextBox 130"/>
           <p:cNvSpPr txBox="1"/>
           <p:nvPr/>
         </p:nvSpPr>
@@ -7906,7 +7976,7 @@
       </p:sp>
       <p:sp>
         <p:nvSpPr>
-          <p:cNvPr id="130" name="TextBox 129"/>
+          <p:cNvPr id="132" name="TextBox 131"/>
           <p:cNvSpPr txBox="1"/>
           <p:nvPr/>
         </p:nvSpPr>
@@ -7941,7 +8011,7 @@
       </p:sp>
       <p:sp>
         <p:nvSpPr>
-          <p:cNvPr id="131" name="TextBox 130"/>
+          <p:cNvPr id="133" name="TextBox 132"/>
           <p:cNvSpPr txBox="1"/>
           <p:nvPr/>
         </p:nvSpPr>
@@ -7976,7 +8046,7 @@
       </p:sp>
       <p:sp>
         <p:nvSpPr>
-          <p:cNvPr id="132" name="TextBox 131"/>
+          <p:cNvPr id="134" name="TextBox 133"/>
           <p:cNvSpPr txBox="1"/>
           <p:nvPr/>
         </p:nvSpPr>
@@ -8011,7 +8081,7 @@
       </p:sp>
       <p:sp>
         <p:nvSpPr>
-          <p:cNvPr id="133" name="TextBox 132"/>
+          <p:cNvPr id="135" name="TextBox 134"/>
           <p:cNvSpPr txBox="1"/>
           <p:nvPr/>
         </p:nvSpPr>
@@ -8046,7 +8116,7 @@
       </p:sp>
       <p:sp>
         <p:nvSpPr>
-          <p:cNvPr id="134" name="TextBox 133"/>
+          <p:cNvPr id="136" name="TextBox 135"/>
           <p:cNvSpPr txBox="1"/>
           <p:nvPr/>
         </p:nvSpPr>
@@ -8081,7 +8151,7 @@
       </p:sp>
       <p:sp>
         <p:nvSpPr>
-          <p:cNvPr id="135" name="Rounded Rectangle 134"/>
+          <p:cNvPr id="137" name="Rounded Rectangle 136"/>
           <p:cNvSpPr/>
           <p:nvPr/>
         </p:nvSpPr>
@@ -8127,7 +8197,7 @@
       </p:sp>
       <p:sp>
         <p:nvSpPr>
-          <p:cNvPr id="136" name="Rectangle 135"/>
+          <p:cNvPr id="138" name="Rectangle 137"/>
           <p:cNvSpPr/>
           <p:nvPr/>
         </p:nvSpPr>
@@ -8171,7 +8241,7 @@
       </p:sp>
       <p:sp>
         <p:nvSpPr>
-          <p:cNvPr id="137" name="TextBox 136"/>
+          <p:cNvPr id="139" name="TextBox 138"/>
           <p:cNvSpPr txBox="1"/>
           <p:nvPr/>
         </p:nvSpPr>
@@ -8206,7 +8276,7 @@
       </p:sp>
       <p:sp>
         <p:nvSpPr>
-          <p:cNvPr id="138" name="TextBox 137"/>
+          <p:cNvPr id="140" name="TextBox 139"/>
           <p:cNvSpPr txBox="1"/>
           <p:nvPr/>
         </p:nvSpPr>
@@ -8241,7 +8311,7 @@
       </p:sp>
       <p:sp>
         <p:nvSpPr>
-          <p:cNvPr id="139" name="TextBox 138"/>
+          <p:cNvPr id="141" name="TextBox 140"/>
           <p:cNvSpPr txBox="1"/>
           <p:nvPr/>
         </p:nvSpPr>
@@ -8276,7 +8346,7 @@
       </p:sp>
       <p:sp>
         <p:nvSpPr>
-          <p:cNvPr id="140" name="TextBox 139"/>
+          <p:cNvPr id="142" name="TextBox 141"/>
           <p:cNvSpPr txBox="1"/>
           <p:nvPr/>
         </p:nvSpPr>
@@ -8311,7 +8381,7 @@
       </p:sp>
       <p:sp>
         <p:nvSpPr>
-          <p:cNvPr id="141" name="TextBox 140"/>
+          <p:cNvPr id="143" name="TextBox 142"/>
           <p:cNvSpPr txBox="1"/>
           <p:nvPr/>
         </p:nvSpPr>
@@ -8346,7 +8416,7 @@
       </p:sp>
       <p:sp>
         <p:nvSpPr>
-          <p:cNvPr id="142" name="TextBox 141"/>
+          <p:cNvPr id="144" name="TextBox 143"/>
           <p:cNvSpPr txBox="1"/>
           <p:nvPr/>
         </p:nvSpPr>
@@ -8381,7 +8451,7 @@
       </p:sp>
       <p:sp>
         <p:nvSpPr>
-          <p:cNvPr id="143" name="TextBox 142"/>
+          <p:cNvPr id="145" name="TextBox 144"/>
           <p:cNvSpPr txBox="1"/>
           <p:nvPr/>
         </p:nvSpPr>
@@ -8416,7 +8486,7 @@
       </p:sp>
       <p:sp>
         <p:nvSpPr>
-          <p:cNvPr id="144" name="Rounded Rectangle 143"/>
+          <p:cNvPr id="146" name="Rounded Rectangle 145"/>
           <p:cNvSpPr/>
           <p:nvPr/>
         </p:nvSpPr>
@@ -8462,7 +8532,7 @@
       </p:sp>
       <p:sp>
         <p:nvSpPr>
-          <p:cNvPr id="145" name="Rectangle 144"/>
+          <p:cNvPr id="147" name="Rectangle 146"/>
           <p:cNvSpPr/>
           <p:nvPr/>
         </p:nvSpPr>
@@ -8506,7 +8576,7 @@
       </p:sp>
       <p:sp>
         <p:nvSpPr>
-          <p:cNvPr id="146" name="TextBox 145"/>
+          <p:cNvPr id="148" name="TextBox 147"/>
           <p:cNvSpPr txBox="1"/>
           <p:nvPr/>
         </p:nvSpPr>
@@ -8541,7 +8611,7 @@
       </p:sp>
       <p:sp>
         <p:nvSpPr>
-          <p:cNvPr id="147" name="TextBox 146"/>
+          <p:cNvPr id="149" name="TextBox 148"/>
           <p:cNvSpPr txBox="1"/>
           <p:nvPr/>
         </p:nvSpPr>
@@ -8576,7 +8646,7 @@
       </p:sp>
       <p:sp>
         <p:nvSpPr>
-          <p:cNvPr id="148" name="TextBox 147"/>
+          <p:cNvPr id="150" name="TextBox 149"/>
           <p:cNvSpPr txBox="1"/>
           <p:nvPr/>
         </p:nvSpPr>
@@ -8611,7 +8681,7 @@
       </p:sp>
       <p:sp>
         <p:nvSpPr>
-          <p:cNvPr id="149" name="TextBox 148"/>
+          <p:cNvPr id="151" name="TextBox 150"/>
           <p:cNvSpPr txBox="1"/>
           <p:nvPr/>
         </p:nvSpPr>
@@ -8646,7 +8716,7 @@
       </p:sp>
       <p:sp>
         <p:nvSpPr>
-          <p:cNvPr id="150" name="TextBox 149"/>
+          <p:cNvPr id="152" name="TextBox 151"/>
           <p:cNvSpPr txBox="1"/>
           <p:nvPr/>
         </p:nvSpPr>
@@ -8681,7 +8751,7 @@
       </p:sp>
       <p:sp>
         <p:nvSpPr>
-          <p:cNvPr id="151" name="TextBox 150"/>
+          <p:cNvPr id="153" name="TextBox 152"/>
           <p:cNvSpPr txBox="1"/>
           <p:nvPr/>
         </p:nvSpPr>
@@ -8705,18 +8775,18 @@
             <a:r>
               <a:rPr sz="650" b="1" i="0">
                 <a:solidFill>
-                  <a:srgbClr val="6B7280"/>
-                </a:solidFill>
-                <a:latin typeface="Calibri"/>
-              </a:rPr>
-              <a:t>~</a:t>
-            </a:r>
-          </a:p>
-        </p:txBody>
-      </p:sp>
-      <p:sp>
-        <p:nvSpPr>
-          <p:cNvPr id="152" name="TextBox 151"/>
+                  <a:srgbClr val="059669"/>
+                </a:solidFill>
+                <a:latin typeface="Calibri"/>
+              </a:rPr>
+              <a:t>FK</a:t>
+            </a:r>
+          </a:p>
+        </p:txBody>
+      </p:sp>
+      <p:sp>
+        <p:nvSpPr>
+          <p:cNvPr id="154" name="TextBox 153"/>
           <p:cNvSpPr txBox="1"/>
           <p:nvPr/>
         </p:nvSpPr>
@@ -8744,14 +8814,14 @@
                 </a:solidFill>
                 <a:latin typeface="Consolas"/>
               </a:rPr>
-              <a:t>PartNo</a:t>
-            </a:r>
-          </a:p>
-        </p:txBody>
-      </p:sp>
-      <p:sp>
-        <p:nvSpPr>
-          <p:cNvPr id="153" name="Rounded Rectangle 152"/>
+              <a:t>PartId</a:t>
+            </a:r>
+          </a:p>
+        </p:txBody>
+      </p:sp>
+      <p:sp>
+        <p:nvSpPr>
+          <p:cNvPr id="155" name="Rounded Rectangle 154"/>
           <p:cNvSpPr/>
           <p:nvPr/>
         </p:nvSpPr>
@@ -8797,7 +8867,7 @@
       </p:sp>
       <p:sp>
         <p:nvSpPr>
-          <p:cNvPr id="154" name="Rectangle 153"/>
+          <p:cNvPr id="156" name="Rectangle 155"/>
           <p:cNvSpPr/>
           <p:nvPr/>
         </p:nvSpPr>
@@ -8841,7 +8911,7 @@
       </p:sp>
       <p:sp>
         <p:nvSpPr>
-          <p:cNvPr id="155" name="TextBox 154"/>
+          <p:cNvPr id="157" name="TextBox 156"/>
           <p:cNvSpPr txBox="1"/>
           <p:nvPr/>
         </p:nvSpPr>
@@ -8876,7 +8946,7 @@
       </p:sp>
       <p:sp>
         <p:nvSpPr>
-          <p:cNvPr id="156" name="TextBox 155"/>
+          <p:cNvPr id="158" name="TextBox 157"/>
           <p:cNvSpPr txBox="1"/>
           <p:nvPr/>
         </p:nvSpPr>
@@ -8911,7 +8981,7 @@
       </p:sp>
       <p:sp>
         <p:nvSpPr>
-          <p:cNvPr id="157" name="TextBox 156"/>
+          <p:cNvPr id="159" name="TextBox 158"/>
           <p:cNvSpPr txBox="1"/>
           <p:nvPr/>
         </p:nvSpPr>
@@ -8946,7 +9016,7 @@
       </p:sp>
       <p:sp>
         <p:nvSpPr>
-          <p:cNvPr id="158" name="TextBox 157"/>
+          <p:cNvPr id="160" name="TextBox 159"/>
           <p:cNvSpPr txBox="1"/>
           <p:nvPr/>
         </p:nvSpPr>
@@ -8981,7 +9051,7 @@
       </p:sp>
       <p:sp>
         <p:nvSpPr>
-          <p:cNvPr id="159" name="TextBox 158"/>
+          <p:cNvPr id="161" name="TextBox 160"/>
           <p:cNvSpPr txBox="1"/>
           <p:nvPr/>
         </p:nvSpPr>
@@ -9016,7 +9086,7 @@
       </p:sp>
       <p:sp>
         <p:nvSpPr>
-          <p:cNvPr id="160" name="Rounded Rectangle 159"/>
+          <p:cNvPr id="162" name="Rounded Rectangle 161"/>
           <p:cNvSpPr/>
           <p:nvPr/>
         </p:nvSpPr>
@@ -9062,7 +9132,7 @@
       </p:sp>
       <p:sp>
         <p:nvSpPr>
-          <p:cNvPr id="161" name="Rectangle 160"/>
+          <p:cNvPr id="163" name="Rectangle 162"/>
           <p:cNvSpPr/>
           <p:nvPr/>
         </p:nvSpPr>
@@ -9106,7 +9176,7 @@
       </p:sp>
       <p:sp>
         <p:nvSpPr>
-          <p:cNvPr id="162" name="TextBox 161"/>
+          <p:cNvPr id="164" name="TextBox 163"/>
           <p:cNvSpPr txBox="1"/>
           <p:nvPr/>
         </p:nvSpPr>
@@ -9141,7 +9211,7 @@
       </p:sp>
       <p:sp>
         <p:nvSpPr>
-          <p:cNvPr id="163" name="TextBox 162"/>
+          <p:cNvPr id="165" name="TextBox 164"/>
           <p:cNvSpPr txBox="1"/>
           <p:nvPr/>
         </p:nvSpPr>
@@ -9176,7 +9246,7 @@
       </p:sp>
       <p:sp>
         <p:nvSpPr>
-          <p:cNvPr id="164" name="TextBox 163"/>
+          <p:cNvPr id="166" name="TextBox 165"/>
           <p:cNvSpPr txBox="1"/>
           <p:nvPr/>
         </p:nvSpPr>
@@ -9211,7 +9281,7 @@
       </p:sp>
       <p:sp>
         <p:nvSpPr>
-          <p:cNvPr id="165" name="TextBox 164"/>
+          <p:cNvPr id="167" name="TextBox 166"/>
           <p:cNvSpPr txBox="1"/>
           <p:nvPr/>
         </p:nvSpPr>
@@ -9246,7 +9316,7 @@
       </p:sp>
       <p:sp>
         <p:nvSpPr>
-          <p:cNvPr id="166" name="TextBox 165"/>
+          <p:cNvPr id="168" name="TextBox 167"/>
           <p:cNvSpPr txBox="1"/>
           <p:nvPr/>
         </p:nvSpPr>
@@ -9281,7 +9351,7 @@
       </p:sp>
       <p:sp>
         <p:nvSpPr>
-          <p:cNvPr id="167" name="TextBox 166"/>
+          <p:cNvPr id="169" name="TextBox 168"/>
           <p:cNvSpPr txBox="1"/>
           <p:nvPr/>
         </p:nvSpPr>
@@ -9305,18 +9375,18 @@
             <a:r>
               <a:rPr sz="650" b="1" i="0">
                 <a:solidFill>
-                  <a:srgbClr val="6B7280"/>
-                </a:solidFill>
-                <a:latin typeface="Calibri"/>
-              </a:rPr>
-              <a:t>~</a:t>
-            </a:r>
-          </a:p>
-        </p:txBody>
-      </p:sp>
-      <p:sp>
-        <p:nvSpPr>
-          <p:cNvPr id="168" name="TextBox 167"/>
+                  <a:srgbClr val="059669"/>
+                </a:solidFill>
+                <a:latin typeface="Calibri"/>
+              </a:rPr>
+              <a:t>FK</a:t>
+            </a:r>
+          </a:p>
+        </p:txBody>
+      </p:sp>
+      <p:sp>
+        <p:nvSpPr>
+          <p:cNvPr id="170" name="TextBox 169"/>
           <p:cNvSpPr txBox="1"/>
           <p:nvPr/>
         </p:nvSpPr>
@@ -9344,14 +9414,14 @@
                 </a:solidFill>
                 <a:latin typeface="Consolas"/>
               </a:rPr>
-              <a:t>PartNo</a:t>
-            </a:r>
-          </a:p>
-        </p:txBody>
-      </p:sp>
-      <p:sp>
-        <p:nvSpPr>
-          <p:cNvPr id="169" name="Rounded Rectangle 168"/>
+              <a:t>PartId</a:t>
+            </a:r>
+          </a:p>
+        </p:txBody>
+      </p:sp>
+      <p:sp>
+        <p:nvSpPr>
+          <p:cNvPr id="171" name="Rounded Rectangle 170"/>
           <p:cNvSpPr/>
           <p:nvPr/>
         </p:nvSpPr>
@@ -9397,7 +9467,7 @@
       </p:sp>
       <p:sp>
         <p:nvSpPr>
-          <p:cNvPr id="170" name="Rectangle 169"/>
+          <p:cNvPr id="172" name="Rectangle 171"/>
           <p:cNvSpPr/>
           <p:nvPr/>
         </p:nvSpPr>
@@ -9441,7 +9511,7 @@
       </p:sp>
       <p:sp>
         <p:nvSpPr>
-          <p:cNvPr id="171" name="TextBox 170"/>
+          <p:cNvPr id="173" name="TextBox 172"/>
           <p:cNvSpPr txBox="1"/>
           <p:nvPr/>
         </p:nvSpPr>
@@ -9476,7 +9546,7 @@
       </p:sp>
       <p:sp>
         <p:nvSpPr>
-          <p:cNvPr id="172" name="TextBox 171"/>
+          <p:cNvPr id="174" name="TextBox 173"/>
           <p:cNvSpPr txBox="1"/>
           <p:nvPr/>
         </p:nvSpPr>
@@ -9511,7 +9581,7 @@
       </p:sp>
       <p:sp>
         <p:nvSpPr>
-          <p:cNvPr id="173" name="TextBox 172"/>
+          <p:cNvPr id="175" name="TextBox 174"/>
           <p:cNvSpPr txBox="1"/>
           <p:nvPr/>
         </p:nvSpPr>
@@ -9546,7 +9616,7 @@
       </p:sp>
       <p:sp>
         <p:nvSpPr>
-          <p:cNvPr id="174" name="TextBox 173"/>
+          <p:cNvPr id="176" name="TextBox 175"/>
           <p:cNvSpPr txBox="1"/>
           <p:nvPr/>
         </p:nvSpPr>
@@ -9570,18 +9640,18 @@
             <a:r>
               <a:rPr sz="650" b="1" i="0">
                 <a:solidFill>
-                  <a:srgbClr val="6B7280"/>
-                </a:solidFill>
-                <a:latin typeface="Calibri"/>
-              </a:rPr>
-              <a:t>~</a:t>
-            </a:r>
-          </a:p>
-        </p:txBody>
-      </p:sp>
-      <p:sp>
-        <p:nvSpPr>
-          <p:cNvPr id="175" name="TextBox 174"/>
+                  <a:srgbClr val="059669"/>
+                </a:solidFill>
+                <a:latin typeface="Calibri"/>
+              </a:rPr>
+              <a:t>FK</a:t>
+            </a:r>
+          </a:p>
+        </p:txBody>
+      </p:sp>
+      <p:sp>
+        <p:nvSpPr>
+          <p:cNvPr id="177" name="TextBox 176"/>
           <p:cNvSpPr txBox="1"/>
           <p:nvPr/>
         </p:nvSpPr>
@@ -9609,14 +9679,14 @@
                 </a:solidFill>
                 <a:latin typeface="Consolas"/>
               </a:rPr>
-              <a:t>PartNo</a:t>
-            </a:r>
-          </a:p>
-        </p:txBody>
-      </p:sp>
-      <p:sp>
-        <p:nvSpPr>
-          <p:cNvPr id="176" name="TextBox 175"/>
+              <a:t>PartId</a:t>
+            </a:r>
+          </a:p>
+        </p:txBody>
+      </p:sp>
+      <p:sp>
+        <p:nvSpPr>
+          <p:cNvPr id="178" name="TextBox 177"/>
           <p:cNvSpPr txBox="1"/>
           <p:nvPr/>
         </p:nvSpPr>
@@ -9651,7 +9721,7 @@
       </p:sp>
       <p:sp>
         <p:nvSpPr>
-          <p:cNvPr id="177" name="TextBox 176"/>
+          <p:cNvPr id="179" name="TextBox 178"/>
           <p:cNvSpPr txBox="1"/>
           <p:nvPr/>
         </p:nvSpPr>
@@ -9686,7 +9756,7 @@
       </p:sp>
       <p:sp>
         <p:nvSpPr>
-          <p:cNvPr id="178" name="Rounded Rectangle 177"/>
+          <p:cNvPr id="180" name="Rounded Rectangle 179"/>
           <p:cNvSpPr/>
           <p:nvPr/>
         </p:nvSpPr>
@@ -9732,7 +9802,7 @@
       </p:sp>
       <p:sp>
         <p:nvSpPr>
-          <p:cNvPr id="179" name="Rectangle 178"/>
+          <p:cNvPr id="181" name="Rectangle 180"/>
           <p:cNvSpPr/>
           <p:nvPr/>
         </p:nvSpPr>
@@ -9776,7 +9846,7 @@
       </p:sp>
       <p:sp>
         <p:nvSpPr>
-          <p:cNvPr id="180" name="TextBox 179"/>
+          <p:cNvPr id="182" name="TextBox 181"/>
           <p:cNvSpPr txBox="1"/>
           <p:nvPr/>
         </p:nvSpPr>
@@ -9811,7 +9881,7 @@
       </p:sp>
       <p:sp>
         <p:nvSpPr>
-          <p:cNvPr id="181" name="TextBox 180"/>
+          <p:cNvPr id="183" name="TextBox 182"/>
           <p:cNvSpPr txBox="1"/>
           <p:nvPr/>
         </p:nvSpPr>
@@ -9846,7 +9916,7 @@
       </p:sp>
       <p:sp>
         <p:nvSpPr>
-          <p:cNvPr id="182" name="TextBox 181"/>
+          <p:cNvPr id="184" name="TextBox 183"/>
           <p:cNvSpPr txBox="1"/>
           <p:nvPr/>
         </p:nvSpPr>
@@ -9881,7 +9951,7 @@
       </p:sp>
       <p:sp>
         <p:nvSpPr>
-          <p:cNvPr id="183" name="TextBox 182"/>
+          <p:cNvPr id="185" name="TextBox 184"/>
           <p:cNvSpPr txBox="1"/>
           <p:nvPr/>
         </p:nvSpPr>
@@ -9905,18 +9975,18 @@
             <a:r>
               <a:rPr sz="650" b="1" i="0">
                 <a:solidFill>
-                  <a:srgbClr val="6B7280"/>
-                </a:solidFill>
-                <a:latin typeface="Calibri"/>
-              </a:rPr>
-              <a:t>~</a:t>
-            </a:r>
-          </a:p>
-        </p:txBody>
-      </p:sp>
-      <p:sp>
-        <p:nvSpPr>
-          <p:cNvPr id="184" name="TextBox 183"/>
+                  <a:srgbClr val="059669"/>
+                </a:solidFill>
+                <a:latin typeface="Calibri"/>
+              </a:rPr>
+              <a:t>FK</a:t>
+            </a:r>
+          </a:p>
+        </p:txBody>
+      </p:sp>
+      <p:sp>
+        <p:nvSpPr>
+          <p:cNvPr id="186" name="TextBox 185"/>
           <p:cNvSpPr txBox="1"/>
           <p:nvPr/>
         </p:nvSpPr>
@@ -9944,14 +10014,14 @@
                 </a:solidFill>
                 <a:latin typeface="Consolas"/>
               </a:rPr>
-              <a:t>PartNo</a:t>
-            </a:r>
-          </a:p>
-        </p:txBody>
-      </p:sp>
-      <p:sp>
-        <p:nvSpPr>
-          <p:cNvPr id="185" name="TextBox 184"/>
+              <a:t>PartId</a:t>
+            </a:r>
+          </a:p>
+        </p:txBody>
+      </p:sp>
+      <p:sp>
+        <p:nvSpPr>
+          <p:cNvPr id="187" name="TextBox 186"/>
           <p:cNvSpPr txBox="1"/>
           <p:nvPr/>
         </p:nvSpPr>
@@ -9986,7 +10056,7 @@
       </p:sp>
       <p:sp>
         <p:nvSpPr>
-          <p:cNvPr id="186" name="TextBox 185"/>
+          <p:cNvPr id="188" name="TextBox 187"/>
           <p:cNvSpPr txBox="1"/>
           <p:nvPr/>
         </p:nvSpPr>
@@ -10021,7 +10091,7 @@
       </p:sp>
       <p:sp>
         <p:nvSpPr>
-          <p:cNvPr id="187" name="Rounded Rectangle 186"/>
+          <p:cNvPr id="189" name="Rounded Rectangle 188"/>
           <p:cNvSpPr/>
           <p:nvPr/>
         </p:nvSpPr>
@@ -10067,7 +10137,7 @@
       </p:sp>
       <p:sp>
         <p:nvSpPr>
-          <p:cNvPr id="188" name="Rectangle 187"/>
+          <p:cNvPr id="190" name="Rectangle 189"/>
           <p:cNvSpPr/>
           <p:nvPr/>
         </p:nvSpPr>
@@ -10111,7 +10181,7 @@
       </p:sp>
       <p:sp>
         <p:nvSpPr>
-          <p:cNvPr id="189" name="TextBox 188"/>
+          <p:cNvPr id="191" name="TextBox 190"/>
           <p:cNvSpPr txBox="1"/>
           <p:nvPr/>
         </p:nvSpPr>
@@ -10146,7 +10216,7 @@
       </p:sp>
       <p:sp>
         <p:nvSpPr>
-          <p:cNvPr id="190" name="TextBox 189"/>
+          <p:cNvPr id="192" name="TextBox 191"/>
           <p:cNvSpPr txBox="1"/>
           <p:nvPr/>
         </p:nvSpPr>
@@ -10181,7 +10251,7 @@
       </p:sp>
       <p:sp>
         <p:nvSpPr>
-          <p:cNvPr id="191" name="TextBox 190"/>
+          <p:cNvPr id="193" name="TextBox 192"/>
           <p:cNvSpPr txBox="1"/>
           <p:nvPr/>
         </p:nvSpPr>
@@ -10216,7 +10286,7 @@
       </p:sp>
       <p:sp>
         <p:nvSpPr>
-          <p:cNvPr id="192" name="TextBox 191"/>
+          <p:cNvPr id="194" name="TextBox 193"/>
           <p:cNvSpPr txBox="1"/>
           <p:nvPr/>
         </p:nvSpPr>
@@ -10251,7 +10321,7 @@
       </p:sp>
       <p:sp>
         <p:nvSpPr>
-          <p:cNvPr id="193" name="Rounded Rectangle 192"/>
+          <p:cNvPr id="195" name="Rounded Rectangle 194"/>
           <p:cNvSpPr/>
           <p:nvPr/>
         </p:nvSpPr>
@@ -10297,7 +10367,7 @@
       </p:sp>
       <p:sp>
         <p:nvSpPr>
-          <p:cNvPr id="194" name="Rectangle 193"/>
+          <p:cNvPr id="196" name="Rectangle 195"/>
           <p:cNvSpPr/>
           <p:nvPr/>
         </p:nvSpPr>
@@ -10341,7 +10411,7 @@
       </p:sp>
       <p:sp>
         <p:nvSpPr>
-          <p:cNvPr id="195" name="TextBox 194"/>
+          <p:cNvPr id="197" name="TextBox 196"/>
           <p:cNvSpPr txBox="1"/>
           <p:nvPr/>
         </p:nvSpPr>
@@ -10376,7 +10446,7 @@
       </p:sp>
       <p:sp>
         <p:nvSpPr>
-          <p:cNvPr id="196" name="TextBox 195"/>
+          <p:cNvPr id="198" name="TextBox 197"/>
           <p:cNvSpPr txBox="1"/>
           <p:nvPr/>
         </p:nvSpPr>
@@ -10411,7 +10481,7 @@
       </p:sp>
       <p:sp>
         <p:nvSpPr>
-          <p:cNvPr id="197" name="TextBox 196"/>
+          <p:cNvPr id="199" name="TextBox 198"/>
           <p:cNvSpPr txBox="1"/>
           <p:nvPr/>
         </p:nvSpPr>
@@ -10446,7 +10516,7 @@
       </p:sp>
       <p:sp>
         <p:nvSpPr>
-          <p:cNvPr id="198" name="TextBox 197"/>
+          <p:cNvPr id="200" name="TextBox 199"/>
           <p:cNvSpPr txBox="1"/>
           <p:nvPr/>
         </p:nvSpPr>
@@ -10481,7 +10551,7 @@
       </p:sp>
       <p:sp>
         <p:nvSpPr>
-          <p:cNvPr id="199" name="TextBox 198"/>
+          <p:cNvPr id="201" name="TextBox 200"/>
           <p:cNvSpPr txBox="1"/>
           <p:nvPr/>
         </p:nvSpPr>
@@ -10516,7 +10586,7 @@
       </p:sp>
       <p:sp>
         <p:nvSpPr>
-          <p:cNvPr id="200" name="TextBox 199"/>
+          <p:cNvPr id="202" name="TextBox 201"/>
           <p:cNvSpPr txBox="1"/>
           <p:nvPr/>
         </p:nvSpPr>
@@ -10540,18 +10610,18 @@
             <a:r>
               <a:rPr sz="650" b="1" i="0">
                 <a:solidFill>
-                  <a:srgbClr val="6B7280"/>
-                </a:solidFill>
-                <a:latin typeface="Calibri"/>
-              </a:rPr>
-              <a:t>~</a:t>
-            </a:r>
-          </a:p>
-        </p:txBody>
-      </p:sp>
-      <p:sp>
-        <p:nvSpPr>
-          <p:cNvPr id="201" name="TextBox 200"/>
+                  <a:srgbClr val="059669"/>
+                </a:solidFill>
+                <a:latin typeface="Calibri"/>
+              </a:rPr>
+              <a:t>FK</a:t>
+            </a:r>
+          </a:p>
+        </p:txBody>
+      </p:sp>
+      <p:sp>
+        <p:nvSpPr>
+          <p:cNvPr id="203" name="TextBox 202"/>
           <p:cNvSpPr txBox="1"/>
           <p:nvPr/>
         </p:nvSpPr>
@@ -10579,83 +10649,11 @@
                 </a:solidFill>
                 <a:latin typeface="Consolas"/>
               </a:rPr>
-              <a:t>PartNo</a:t>
-            </a:r>
-          </a:p>
-        </p:txBody>
-      </p:sp>
-      <p:cxnSp>
-        <p:nvCxnSpPr>
-          <p:cNvPr id="202" name="Connector 201"/>
-          <p:cNvCxnSpPr/>
-          <p:nvPr/>
-        </p:nvCxnSpPr>
-        <p:spPr>
-          <a:xfrm>
-            <a:off x="937259" y="1266444"/>
-            <a:ext cx="3017521" cy="1408176"/>
-          </a:xfrm>
-          <a:prstGeom prst="line">
-            <a:avLst/>
-          </a:prstGeom>
-          <a:ln w="19050">
-            <a:solidFill>
-              <a:srgbClr val="64748B"/>
-            </a:solidFill>
-          </a:ln>
-          <a:effectLst/>
-        </p:spPr>
-        <p:style>
-          <a:lnRef idx="2">
-            <a:schemeClr val="accent1"/>
-          </a:lnRef>
-          <a:fillRef idx="0">
-            <a:schemeClr val="accent1"/>
-          </a:fillRef>
-          <a:effectRef idx="1">
-            <a:schemeClr val="accent1"/>
-          </a:effectRef>
-          <a:fontRef idx="minor">
-            <a:schemeClr val="tx1"/>
-          </a:fontRef>
-        </p:style>
-      </p:cxnSp>
-      <p:cxnSp>
-        <p:nvCxnSpPr>
-          <p:cNvPr id="203" name="Connector 202"/>
-          <p:cNvCxnSpPr/>
-          <p:nvPr/>
-        </p:nvCxnSpPr>
-        <p:spPr>
-          <a:xfrm flipV="1">
-            <a:off x="3954780" y="2596896"/>
-            <a:ext cx="3131820" cy="77724"/>
-          </a:xfrm>
-          <a:prstGeom prst="line">
-            <a:avLst/>
-          </a:prstGeom>
-          <a:ln w="19050">
-            <a:solidFill>
-              <a:srgbClr val="64748B"/>
-            </a:solidFill>
-          </a:ln>
-          <a:effectLst/>
-        </p:spPr>
-        <p:style>
-          <a:lnRef idx="2">
-            <a:schemeClr val="accent1"/>
-          </a:lnRef>
-          <a:fillRef idx="0">
-            <a:schemeClr val="accent1"/>
-          </a:fillRef>
-          <a:effectRef idx="1">
-            <a:schemeClr val="accent1"/>
-          </a:effectRef>
-          <a:fontRef idx="minor">
-            <a:schemeClr val="tx1"/>
-          </a:fontRef>
-        </p:style>
-      </p:cxnSp>
+              <a:t>PartId</a:t>
+            </a:r>
+          </a:p>
+        </p:txBody>
+      </p:sp>
       <p:cxnSp>
         <p:nvCxnSpPr>
           <p:cNvPr id="204" name="Connector 203"/>
@@ -10663,14 +10661,14 @@
           <p:nvPr/>
         </p:nvCxnSpPr>
         <p:spPr>
-          <a:xfrm flipV="1">
-            <a:off x="3954780" y="2596896"/>
-            <a:ext cx="4823460" cy="77724"/>
+          <a:xfrm>
+            <a:off x="937259" y="1266444"/>
+            <a:ext cx="3017521" cy="1408176"/>
           </a:xfrm>
           <a:prstGeom prst="line">
             <a:avLst/>
           </a:prstGeom>
-          <a:ln w="19050">
+          <a:ln w="16510">
             <a:solidFill>
               <a:srgbClr val="64748B"/>
             </a:solidFill>
@@ -10699,14 +10697,14 @@
           <p:nvPr/>
         </p:nvCxnSpPr>
         <p:spPr>
-          <a:xfrm>
-            <a:off x="3954780" y="2674620"/>
-            <a:ext cx="3131820" cy="1019556"/>
+          <a:xfrm flipV="1">
+            <a:off x="3954780" y="2596896"/>
+            <a:ext cx="3131820" cy="77724"/>
           </a:xfrm>
           <a:prstGeom prst="line">
             <a:avLst/>
           </a:prstGeom>
-          <a:ln w="19050">
+          <a:ln w="16510">
             <a:solidFill>
               <a:srgbClr val="64748B"/>
             </a:solidFill>
@@ -10735,14 +10733,14 @@
           <p:nvPr/>
         </p:nvCxnSpPr>
         <p:spPr>
-          <a:xfrm>
-            <a:off x="3863339" y="1266444"/>
-            <a:ext cx="3223261" cy="1330452"/>
+          <a:xfrm flipV="1">
+            <a:off x="3954780" y="2596896"/>
+            <a:ext cx="4823460" cy="77724"/>
           </a:xfrm>
           <a:prstGeom prst="line">
             <a:avLst/>
           </a:prstGeom>
-          <a:ln w="19050">
+          <a:ln w="16510">
             <a:solidFill>
               <a:srgbClr val="64748B"/>
             </a:solidFill>
@@ -10772,13 +10770,13 @@
         </p:nvCxnSpPr>
         <p:spPr>
           <a:xfrm>
-            <a:off x="5326379" y="1266444"/>
-            <a:ext cx="45721" cy="1252728"/>
+            <a:off x="3954780" y="2674620"/>
+            <a:ext cx="3131820" cy="1097280"/>
           </a:xfrm>
           <a:prstGeom prst="line">
             <a:avLst/>
           </a:prstGeom>
-          <a:ln w="19050">
+          <a:ln w="16510">
             <a:solidFill>
               <a:srgbClr val="64748B"/>
             </a:solidFill>
@@ -10807,14 +10805,14 @@
           <p:nvPr/>
         </p:nvCxnSpPr>
         <p:spPr>
-          <a:xfrm>
-            <a:off x="982980" y="2441448"/>
-            <a:ext cx="0" cy="900684"/>
+          <a:xfrm flipV="1">
+            <a:off x="7086600" y="2596896"/>
+            <a:ext cx="1691640" cy="1175004"/>
           </a:xfrm>
           <a:prstGeom prst="line">
             <a:avLst/>
           </a:prstGeom>
-          <a:ln w="19050">
+          <a:ln w="16510">
             <a:solidFill>
               <a:srgbClr val="64748B"/>
             </a:solidFill>
@@ -10844,13 +10842,13 @@
         </p:nvCxnSpPr>
         <p:spPr>
           <a:xfrm>
-            <a:off x="1051560" y="4805172"/>
-            <a:ext cx="1691640" cy="0"/>
+            <a:off x="3863339" y="1266444"/>
+            <a:ext cx="3223261" cy="1330452"/>
           </a:xfrm>
           <a:prstGeom prst="line">
             <a:avLst/>
           </a:prstGeom>
-          <a:ln w="19050">
+          <a:ln w="16510">
             <a:solidFill>
               <a:srgbClr val="64748B"/>
             </a:solidFill>
@@ -10879,14 +10877,14 @@
           <p:nvPr/>
         </p:nvCxnSpPr>
         <p:spPr>
-          <a:xfrm flipH="1">
-            <a:off x="1051560" y="1266444"/>
-            <a:ext cx="1348740" cy="3538728"/>
+          <a:xfrm>
+            <a:off x="5326379" y="1266444"/>
+            <a:ext cx="45721" cy="1252728"/>
           </a:xfrm>
           <a:prstGeom prst="line">
             <a:avLst/>
           </a:prstGeom>
-          <a:ln w="19050">
+          <a:ln w="16510">
             <a:solidFill>
               <a:srgbClr val="64748B"/>
             </a:solidFill>
@@ -10916,13 +10914,13 @@
         </p:nvCxnSpPr>
         <p:spPr>
           <a:xfrm>
-            <a:off x="1051560" y="5779008"/>
-            <a:ext cx="1691640" cy="77724"/>
+            <a:off x="982980" y="2441448"/>
+            <a:ext cx="0" cy="900684"/>
           </a:xfrm>
           <a:prstGeom prst="line">
             <a:avLst/>
           </a:prstGeom>
-          <a:ln w="19050">
+          <a:ln w="16510">
             <a:solidFill>
               <a:srgbClr val="64748B"/>
             </a:solidFill>
@@ -10952,13 +10950,13 @@
         </p:nvCxnSpPr>
         <p:spPr>
           <a:xfrm>
-            <a:off x="6126479" y="4727448"/>
-            <a:ext cx="0" cy="1129284"/>
+            <a:off x="1051560" y="4805172"/>
+            <a:ext cx="1691640" cy="0"/>
           </a:xfrm>
           <a:prstGeom prst="line">
             <a:avLst/>
           </a:prstGeom>
-          <a:ln w="19050">
+          <a:ln w="16510">
             <a:solidFill>
               <a:srgbClr val="64748B"/>
             </a:solidFill>
@@ -10988,17 +10986,16 @@
         </p:nvCxnSpPr>
         <p:spPr>
           <a:xfrm flipH="1">
-            <a:off x="3954780" y="2519172"/>
-            <a:ext cx="1417320" cy="155448"/>
+            <a:off x="1051560" y="1266444"/>
+            <a:ext cx="1348740" cy="3538728"/>
           </a:xfrm>
           <a:prstGeom prst="line">
             <a:avLst/>
           </a:prstGeom>
-          <a:ln w="12700">
+          <a:ln w="16510">
             <a:solidFill>
-              <a:srgbClr val="C06A2A"/>
+              <a:srgbClr val="64748B"/>
             </a:solidFill>
-            <a:prstDash val="dash"/>
           </a:ln>
           <a:effectLst/>
         </p:spPr>
@@ -11024,18 +11021,17 @@
           <p:nvPr/>
         </p:nvCxnSpPr>
         <p:spPr>
-          <a:xfrm flipV="1">
-            <a:off x="982980" y="2674620"/>
-            <a:ext cx="2971800" cy="667512"/>
+          <a:xfrm>
+            <a:off x="1051560" y="5779008"/>
+            <a:ext cx="1691640" cy="77724"/>
           </a:xfrm>
           <a:prstGeom prst="line">
             <a:avLst/>
           </a:prstGeom>
-          <a:ln w="12700">
+          <a:ln w="16510">
             <a:solidFill>
-              <a:srgbClr val="C06A2A"/>
+              <a:srgbClr val="64748B"/>
             </a:solidFill>
-            <a:prstDash val="dash"/>
           </a:ln>
           <a:effectLst/>
         </p:spPr>
@@ -11061,18 +11057,17 @@
           <p:nvPr/>
         </p:nvCxnSpPr>
         <p:spPr>
-          <a:xfrm flipV="1">
-            <a:off x="2743200" y="2674620"/>
-            <a:ext cx="1211580" cy="2130552"/>
+          <a:xfrm>
+            <a:off x="6126479" y="4727448"/>
+            <a:ext cx="0" cy="1129284"/>
           </a:xfrm>
           <a:prstGeom prst="line">
             <a:avLst/>
           </a:prstGeom>
-          <a:ln w="12700">
+          <a:ln w="16510">
             <a:solidFill>
-              <a:srgbClr val="C06A2A"/>
+              <a:srgbClr val="64748B"/>
             </a:solidFill>
-            <a:prstDash val="dash"/>
           </a:ln>
           <a:effectLst/>
         </p:spPr>
@@ -11100,16 +11095,15 @@
         <p:spPr>
           <a:xfrm flipV="1">
             <a:off x="2743200" y="2674620"/>
-            <a:ext cx="1211580" cy="3182112"/>
+            <a:ext cx="1211580" cy="2130552"/>
           </a:xfrm>
           <a:prstGeom prst="line">
             <a:avLst/>
           </a:prstGeom>
-          <a:ln w="12700">
+          <a:ln w="16510">
             <a:solidFill>
-              <a:srgbClr val="C06A2A"/>
+              <a:srgbClr val="64748B"/>
             </a:solidFill>
-            <a:prstDash val="dash"/>
           </a:ln>
           <a:effectLst/>
         </p:spPr>
@@ -11135,18 +11129,17 @@
           <p:nvPr/>
         </p:nvCxnSpPr>
         <p:spPr>
-          <a:xfrm flipH="1" flipV="1">
-            <a:off x="3954780" y="2674620"/>
-            <a:ext cx="480060" cy="2130552"/>
+          <a:xfrm flipV="1">
+            <a:off x="2743200" y="2674620"/>
+            <a:ext cx="1211580" cy="3182112"/>
           </a:xfrm>
           <a:prstGeom prst="line">
             <a:avLst/>
           </a:prstGeom>
-          <a:ln w="12700">
+          <a:ln w="16510">
             <a:solidFill>
-              <a:srgbClr val="C06A2A"/>
+              <a:srgbClr val="64748B"/>
             </a:solidFill>
-            <a:prstDash val="dash"/>
           </a:ln>
           <a:effectLst/>
         </p:spPr>
@@ -11174,16 +11167,15 @@
         <p:spPr>
           <a:xfrm flipH="1" flipV="1">
             <a:off x="3954780" y="2674620"/>
-            <a:ext cx="480060" cy="3182112"/>
+            <a:ext cx="480060" cy="2130552"/>
           </a:xfrm>
           <a:prstGeom prst="line">
             <a:avLst/>
           </a:prstGeom>
-          <a:ln w="12700">
+          <a:ln w="16510">
             <a:solidFill>
-              <a:srgbClr val="C06A2A"/>
+              <a:srgbClr val="64748B"/>
             </a:solidFill>
-            <a:prstDash val="dash"/>
           </a:ln>
           <a:effectLst/>
         </p:spPr>
@@ -11211,16 +11203,15 @@
         <p:spPr>
           <a:xfrm flipH="1" flipV="1">
             <a:off x="3954780" y="2674620"/>
-            <a:ext cx="2171699" cy="3182112"/>
+            <a:ext cx="480060" cy="3182112"/>
           </a:xfrm>
           <a:prstGeom prst="line">
             <a:avLst/>
           </a:prstGeom>
-          <a:ln w="12700">
+          <a:ln w="16510">
             <a:solidFill>
-              <a:srgbClr val="C06A2A"/>
+              <a:srgbClr val="64748B"/>
             </a:solidFill>
-            <a:prstDash val="dash"/>
           </a:ln>
           <a:effectLst/>
         </p:spPr>
@@ -11246,6 +11237,114 @@
           <p:nvPr/>
         </p:nvCxnSpPr>
         <p:spPr>
+          <a:xfrm flipH="1" flipV="1">
+            <a:off x="3954780" y="2674620"/>
+            <a:ext cx="2171699" cy="3182112"/>
+          </a:xfrm>
+          <a:prstGeom prst="line">
+            <a:avLst/>
+          </a:prstGeom>
+          <a:ln w="16510">
+            <a:solidFill>
+              <a:srgbClr val="64748B"/>
+            </a:solidFill>
+          </a:ln>
+          <a:effectLst/>
+        </p:spPr>
+        <p:style>
+          <a:lnRef idx="2">
+            <a:schemeClr val="accent1"/>
+          </a:lnRef>
+          <a:fillRef idx="0">
+            <a:schemeClr val="accent1"/>
+          </a:fillRef>
+          <a:effectRef idx="1">
+            <a:schemeClr val="accent1"/>
+          </a:effectRef>
+          <a:fontRef idx="minor">
+            <a:schemeClr val="tx1"/>
+          </a:fontRef>
+        </p:style>
+      </p:cxnSp>
+      <p:cxnSp>
+        <p:nvCxnSpPr>
+          <p:cNvPr id="221" name="Connector 220"/>
+          <p:cNvCxnSpPr/>
+          <p:nvPr/>
+        </p:nvCxnSpPr>
+        <p:spPr>
+          <a:xfrm flipH="1">
+            <a:off x="3954780" y="2519172"/>
+            <a:ext cx="1417320" cy="155448"/>
+          </a:xfrm>
+          <a:prstGeom prst="line">
+            <a:avLst/>
+          </a:prstGeom>
+          <a:ln w="16510">
+            <a:solidFill>
+              <a:srgbClr val="64748B"/>
+            </a:solidFill>
+          </a:ln>
+          <a:effectLst/>
+        </p:spPr>
+        <p:style>
+          <a:lnRef idx="2">
+            <a:schemeClr val="accent1"/>
+          </a:lnRef>
+          <a:fillRef idx="0">
+            <a:schemeClr val="accent1"/>
+          </a:fillRef>
+          <a:effectRef idx="1">
+            <a:schemeClr val="accent1"/>
+          </a:effectRef>
+          <a:fontRef idx="minor">
+            <a:schemeClr val="tx1"/>
+          </a:fontRef>
+        </p:style>
+      </p:cxnSp>
+      <p:cxnSp>
+        <p:nvCxnSpPr>
+          <p:cNvPr id="222" name="Connector 221"/>
+          <p:cNvCxnSpPr/>
+          <p:nvPr/>
+        </p:nvCxnSpPr>
+        <p:spPr>
+          <a:xfrm flipV="1">
+            <a:off x="982980" y="2674620"/>
+            <a:ext cx="2971800" cy="667512"/>
+          </a:xfrm>
+          <a:prstGeom prst="line">
+            <a:avLst/>
+          </a:prstGeom>
+          <a:ln w="16510">
+            <a:solidFill>
+              <a:srgbClr val="64748B"/>
+            </a:solidFill>
+          </a:ln>
+          <a:effectLst/>
+        </p:spPr>
+        <p:style>
+          <a:lnRef idx="2">
+            <a:schemeClr val="accent1"/>
+          </a:lnRef>
+          <a:fillRef idx="0">
+            <a:schemeClr val="accent1"/>
+          </a:fillRef>
+          <a:effectRef idx="1">
+            <a:schemeClr val="accent1"/>
+          </a:effectRef>
+          <a:fontRef idx="minor">
+            <a:schemeClr val="tx1"/>
+          </a:fontRef>
+        </p:style>
+      </p:cxnSp>
+      <p:cxnSp>
+        <p:nvCxnSpPr>
+          <p:cNvPr id="223" name="Connector 222"/>
+          <p:cNvCxnSpPr/>
+          <p:nvPr/>
+        </p:nvCxnSpPr>
+        <p:spPr>
           <a:xfrm flipV="1">
             <a:off x="1051560" y="2674620"/>
             <a:ext cx="2903220" cy="3104388"/>
@@ -11276,9 +11375,46 @@
           </a:fontRef>
         </p:style>
       </p:cxnSp>
-      <p:sp>
-        <p:nvSpPr>
-          <p:cNvPr id="221" name="Rectangle 220"/>
+      <p:cxnSp>
+        <p:nvCxnSpPr>
+          <p:cNvPr id="224" name="Connector 223"/>
+          <p:cNvCxnSpPr/>
+          <p:nvPr/>
+        </p:nvCxnSpPr>
+        <p:spPr>
+          <a:xfrm flipV="1">
+            <a:off x="2446020" y="2674620"/>
+            <a:ext cx="1508760" cy="589788"/>
+          </a:xfrm>
+          <a:prstGeom prst="line">
+            <a:avLst/>
+          </a:prstGeom>
+          <a:ln w="12700">
+            <a:solidFill>
+              <a:srgbClr val="C06A2A"/>
+            </a:solidFill>
+            <a:prstDash val="dash"/>
+          </a:ln>
+          <a:effectLst/>
+        </p:spPr>
+        <p:style>
+          <a:lnRef idx="2">
+            <a:schemeClr val="accent1"/>
+          </a:lnRef>
+          <a:fillRef idx="0">
+            <a:schemeClr val="accent1"/>
+          </a:fillRef>
+          <a:effectRef idx="1">
+            <a:schemeClr val="accent1"/>
+          </a:effectRef>
+          <a:fontRef idx="minor">
+            <a:schemeClr val="tx1"/>
+          </a:fontRef>
+        </p:style>
+      </p:cxnSp>
+      <p:sp>
+        <p:nvSpPr>
+          <p:cNvPr id="225" name="Rectangle 224"/>
           <p:cNvSpPr/>
           <p:nvPr/>
         </p:nvSpPr>
@@ -11322,14 +11458,14 @@
       </p:sp>
       <p:sp>
         <p:nvSpPr>
-          <p:cNvPr id="222" name="TextBox 221"/>
+          <p:cNvPr id="226" name="TextBox 225"/>
           <p:cNvSpPr txBox="1"/>
           <p:nvPr/>
         </p:nvSpPr>
         <p:spPr>
           <a:xfrm>
             <a:off x="777240" y="6437376"/>
-            <a:ext cx="1463040" cy="182880"/>
+            <a:ext cx="1645920" cy="182880"/>
           </a:xfrm>
           <a:prstGeom prst="rect">
             <a:avLst/>
@@ -11357,13 +11493,13 @@
       </p:sp>
       <p:sp>
         <p:nvSpPr>
-          <p:cNvPr id="223" name="Rectangle 222"/>
+          <p:cNvPr id="227" name="Rectangle 226"/>
           <p:cNvSpPr/>
           <p:nvPr/>
         </p:nvSpPr>
         <p:spPr>
           <a:xfrm>
-            <a:off x="2377440" y="6510528"/>
+            <a:off x="2468880" y="6510528"/>
             <a:ext cx="457200" cy="36576"/>
           </a:xfrm>
           <a:prstGeom prst="rect">
@@ -11401,14 +11537,14 @@
       </p:sp>
       <p:sp>
         <p:nvSpPr>
-          <p:cNvPr id="224" name="TextBox 223"/>
-          <p:cNvSpPr txBox="1"/>
-          <p:nvPr/>
-        </p:nvSpPr>
-        <p:spPr>
-          <a:xfrm>
-            <a:off x="2880360" y="6437376"/>
-            <a:ext cx="2743200" cy="182880"/>
+          <p:cNvPr id="228" name="TextBox 227"/>
+          <p:cNvSpPr txBox="1"/>
+          <p:nvPr/>
+        </p:nvSpPr>
+        <p:spPr>
+          <a:xfrm>
+            <a:off x="2971800" y="6437376"/>
+            <a:ext cx="3657600" cy="182880"/>
           </a:xfrm>
           <a:prstGeom prst="rect">
             <a:avLst/>
@@ -11429,21 +11565,21 @@
                 </a:solidFill>
                 <a:latin typeface="Calibri"/>
               </a:rPr>
-              <a:t>loose link by PartNo (no FK)</a:t>
-            </a:r>
-          </a:p>
-        </p:txBody>
-      </p:sp>
-      <p:sp>
-        <p:nvSpPr>
-          <p:cNvPr id="225" name="TextBox 224"/>
-          <p:cNvSpPr txBox="1"/>
-          <p:nvPr/>
-        </p:nvSpPr>
-        <p:spPr>
-          <a:xfrm>
-            <a:off x="5852160" y="6437376"/>
-            <a:ext cx="3657600" cy="182880"/>
+              <a:t>loose link by PartNo (Ticket, EquivalentPart)</a:t>
+            </a:r>
+          </a:p>
+        </p:txBody>
+      </p:sp>
+      <p:sp>
+        <p:nvSpPr>
+          <p:cNvPr id="229" name="TextBox 228"/>
+          <p:cNvSpPr txBox="1"/>
+          <p:nvPr/>
+        </p:nvSpPr>
+        <p:spPr>
+          <a:xfrm>
+            <a:off x="6949440" y="6437376"/>
+            <a:ext cx="4937760" cy="182880"/>
           </a:xfrm>
           <a:prstGeom prst="rect">
             <a:avLst/>
@@ -11464,7 +11600,7 @@
                 </a:solidFill>
                 <a:latin typeface="Calibri"/>
               </a:rPr>
-              <a:t>~ = อ้างด้วย string PartNo / int LocationId</a:t>
+              <a:t>~ = อ้างด้วย string PartNo / int LocationId (LocationId ยังไม่เป็น FK)</a:t>
             </a:r>
           </a:p>
         </p:txBody>
@@ -13512,7 +13648,7 @@
         <p:spPr>
           <a:xfrm>
             <a:off x="4251960" y="1444752"/>
-            <a:ext cx="3840480" cy="1933955"/>
+            <a:ext cx="3840480" cy="2148839"/>
           </a:xfrm>
           <a:prstGeom prst="rect">
             <a:avLst/>
@@ -13973,7 +14109,7 @@
                 </a:solidFill>
                 <a:latin typeface="Consolas"/>
               </a:rPr>
-              <a:t>PartNo</a:t>
+              <a:t>PartId</a:t>
             </a:r>
           </a:p>
         </p:txBody>
@@ -14008,7 +14144,7 @@
                 </a:solidFill>
                 <a:latin typeface="Consolas"/>
               </a:rPr>
-              <a:t>varchar(50)</a:t>
+              <a:t>int</a:t>
             </a:r>
           </a:p>
         </p:txBody>
@@ -14074,11 +14210,11 @@
             <a:r>
               <a:rPr sz="800" b="1" i="0">
                 <a:solidFill>
-                  <a:srgbClr val="B45309"/>
-                </a:solidFill>
-                <a:latin typeface="Calibri"/>
-              </a:rPr>
-              <a:t>~</a:t>
+                  <a:srgbClr val="059669"/>
+                </a:solidFill>
+                <a:latin typeface="Calibri"/>
+              </a:rPr>
+              <a:t>FK</a:t>
             </a:r>
           </a:p>
         </p:txBody>
@@ -14113,7 +14249,7 @@
                 </a:solidFill>
                 <a:latin typeface="Calibri"/>
               </a:rPr>
-              <a:t>อ้าง Part.PartNo</a:t>
+              <a:t>→ Part (Restrict)</a:t>
             </a:r>
           </a:p>
         </p:txBody>
@@ -14192,7 +14328,7 @@
                 </a:solidFill>
                 <a:latin typeface="Consolas"/>
               </a:rPr>
-              <a:t>LocationId</a:t>
+              <a:t>PartNo</a:t>
             </a:r>
           </a:p>
         </p:txBody>
@@ -14227,7 +14363,7 @@
                 </a:solidFill>
                 <a:latin typeface="Consolas"/>
               </a:rPr>
-              <a:t>int</a:t>
+              <a:t>varchar(50)</a:t>
             </a:r>
           </a:p>
         </p:txBody>
@@ -14297,7 +14433,7 @@
                 </a:solidFill>
                 <a:latin typeface="Calibri"/>
               </a:rPr>
-              <a:t>คลังที่นับ</a:t>
+              <a:t>snapshot</a:t>
             </a:r>
           </a:p>
         </p:txBody>
@@ -14332,7 +14468,7 @@
                 </a:solidFill>
                 <a:latin typeface="Consolas"/>
               </a:rPr>
-              <a:t>SystemQty</a:t>
+              <a:t>LocationId</a:t>
             </a:r>
           </a:p>
         </p:txBody>
@@ -14437,7 +14573,7 @@
                 </a:solidFill>
                 <a:latin typeface="Calibri"/>
               </a:rPr>
-              <a:t>ยอดระบบ ณ ตอนเริ่มนับ</a:t>
+              <a:t>คลังที่นับ</a:t>
             </a:r>
           </a:p>
         </p:txBody>
@@ -14516,7 +14652,7 @@
                 </a:solidFill>
                 <a:latin typeface="Consolas"/>
               </a:rPr>
-              <a:t>PhysicalQty</a:t>
+              <a:t>SystemQty</a:t>
             </a:r>
           </a:p>
         </p:txBody>
@@ -14582,11 +14718,11 @@
             <a:r>
               <a:rPr sz="700" b="0" i="0">
                 <a:solidFill>
-                  <a:srgbClr val="6B7280"/>
-                </a:solidFill>
-                <a:latin typeface="Calibri"/>
-              </a:rPr>
-              <a:t>Y</a:t>
+                  <a:srgbClr val="B0B0B0"/>
+                </a:solidFill>
+                <a:latin typeface="Calibri"/>
+              </a:rPr>
+              <a:t>—</a:t>
             </a:r>
           </a:p>
         </p:txBody>
@@ -14621,7 +14757,7 @@
                 </a:solidFill>
                 <a:latin typeface="Calibri"/>
               </a:rPr>
-              <a:t>ยอดนับจริง</a:t>
+              <a:t>ยอดระบบ ณ ตอนเริ่มนับ</a:t>
             </a:r>
           </a:p>
         </p:txBody>
@@ -14656,7 +14792,7 @@
                 </a:solidFill>
                 <a:latin typeface="Consolas"/>
               </a:rPr>
-              <a:t>Variance</a:t>
+              <a:t>PhysicalQty</a:t>
             </a:r>
           </a:p>
         </p:txBody>
@@ -14691,7 +14827,7 @@
                 </a:solidFill>
                 <a:latin typeface="Consolas"/>
               </a:rPr>
-              <a:t>int (computed)</a:t>
+              <a:t>int</a:t>
             </a:r>
           </a:p>
         </p:txBody>
@@ -14722,11 +14858,11 @@
             <a:r>
               <a:rPr sz="700" b="0" i="0">
                 <a:solidFill>
-                  <a:srgbClr val="B0B0B0"/>
-                </a:solidFill>
-                <a:latin typeface="Calibri"/>
-              </a:rPr>
-              <a:t>—</a:t>
+                  <a:srgbClr val="6B7280"/>
+                </a:solidFill>
+                <a:latin typeface="Calibri"/>
+              </a:rPr>
+              <a:t>Y</a:t>
             </a:r>
           </a:p>
         </p:txBody>
@@ -14761,7 +14897,7 @@
                 </a:solidFill>
                 <a:latin typeface="Calibri"/>
               </a:rPr>
-              <a:t>ผลต่าง = Physical - System (ไม่เก็บ)</a:t>
+              <a:t>ยอดนับจริง</a:t>
             </a:r>
           </a:p>
         </p:txBody>
@@ -14840,7 +14976,7 @@
                 </a:solidFill>
                 <a:latin typeface="Consolas"/>
               </a:rPr>
-              <a:t>AdjustApproved</a:t>
+              <a:t>Variance</a:t>
             </a:r>
           </a:p>
         </p:txBody>
@@ -14875,7 +15011,7 @@
                 </a:solidFill>
                 <a:latin typeface="Consolas"/>
               </a:rPr>
-              <a:t>tinyint(1)</a:t>
+              <a:t>int (computed)</a:t>
             </a:r>
           </a:p>
         </p:txBody>
@@ -14945,7 +15081,7 @@
                 </a:solidFill>
                 <a:latin typeface="Calibri"/>
               </a:rPr>
-              <a:t>อนุมัติปรับยอด</a:t>
+              <a:t>ผลต่าง = Physical - System (ไม่เก็บ)</a:t>
             </a:r>
           </a:p>
         </p:txBody>
@@ -14980,7 +15116,7 @@
                 </a:solidFill>
                 <a:latin typeface="Consolas"/>
               </a:rPr>
-              <a:t>Remarks</a:t>
+              <a:t>AdjustApproved</a:t>
             </a:r>
           </a:p>
         </p:txBody>
@@ -15015,7 +15151,7 @@
                 </a:solidFill>
                 <a:latin typeface="Consolas"/>
               </a:rPr>
-              <a:t>varchar(500)</a:t>
+              <a:t>tinyint(1)</a:t>
             </a:r>
           </a:p>
         </p:txBody>
@@ -15046,11 +15182,11 @@
             <a:r>
               <a:rPr sz="700" b="0" i="0">
                 <a:solidFill>
-                  <a:srgbClr val="6B7280"/>
-                </a:solidFill>
-                <a:latin typeface="Calibri"/>
-              </a:rPr>
-              <a:t>Y</a:t>
+                  <a:srgbClr val="B0B0B0"/>
+                </a:solidFill>
+                <a:latin typeface="Calibri"/>
+              </a:rPr>
+              <a:t>—</a:t>
             </a:r>
           </a:p>
         </p:txBody>
@@ -15085,6 +15221,190 @@
                 </a:solidFill>
                 <a:latin typeface="Calibri"/>
               </a:rPr>
+              <a:t>อนุมัติปรับยอด</a:t>
+            </a:r>
+          </a:p>
+        </p:txBody>
+      </p:sp>
+      <p:sp>
+        <p:nvSpPr>
+          <p:cNvPr id="101" name="Rectangle 100"/>
+          <p:cNvSpPr/>
+          <p:nvPr/>
+        </p:nvSpPr>
+        <p:spPr>
+          <a:xfrm>
+            <a:off x="4270248" y="3378708"/>
+            <a:ext cx="3803904" cy="214884"/>
+          </a:xfrm>
+          <a:prstGeom prst="rect">
+            <a:avLst/>
+          </a:prstGeom>
+          <a:solidFill>
+            <a:srgbClr val="F3F6FB"/>
+          </a:solidFill>
+          <a:ln>
+            <a:noFill/>
+          </a:ln>
+          <a:effectLst/>
+        </p:spPr>
+        <p:style>
+          <a:lnRef idx="1">
+            <a:schemeClr val="accent1"/>
+          </a:lnRef>
+          <a:fillRef idx="3">
+            <a:schemeClr val="accent1"/>
+          </a:fillRef>
+          <a:effectRef idx="2">
+            <a:schemeClr val="accent1"/>
+          </a:effectRef>
+          <a:fontRef idx="minor">
+            <a:schemeClr val="lt1"/>
+          </a:fontRef>
+        </p:style>
+        <p:txBody>
+          <a:bodyPr rtlCol="0" anchor="ctr"/>
+          <a:lstStyle/>
+          <a:p>
+            <a:pPr algn="ctr"/>
+          </a:p>
+        </p:txBody>
+      </p:sp>
+      <p:sp>
+        <p:nvSpPr>
+          <p:cNvPr id="102" name="TextBox 101"/>
+          <p:cNvSpPr txBox="1"/>
+          <p:nvPr/>
+        </p:nvSpPr>
+        <p:spPr>
+          <a:xfrm>
+            <a:off x="4297680" y="3378708"/>
+            <a:ext cx="810158" cy="214884"/>
+          </a:xfrm>
+          <a:prstGeom prst="rect">
+            <a:avLst/>
+          </a:prstGeom>
+          <a:noFill/>
+        </p:spPr>
+        <p:txBody>
+          <a:bodyPr wrap="square" lIns="27432" rIns="27432" tIns="0" bIns="0" anchor="ctr">
+            <a:spAutoFit/>
+          </a:bodyPr>
+          <a:lstStyle/>
+          <a:p>
+            <a:pPr algn="l"/>
+            <a:r>
+              <a:rPr sz="850" b="1" i="0">
+                <a:solidFill>
+                  <a:srgbClr val="1E2D40"/>
+                </a:solidFill>
+                <a:latin typeface="Consolas"/>
+              </a:rPr>
+              <a:t>Remarks</a:t>
+            </a:r>
+          </a:p>
+        </p:txBody>
+      </p:sp>
+      <p:sp>
+        <p:nvSpPr>
+          <p:cNvPr id="103" name="TextBox 102"/>
+          <p:cNvSpPr txBox="1"/>
+          <p:nvPr/>
+        </p:nvSpPr>
+        <p:spPr>
+          <a:xfrm>
+            <a:off x="5180990" y="3378708"/>
+            <a:ext cx="656539" cy="214884"/>
+          </a:xfrm>
+          <a:prstGeom prst="rect">
+            <a:avLst/>
+          </a:prstGeom>
+          <a:noFill/>
+        </p:spPr>
+        <p:txBody>
+          <a:bodyPr wrap="square" lIns="27432" rIns="27432" tIns="0" bIns="0" anchor="ctr">
+            <a:spAutoFit/>
+          </a:bodyPr>
+          <a:lstStyle/>
+          <a:p>
+            <a:pPr algn="l"/>
+            <a:r>
+              <a:rPr sz="800" b="0" i="0">
+                <a:solidFill>
+                  <a:srgbClr val="2563EB"/>
+                </a:solidFill>
+                <a:latin typeface="Consolas"/>
+              </a:rPr>
+              <a:t>varchar(500)</a:t>
+            </a:r>
+          </a:p>
+        </p:txBody>
+      </p:sp>
+      <p:sp>
+        <p:nvSpPr>
+          <p:cNvPr id="104" name="TextBox 103"/>
+          <p:cNvSpPr txBox="1"/>
+          <p:nvPr/>
+        </p:nvSpPr>
+        <p:spPr>
+          <a:xfrm>
+            <a:off x="5864961" y="3378708"/>
+            <a:ext cx="268833" cy="214884"/>
+          </a:xfrm>
+          <a:prstGeom prst="rect">
+            <a:avLst/>
+          </a:prstGeom>
+          <a:noFill/>
+        </p:spPr>
+        <p:txBody>
+          <a:bodyPr wrap="square" lIns="27432" rIns="27432" tIns="0" bIns="0" anchor="ctr">
+            <a:spAutoFit/>
+          </a:bodyPr>
+          <a:lstStyle/>
+          <a:p>
+            <a:pPr algn="ctr"/>
+            <a:r>
+              <a:rPr sz="700" b="0" i="0">
+                <a:solidFill>
+                  <a:srgbClr val="6B7280"/>
+                </a:solidFill>
+                <a:latin typeface="Calibri"/>
+              </a:rPr>
+              <a:t>Y</a:t>
+            </a:r>
+          </a:p>
+        </p:txBody>
+      </p:sp>
+      <p:sp>
+        <p:nvSpPr>
+          <p:cNvPr id="105" name="TextBox 104"/>
+          <p:cNvSpPr txBox="1"/>
+          <p:nvPr/>
+        </p:nvSpPr>
+        <p:spPr>
+          <a:xfrm>
+            <a:off x="6448348" y="3378708"/>
+            <a:ext cx="1616659" cy="214884"/>
+          </a:xfrm>
+          <a:prstGeom prst="rect">
+            <a:avLst/>
+          </a:prstGeom>
+          <a:noFill/>
+        </p:spPr>
+        <p:txBody>
+          <a:bodyPr wrap="square" lIns="27432" rIns="27432" tIns="0" bIns="0" anchor="ctr">
+            <a:spAutoFit/>
+          </a:bodyPr>
+          <a:lstStyle/>
+          <a:p>
+            <a:pPr algn="l"/>
+            <a:r>
+              <a:rPr sz="850" b="0" i="0">
+                <a:solidFill>
+                  <a:srgbClr val="1E2D40"/>
+                </a:solidFill>
+                <a:latin typeface="Calibri"/>
+              </a:rPr>
               <a:t>หมายเหตุ</a:t>
             </a:r>
           </a:p>
@@ -15092,7 +15412,7 @@
       </p:sp>
       <p:sp>
         <p:nvSpPr>
-          <p:cNvPr id="101" name="TextBox 100"/>
+          <p:cNvPr id="106" name="TextBox 105"/>
           <p:cNvSpPr txBox="1"/>
           <p:nvPr/>
         </p:nvSpPr>
@@ -15127,7 +15447,7 @@
       </p:sp>
       <p:sp>
         <p:nvSpPr>
-          <p:cNvPr id="102" name="Rectangle 101"/>
+          <p:cNvPr id="107" name="Rectangle 106"/>
           <p:cNvSpPr/>
           <p:nvPr/>
         </p:nvSpPr>
@@ -15171,7 +15491,7 @@
       </p:sp>
       <p:sp>
         <p:nvSpPr>
-          <p:cNvPr id="103" name="TextBox 102"/>
+          <p:cNvPr id="108" name="TextBox 107"/>
           <p:cNvSpPr txBox="1"/>
           <p:nvPr/>
         </p:nvSpPr>
@@ -15206,7 +15526,7 @@
       </p:sp>
       <p:sp>
         <p:nvSpPr>
-          <p:cNvPr id="104" name="TextBox 103"/>
+          <p:cNvPr id="109" name="TextBox 108"/>
           <p:cNvSpPr txBox="1"/>
           <p:nvPr/>
         </p:nvSpPr>
@@ -15241,7 +15561,7 @@
       </p:sp>
       <p:sp>
         <p:nvSpPr>
-          <p:cNvPr id="105" name="TextBox 104"/>
+          <p:cNvPr id="110" name="TextBox 109"/>
           <p:cNvSpPr txBox="1"/>
           <p:nvPr/>
         </p:nvSpPr>
@@ -15276,7 +15596,7 @@
       </p:sp>
       <p:sp>
         <p:nvSpPr>
-          <p:cNvPr id="106" name="TextBox 105"/>
+          <p:cNvPr id="111" name="TextBox 110"/>
           <p:cNvSpPr txBox="1"/>
           <p:nvPr/>
         </p:nvSpPr>
@@ -15311,7 +15631,7 @@
       </p:sp>
       <p:sp>
         <p:nvSpPr>
-          <p:cNvPr id="107" name="TextBox 106"/>
+          <p:cNvPr id="112" name="TextBox 111"/>
           <p:cNvSpPr txBox="1"/>
           <p:nvPr/>
         </p:nvSpPr>
@@ -15346,14 +15666,14 @@
       </p:sp>
       <p:sp>
         <p:nvSpPr>
-          <p:cNvPr id="108" name="Rectangle 107"/>
+          <p:cNvPr id="113" name="Rectangle 112"/>
           <p:cNvSpPr/>
           <p:nvPr/>
         </p:nvSpPr>
         <p:spPr>
           <a:xfrm>
             <a:off x="8229600" y="1444752"/>
-            <a:ext cx="3657600" cy="2578608"/>
+            <a:ext cx="3657600" cy="2793491"/>
           </a:xfrm>
           <a:prstGeom prst="rect">
             <a:avLst/>
@@ -15392,7 +15712,7 @@
       </p:sp>
       <p:sp>
         <p:nvSpPr>
-          <p:cNvPr id="109" name="TextBox 108"/>
+          <p:cNvPr id="114" name="TextBox 113"/>
           <p:cNvSpPr txBox="1"/>
           <p:nvPr/>
         </p:nvSpPr>
@@ -15427,7 +15747,7 @@
       </p:sp>
       <p:sp>
         <p:nvSpPr>
-          <p:cNvPr id="110" name="TextBox 109"/>
+          <p:cNvPr id="115" name="TextBox 114"/>
           <p:cNvSpPr txBox="1"/>
           <p:nvPr/>
         </p:nvSpPr>
@@ -15462,7 +15782,7 @@
       </p:sp>
       <p:sp>
         <p:nvSpPr>
-          <p:cNvPr id="111" name="TextBox 110"/>
+          <p:cNvPr id="116" name="TextBox 115"/>
           <p:cNvSpPr txBox="1"/>
           <p:nvPr/>
         </p:nvSpPr>
@@ -15497,7 +15817,7 @@
       </p:sp>
       <p:sp>
         <p:nvSpPr>
-          <p:cNvPr id="112" name="TextBox 111"/>
+          <p:cNvPr id="117" name="TextBox 116"/>
           <p:cNvSpPr txBox="1"/>
           <p:nvPr/>
         </p:nvSpPr>
@@ -15532,7 +15852,7 @@
       </p:sp>
       <p:sp>
         <p:nvSpPr>
-          <p:cNvPr id="113" name="TextBox 112"/>
+          <p:cNvPr id="118" name="TextBox 117"/>
           <p:cNvSpPr txBox="1"/>
           <p:nvPr/>
         </p:nvSpPr>
@@ -15567,7 +15887,7 @@
       </p:sp>
       <p:sp>
         <p:nvSpPr>
-          <p:cNvPr id="114" name="Rectangle 113"/>
+          <p:cNvPr id="119" name="Rectangle 118"/>
           <p:cNvSpPr/>
           <p:nvPr/>
         </p:nvSpPr>
@@ -15611,7 +15931,7 @@
       </p:sp>
       <p:sp>
         <p:nvSpPr>
-          <p:cNvPr id="115" name="TextBox 114"/>
+          <p:cNvPr id="120" name="TextBox 119"/>
           <p:cNvSpPr txBox="1"/>
           <p:nvPr/>
         </p:nvSpPr>
@@ -15639,14 +15959,14 @@
                 </a:solidFill>
                 <a:latin typeface="Consolas"/>
               </a:rPr>
-              <a:t>PartNo</a:t>
-            </a:r>
-          </a:p>
-        </p:txBody>
-      </p:sp>
-      <p:sp>
-        <p:nvSpPr>
-          <p:cNvPr id="116" name="TextBox 115"/>
+              <a:t>PartId</a:t>
+            </a:r>
+          </a:p>
+        </p:txBody>
+      </p:sp>
+      <p:sp>
+        <p:nvSpPr>
+          <p:cNvPr id="121" name="TextBox 120"/>
           <p:cNvSpPr txBox="1"/>
           <p:nvPr/>
         </p:nvSpPr>
@@ -15674,14 +15994,14 @@
                 </a:solidFill>
                 <a:latin typeface="Consolas"/>
               </a:rPr>
-              <a:t>varchar(50)</a:t>
-            </a:r>
-          </a:p>
-        </p:txBody>
-      </p:sp>
-      <p:sp>
-        <p:nvSpPr>
-          <p:cNvPr id="117" name="TextBox 116"/>
+              <a:t>int</a:t>
+            </a:r>
+          </a:p>
+        </p:txBody>
+      </p:sp>
+      <p:sp>
+        <p:nvSpPr>
+          <p:cNvPr id="122" name="TextBox 121"/>
           <p:cNvSpPr txBox="1"/>
           <p:nvPr/>
         </p:nvSpPr>
@@ -15716,7 +16036,7 @@
       </p:sp>
       <p:sp>
         <p:nvSpPr>
-          <p:cNvPr id="118" name="TextBox 117"/>
+          <p:cNvPr id="123" name="TextBox 122"/>
           <p:cNvSpPr txBox="1"/>
           <p:nvPr/>
         </p:nvSpPr>
@@ -15740,18 +16060,18 @@
             <a:r>
               <a:rPr sz="800" b="1" i="0">
                 <a:solidFill>
-                  <a:srgbClr val="B45309"/>
-                </a:solidFill>
-                <a:latin typeface="Calibri"/>
-              </a:rPr>
-              <a:t>~</a:t>
-            </a:r>
-          </a:p>
-        </p:txBody>
-      </p:sp>
-      <p:sp>
-        <p:nvSpPr>
-          <p:cNvPr id="119" name="TextBox 118"/>
+                  <a:srgbClr val="059669"/>
+                </a:solidFill>
+                <a:latin typeface="Calibri"/>
+              </a:rPr>
+              <a:t>FK</a:t>
+            </a:r>
+          </a:p>
+        </p:txBody>
+      </p:sp>
+      <p:sp>
+        <p:nvSpPr>
+          <p:cNvPr id="124" name="TextBox 123"/>
           <p:cNvSpPr txBox="1"/>
           <p:nvPr/>
         </p:nvSpPr>
@@ -15779,14 +16099,14 @@
                 </a:solidFill>
                 <a:latin typeface="Calibri"/>
               </a:rPr>
-              <a:t>อ้าง Part.PartNo</a:t>
-            </a:r>
-          </a:p>
-        </p:txBody>
-      </p:sp>
-      <p:sp>
-        <p:nvSpPr>
-          <p:cNvPr id="120" name="TextBox 119"/>
+              <a:t>→ Part (Restrict)</a:t>
+            </a:r>
+          </a:p>
+        </p:txBody>
+      </p:sp>
+      <p:sp>
+        <p:nvSpPr>
+          <p:cNvPr id="125" name="TextBox 124"/>
           <p:cNvSpPr txBox="1"/>
           <p:nvPr/>
         </p:nvSpPr>
@@ -15814,14 +16134,14 @@
                 </a:solidFill>
                 <a:latin typeface="Consolas"/>
               </a:rPr>
-              <a:t>SerialNo</a:t>
-            </a:r>
-          </a:p>
-        </p:txBody>
-      </p:sp>
-      <p:sp>
-        <p:nvSpPr>
-          <p:cNvPr id="121" name="TextBox 120"/>
+              <a:t>PartNo</a:t>
+            </a:r>
+          </a:p>
+        </p:txBody>
+      </p:sp>
+      <p:sp>
+        <p:nvSpPr>
+          <p:cNvPr id="126" name="TextBox 125"/>
           <p:cNvSpPr txBox="1"/>
           <p:nvPr/>
         </p:nvSpPr>
@@ -15849,14 +16169,14 @@
                 </a:solidFill>
                 <a:latin typeface="Consolas"/>
               </a:rPr>
-              <a:t>varchar(100)</a:t>
-            </a:r>
-          </a:p>
-        </p:txBody>
-      </p:sp>
-      <p:sp>
-        <p:nvSpPr>
-          <p:cNvPr id="122" name="TextBox 121"/>
+              <a:t>varchar(50)</a:t>
+            </a:r>
+          </a:p>
+        </p:txBody>
+      </p:sp>
+      <p:sp>
+        <p:nvSpPr>
+          <p:cNvPr id="127" name="TextBox 126"/>
           <p:cNvSpPr txBox="1"/>
           <p:nvPr/>
         </p:nvSpPr>
@@ -15880,18 +16200,18 @@
             <a:r>
               <a:rPr sz="700" b="0" i="0">
                 <a:solidFill>
-                  <a:srgbClr val="6B7280"/>
-                </a:solidFill>
-                <a:latin typeface="Calibri"/>
-              </a:rPr>
-              <a:t>Y</a:t>
-            </a:r>
-          </a:p>
-        </p:txBody>
-      </p:sp>
-      <p:sp>
-        <p:nvSpPr>
-          <p:cNvPr id="123" name="TextBox 122"/>
+                  <a:srgbClr val="B0B0B0"/>
+                </a:solidFill>
+                <a:latin typeface="Calibri"/>
+              </a:rPr>
+              <a:t>—</a:t>
+            </a:r>
+          </a:p>
+        </p:txBody>
+      </p:sp>
+      <p:sp>
+        <p:nvSpPr>
+          <p:cNvPr id="128" name="TextBox 127"/>
           <p:cNvSpPr txBox="1"/>
           <p:nvPr/>
         </p:nvSpPr>
@@ -15919,14 +16239,14 @@
                 </a:solidFill>
                 <a:latin typeface="Calibri"/>
               </a:rPr>
-              <a:t>ซีเรียล</a:t>
-            </a:r>
-          </a:p>
-        </p:txBody>
-      </p:sp>
-      <p:sp>
-        <p:nvSpPr>
-          <p:cNvPr id="124" name="Rectangle 123"/>
+              <a:t>snapshot</a:t>
+            </a:r>
+          </a:p>
+        </p:txBody>
+      </p:sp>
+      <p:sp>
+        <p:nvSpPr>
+          <p:cNvPr id="129" name="Rectangle 128"/>
           <p:cNvSpPr/>
           <p:nvPr/>
         </p:nvSpPr>
@@ -15970,7 +16290,7 @@
       </p:sp>
       <p:sp>
         <p:nvSpPr>
-          <p:cNvPr id="125" name="TextBox 124"/>
+          <p:cNvPr id="130" name="TextBox 129"/>
           <p:cNvSpPr txBox="1"/>
           <p:nvPr/>
         </p:nvSpPr>
@@ -15998,14 +16318,14 @@
                 </a:solidFill>
                 <a:latin typeface="Consolas"/>
               </a:rPr>
-              <a:t>LocationId</a:t>
-            </a:r>
-          </a:p>
-        </p:txBody>
-      </p:sp>
-      <p:sp>
-        <p:nvSpPr>
-          <p:cNvPr id="126" name="TextBox 125"/>
+              <a:t>SerialNo</a:t>
+            </a:r>
+          </a:p>
+        </p:txBody>
+      </p:sp>
+      <p:sp>
+        <p:nvSpPr>
+          <p:cNvPr id="131" name="TextBox 130"/>
           <p:cNvSpPr txBox="1"/>
           <p:nvPr/>
         </p:nvSpPr>
@@ -16033,14 +16353,14 @@
                 </a:solidFill>
                 <a:latin typeface="Consolas"/>
               </a:rPr>
-              <a:t>int</a:t>
-            </a:r>
-          </a:p>
-        </p:txBody>
-      </p:sp>
-      <p:sp>
-        <p:nvSpPr>
-          <p:cNvPr id="127" name="TextBox 126"/>
+              <a:t>varchar(100)</a:t>
+            </a:r>
+          </a:p>
+        </p:txBody>
+      </p:sp>
+      <p:sp>
+        <p:nvSpPr>
+          <p:cNvPr id="132" name="TextBox 131"/>
           <p:cNvSpPr txBox="1"/>
           <p:nvPr/>
         </p:nvSpPr>
@@ -16064,53 +16384,18 @@
             <a:r>
               <a:rPr sz="700" b="0" i="0">
                 <a:solidFill>
-                  <a:srgbClr val="B0B0B0"/>
-                </a:solidFill>
-                <a:latin typeface="Calibri"/>
-              </a:rPr>
-              <a:t>—</a:t>
-            </a:r>
-          </a:p>
-        </p:txBody>
-      </p:sp>
-      <p:sp>
-        <p:nvSpPr>
-          <p:cNvPr id="128" name="TextBox 127"/>
-          <p:cNvSpPr txBox="1"/>
-          <p:nvPr/>
-        </p:nvSpPr>
-        <p:spPr>
-          <a:xfrm>
-            <a:off x="10021824" y="2089404"/>
-            <a:ext cx="256032" cy="214884"/>
-          </a:xfrm>
-          <a:prstGeom prst="rect">
-            <a:avLst/>
-          </a:prstGeom>
-          <a:noFill/>
-        </p:spPr>
-        <p:txBody>
-          <a:bodyPr wrap="square" lIns="27432" rIns="27432" tIns="0" bIns="0" anchor="ctr">
-            <a:spAutoFit/>
-          </a:bodyPr>
-          <a:lstStyle/>
-          <a:p>
-            <a:pPr algn="ctr"/>
-            <a:r>
-              <a:rPr sz="800" b="1" i="0">
-                <a:solidFill>
-                  <a:srgbClr val="B45309"/>
-                </a:solidFill>
-                <a:latin typeface="Calibri"/>
-              </a:rPr>
-              <a:t>~</a:t>
-            </a:r>
-          </a:p>
-        </p:txBody>
-      </p:sp>
-      <p:sp>
-        <p:nvSpPr>
-          <p:cNvPr id="129" name="TextBox 128"/>
+                  <a:srgbClr val="6B7280"/>
+                </a:solidFill>
+                <a:latin typeface="Calibri"/>
+              </a:rPr>
+              <a:t>Y</a:t>
+            </a:r>
+          </a:p>
+        </p:txBody>
+      </p:sp>
+      <p:sp>
+        <p:nvSpPr>
+          <p:cNvPr id="133" name="TextBox 132"/>
           <p:cNvSpPr txBox="1"/>
           <p:nvPr/>
         </p:nvSpPr>
@@ -16138,14 +16423,14 @@
                 </a:solidFill>
                 <a:latin typeface="Calibri"/>
               </a:rPr>
-              <a:t>คลัง (ปกติ Scrap)</a:t>
-            </a:r>
-          </a:p>
-        </p:txBody>
-      </p:sp>
-      <p:sp>
-        <p:nvSpPr>
-          <p:cNvPr id="130" name="TextBox 129"/>
+              <a:t>ซีเรียล</a:t>
+            </a:r>
+          </a:p>
+        </p:txBody>
+      </p:sp>
+      <p:sp>
+        <p:nvSpPr>
+          <p:cNvPr id="134" name="TextBox 133"/>
           <p:cNvSpPr txBox="1"/>
           <p:nvPr/>
         </p:nvSpPr>
@@ -16173,14 +16458,14 @@
                 </a:solidFill>
                 <a:latin typeface="Consolas"/>
               </a:rPr>
-              <a:t>Qty</a:t>
-            </a:r>
-          </a:p>
-        </p:txBody>
-      </p:sp>
-      <p:sp>
-        <p:nvSpPr>
-          <p:cNvPr id="131" name="TextBox 130"/>
+              <a:t>LocationId</a:t>
+            </a:r>
+          </a:p>
+        </p:txBody>
+      </p:sp>
+      <p:sp>
+        <p:nvSpPr>
+          <p:cNvPr id="135" name="TextBox 134"/>
           <p:cNvSpPr txBox="1"/>
           <p:nvPr/>
         </p:nvSpPr>
@@ -16215,7 +16500,7 @@
       </p:sp>
       <p:sp>
         <p:nvSpPr>
-          <p:cNvPr id="132" name="TextBox 131"/>
+          <p:cNvPr id="136" name="TextBox 135"/>
           <p:cNvSpPr txBox="1"/>
           <p:nvPr/>
         </p:nvSpPr>
@@ -16250,7 +16535,42 @@
       </p:sp>
       <p:sp>
         <p:nvSpPr>
-          <p:cNvPr id="133" name="TextBox 132"/>
+          <p:cNvPr id="137" name="TextBox 136"/>
+          <p:cNvSpPr txBox="1"/>
+          <p:nvPr/>
+        </p:nvSpPr>
+        <p:spPr>
+          <a:xfrm>
+            <a:off x="10021824" y="2304288"/>
+            <a:ext cx="256032" cy="214884"/>
+          </a:xfrm>
+          <a:prstGeom prst="rect">
+            <a:avLst/>
+          </a:prstGeom>
+          <a:noFill/>
+        </p:spPr>
+        <p:txBody>
+          <a:bodyPr wrap="square" lIns="27432" rIns="27432" tIns="0" bIns="0" anchor="ctr">
+            <a:spAutoFit/>
+          </a:bodyPr>
+          <a:lstStyle/>
+          <a:p>
+            <a:pPr algn="ctr"/>
+            <a:r>
+              <a:rPr sz="800" b="1" i="0">
+                <a:solidFill>
+                  <a:srgbClr val="B45309"/>
+                </a:solidFill>
+                <a:latin typeface="Calibri"/>
+              </a:rPr>
+              <a:t>~</a:t>
+            </a:r>
+          </a:p>
+        </p:txBody>
+      </p:sp>
+      <p:sp>
+        <p:nvSpPr>
+          <p:cNvPr id="138" name="TextBox 137"/>
           <p:cNvSpPr txBox="1"/>
           <p:nvPr/>
         </p:nvSpPr>
@@ -16278,14 +16598,14 @@
                 </a:solidFill>
                 <a:latin typeface="Calibri"/>
               </a:rPr>
-              <a:t>จำนวน</a:t>
-            </a:r>
-          </a:p>
-        </p:txBody>
-      </p:sp>
-      <p:sp>
-        <p:nvSpPr>
-          <p:cNvPr id="134" name="Rectangle 133"/>
+              <a:t>คลัง (ปกติ Scrap)</a:t>
+            </a:r>
+          </a:p>
+        </p:txBody>
+      </p:sp>
+      <p:sp>
+        <p:nvSpPr>
+          <p:cNvPr id="139" name="Rectangle 138"/>
           <p:cNvSpPr/>
           <p:nvPr/>
         </p:nvSpPr>
@@ -16329,7 +16649,7 @@
       </p:sp>
       <p:sp>
         <p:nvSpPr>
-          <p:cNvPr id="135" name="TextBox 134"/>
+          <p:cNvPr id="140" name="TextBox 139"/>
           <p:cNvSpPr txBox="1"/>
           <p:nvPr/>
         </p:nvSpPr>
@@ -16357,14 +16677,14 @@
                 </a:solidFill>
                 <a:latin typeface="Consolas"/>
               </a:rPr>
-              <a:t>Status</a:t>
-            </a:r>
-          </a:p>
-        </p:txBody>
-      </p:sp>
-      <p:sp>
-        <p:nvSpPr>
-          <p:cNvPr id="136" name="TextBox 135"/>
+              <a:t>Qty</a:t>
+            </a:r>
+          </a:p>
+        </p:txBody>
+      </p:sp>
+      <p:sp>
+        <p:nvSpPr>
+          <p:cNvPr id="141" name="TextBox 140"/>
           <p:cNvSpPr txBox="1"/>
           <p:nvPr/>
         </p:nvSpPr>
@@ -16392,14 +16712,14 @@
                 </a:solidFill>
                 <a:latin typeface="Consolas"/>
               </a:rPr>
-              <a:t>varchar(20)</a:t>
-            </a:r>
-          </a:p>
-        </p:txBody>
-      </p:sp>
-      <p:sp>
-        <p:nvSpPr>
-          <p:cNvPr id="137" name="TextBox 136"/>
+              <a:t>int</a:t>
+            </a:r>
+          </a:p>
+        </p:txBody>
+      </p:sp>
+      <p:sp>
+        <p:nvSpPr>
+          <p:cNvPr id="142" name="TextBox 141"/>
           <p:cNvSpPr txBox="1"/>
           <p:nvPr/>
         </p:nvSpPr>
@@ -16434,7 +16754,7 @@
       </p:sp>
       <p:sp>
         <p:nvSpPr>
-          <p:cNvPr id="138" name="TextBox 137"/>
+          <p:cNvPr id="143" name="TextBox 142"/>
           <p:cNvSpPr txBox="1"/>
           <p:nvPr/>
         </p:nvSpPr>
@@ -16462,14 +16782,14 @@
                 </a:solidFill>
                 <a:latin typeface="Calibri"/>
               </a:rPr>
-              <a:t>Pending/Approved/Disposed</a:t>
-            </a:r>
-          </a:p>
-        </p:txBody>
-      </p:sp>
-      <p:sp>
-        <p:nvSpPr>
-          <p:cNvPr id="139" name="TextBox 138"/>
+              <a:t>จำนวน</a:t>
+            </a:r>
+          </a:p>
+        </p:txBody>
+      </p:sp>
+      <p:sp>
+        <p:nvSpPr>
+          <p:cNvPr id="144" name="TextBox 143"/>
           <p:cNvSpPr txBox="1"/>
           <p:nvPr/>
         </p:nvSpPr>
@@ -16497,14 +16817,14 @@
                 </a:solidFill>
                 <a:latin typeface="Consolas"/>
               </a:rPr>
-              <a:t>ReasonCode</a:t>
-            </a:r>
-          </a:p>
-        </p:txBody>
-      </p:sp>
-      <p:sp>
-        <p:nvSpPr>
-          <p:cNvPr id="140" name="TextBox 139"/>
+              <a:t>Status</a:t>
+            </a:r>
+          </a:p>
+        </p:txBody>
+      </p:sp>
+      <p:sp>
+        <p:nvSpPr>
+          <p:cNvPr id="145" name="TextBox 144"/>
           <p:cNvSpPr txBox="1"/>
           <p:nvPr/>
         </p:nvSpPr>
@@ -16532,14 +16852,14 @@
                 </a:solidFill>
                 <a:latin typeface="Consolas"/>
               </a:rPr>
-              <a:t>varchar(30)</a:t>
-            </a:r>
-          </a:p>
-        </p:txBody>
-      </p:sp>
-      <p:sp>
-        <p:nvSpPr>
-          <p:cNvPr id="141" name="TextBox 140"/>
+              <a:t>varchar(20)</a:t>
+            </a:r>
+          </a:p>
+        </p:txBody>
+      </p:sp>
+      <p:sp>
+        <p:nvSpPr>
+          <p:cNvPr id="146" name="TextBox 145"/>
           <p:cNvSpPr txBox="1"/>
           <p:nvPr/>
         </p:nvSpPr>
@@ -16574,7 +16894,7 @@
       </p:sp>
       <p:sp>
         <p:nvSpPr>
-          <p:cNvPr id="142" name="TextBox 141"/>
+          <p:cNvPr id="147" name="TextBox 146"/>
           <p:cNvSpPr txBox="1"/>
           <p:nvPr/>
         </p:nvSpPr>
@@ -16602,14 +16922,14 @@
                 </a:solidFill>
                 <a:latin typeface="Calibri"/>
               </a:rPr>
-              <a:t>Expired/Unrepairable/Damaged/Other</a:t>
-            </a:r>
-          </a:p>
-        </p:txBody>
-      </p:sp>
-      <p:sp>
-        <p:nvSpPr>
-          <p:cNvPr id="143" name="Rectangle 142"/>
+              <a:t>Pending/Approved/Disposed</a:t>
+            </a:r>
+          </a:p>
+        </p:txBody>
+      </p:sp>
+      <p:sp>
+        <p:nvSpPr>
+          <p:cNvPr id="148" name="Rectangle 147"/>
           <p:cNvSpPr/>
           <p:nvPr/>
         </p:nvSpPr>
@@ -16653,7 +16973,7 @@
       </p:sp>
       <p:sp>
         <p:nvSpPr>
-          <p:cNvPr id="144" name="TextBox 143"/>
+          <p:cNvPr id="149" name="TextBox 148"/>
           <p:cNvSpPr txBox="1"/>
           <p:nvPr/>
         </p:nvSpPr>
@@ -16681,14 +17001,14 @@
                 </a:solidFill>
                 <a:latin typeface="Consolas"/>
               </a:rPr>
-              <a:t>RequestedBy</a:t>
-            </a:r>
-          </a:p>
-        </p:txBody>
-      </p:sp>
-      <p:sp>
-        <p:nvSpPr>
-          <p:cNvPr id="145" name="TextBox 144"/>
+              <a:t>ReasonCode</a:t>
+            </a:r>
+          </a:p>
+        </p:txBody>
+      </p:sp>
+      <p:sp>
+        <p:nvSpPr>
+          <p:cNvPr id="150" name="TextBox 149"/>
           <p:cNvSpPr txBox="1"/>
           <p:nvPr/>
         </p:nvSpPr>
@@ -16716,14 +17036,14 @@
                 </a:solidFill>
                 <a:latin typeface="Consolas"/>
               </a:rPr>
-              <a:t>varchar(100)</a:t>
-            </a:r>
-          </a:p>
-        </p:txBody>
-      </p:sp>
-      <p:sp>
-        <p:nvSpPr>
-          <p:cNvPr id="146" name="TextBox 145"/>
+              <a:t>varchar(30)</a:t>
+            </a:r>
+          </a:p>
+        </p:txBody>
+      </p:sp>
+      <p:sp>
+        <p:nvSpPr>
+          <p:cNvPr id="151" name="TextBox 150"/>
           <p:cNvSpPr txBox="1"/>
           <p:nvPr/>
         </p:nvSpPr>
@@ -16758,7 +17078,7 @@
       </p:sp>
       <p:sp>
         <p:nvSpPr>
-          <p:cNvPr id="147" name="TextBox 146"/>
+          <p:cNvPr id="152" name="TextBox 151"/>
           <p:cNvSpPr txBox="1"/>
           <p:nvPr/>
         </p:nvSpPr>
@@ -16786,14 +17106,14 @@
                 </a:solidFill>
                 <a:latin typeface="Calibri"/>
               </a:rPr>
-              <a:t>ผู้ขอ</a:t>
-            </a:r>
-          </a:p>
-        </p:txBody>
-      </p:sp>
-      <p:sp>
-        <p:nvSpPr>
-          <p:cNvPr id="148" name="TextBox 147"/>
+              <a:t>Expired/Unrepairable/Damaged/Other</a:t>
+            </a:r>
+          </a:p>
+        </p:txBody>
+      </p:sp>
+      <p:sp>
+        <p:nvSpPr>
+          <p:cNvPr id="153" name="TextBox 152"/>
           <p:cNvSpPr txBox="1"/>
           <p:nvPr/>
         </p:nvSpPr>
@@ -16821,14 +17141,14 @@
                 </a:solidFill>
                 <a:latin typeface="Consolas"/>
               </a:rPr>
-              <a:t>ApprovedBy</a:t>
-            </a:r>
-          </a:p>
-        </p:txBody>
-      </p:sp>
-      <p:sp>
-        <p:nvSpPr>
-          <p:cNvPr id="149" name="TextBox 148"/>
+              <a:t>RequestedBy</a:t>
+            </a:r>
+          </a:p>
+        </p:txBody>
+      </p:sp>
+      <p:sp>
+        <p:nvSpPr>
+          <p:cNvPr id="154" name="TextBox 153"/>
           <p:cNvSpPr txBox="1"/>
           <p:nvPr/>
         </p:nvSpPr>
@@ -16863,7 +17183,7 @@
       </p:sp>
       <p:sp>
         <p:nvSpPr>
-          <p:cNvPr id="150" name="TextBox 149"/>
+          <p:cNvPr id="155" name="TextBox 154"/>
           <p:cNvSpPr txBox="1"/>
           <p:nvPr/>
         </p:nvSpPr>
@@ -16887,18 +17207,18 @@
             <a:r>
               <a:rPr sz="700" b="0" i="0">
                 <a:solidFill>
-                  <a:srgbClr val="6B7280"/>
-                </a:solidFill>
-                <a:latin typeface="Calibri"/>
-              </a:rPr>
-              <a:t>Y</a:t>
-            </a:r>
-          </a:p>
-        </p:txBody>
-      </p:sp>
-      <p:sp>
-        <p:nvSpPr>
-          <p:cNvPr id="151" name="TextBox 150"/>
+                  <a:srgbClr val="B0B0B0"/>
+                </a:solidFill>
+                <a:latin typeface="Calibri"/>
+              </a:rPr>
+              <a:t>—</a:t>
+            </a:r>
+          </a:p>
+        </p:txBody>
+      </p:sp>
+      <p:sp>
+        <p:nvSpPr>
+          <p:cNvPr id="156" name="TextBox 155"/>
           <p:cNvSpPr txBox="1"/>
           <p:nvPr/>
         </p:nvSpPr>
@@ -16926,14 +17246,14 @@
                 </a:solidFill>
                 <a:latin typeface="Calibri"/>
               </a:rPr>
-              <a:t>ผู้อนุมัติ</a:t>
-            </a:r>
-          </a:p>
-        </p:txBody>
-      </p:sp>
-      <p:sp>
-        <p:nvSpPr>
-          <p:cNvPr id="152" name="Rectangle 151"/>
+              <a:t>ผู้ขอ</a:t>
+            </a:r>
+          </a:p>
+        </p:txBody>
+      </p:sp>
+      <p:sp>
+        <p:nvSpPr>
+          <p:cNvPr id="157" name="Rectangle 156"/>
           <p:cNvSpPr/>
           <p:nvPr/>
         </p:nvSpPr>
@@ -16977,7 +17297,7 @@
       </p:sp>
       <p:sp>
         <p:nvSpPr>
-          <p:cNvPr id="153" name="TextBox 152"/>
+          <p:cNvPr id="158" name="TextBox 157"/>
           <p:cNvSpPr txBox="1"/>
           <p:nvPr/>
         </p:nvSpPr>
@@ -17005,14 +17325,14 @@
                 </a:solidFill>
                 <a:latin typeface="Consolas"/>
               </a:rPr>
-              <a:t>CreatedAt</a:t>
-            </a:r>
-          </a:p>
-        </p:txBody>
-      </p:sp>
-      <p:sp>
-        <p:nvSpPr>
-          <p:cNvPr id="154" name="TextBox 153"/>
+              <a:t>ApprovedBy</a:t>
+            </a:r>
+          </a:p>
+        </p:txBody>
+      </p:sp>
+      <p:sp>
+        <p:nvSpPr>
+          <p:cNvPr id="159" name="TextBox 158"/>
           <p:cNvSpPr txBox="1"/>
           <p:nvPr/>
         </p:nvSpPr>
@@ -17040,14 +17360,14 @@
                 </a:solidFill>
                 <a:latin typeface="Consolas"/>
               </a:rPr>
-              <a:t>datetime</a:t>
-            </a:r>
-          </a:p>
-        </p:txBody>
-      </p:sp>
-      <p:sp>
-        <p:nvSpPr>
-          <p:cNvPr id="155" name="TextBox 154"/>
+              <a:t>varchar(100)</a:t>
+            </a:r>
+          </a:p>
+        </p:txBody>
+      </p:sp>
+      <p:sp>
+        <p:nvSpPr>
+          <p:cNvPr id="160" name="TextBox 159"/>
           <p:cNvSpPr txBox="1"/>
           <p:nvPr/>
         </p:nvSpPr>
@@ -17071,18 +17391,18 @@
             <a:r>
               <a:rPr sz="700" b="0" i="0">
                 <a:solidFill>
-                  <a:srgbClr val="B0B0B0"/>
-                </a:solidFill>
-                <a:latin typeface="Calibri"/>
-              </a:rPr>
-              <a:t>—</a:t>
-            </a:r>
-          </a:p>
-        </p:txBody>
-      </p:sp>
-      <p:sp>
-        <p:nvSpPr>
-          <p:cNvPr id="156" name="TextBox 155"/>
+                  <a:srgbClr val="6B7280"/>
+                </a:solidFill>
+                <a:latin typeface="Calibri"/>
+              </a:rPr>
+              <a:t>Y</a:t>
+            </a:r>
+          </a:p>
+        </p:txBody>
+      </p:sp>
+      <p:sp>
+        <p:nvSpPr>
+          <p:cNvPr id="161" name="TextBox 160"/>
           <p:cNvSpPr txBox="1"/>
           <p:nvPr/>
         </p:nvSpPr>
@@ -17110,14 +17430,14 @@
                 </a:solidFill>
                 <a:latin typeface="Calibri"/>
               </a:rPr>
-              <a:t>เวลาสร้าง</a:t>
-            </a:r>
-          </a:p>
-        </p:txBody>
-      </p:sp>
-      <p:sp>
-        <p:nvSpPr>
-          <p:cNvPr id="157" name="TextBox 156"/>
+              <a:t>ผู้อนุมัติ</a:t>
+            </a:r>
+          </a:p>
+        </p:txBody>
+      </p:sp>
+      <p:sp>
+        <p:nvSpPr>
+          <p:cNvPr id="162" name="TextBox 161"/>
           <p:cNvSpPr txBox="1"/>
           <p:nvPr/>
         </p:nvSpPr>
@@ -17145,14 +17465,14 @@
                 </a:solidFill>
                 <a:latin typeface="Consolas"/>
               </a:rPr>
-              <a:t>ApprovedAt</a:t>
-            </a:r>
-          </a:p>
-        </p:txBody>
-      </p:sp>
-      <p:sp>
-        <p:nvSpPr>
-          <p:cNvPr id="158" name="TextBox 157"/>
+              <a:t>CreatedAt</a:t>
+            </a:r>
+          </a:p>
+        </p:txBody>
+      </p:sp>
+      <p:sp>
+        <p:nvSpPr>
+          <p:cNvPr id="163" name="TextBox 162"/>
           <p:cNvSpPr txBox="1"/>
           <p:nvPr/>
         </p:nvSpPr>
@@ -17187,7 +17507,7 @@
       </p:sp>
       <p:sp>
         <p:nvSpPr>
-          <p:cNvPr id="159" name="TextBox 158"/>
+          <p:cNvPr id="164" name="TextBox 163"/>
           <p:cNvSpPr txBox="1"/>
           <p:nvPr/>
         </p:nvSpPr>
@@ -17211,18 +17531,18 @@
             <a:r>
               <a:rPr sz="700" b="0" i="0">
                 <a:solidFill>
-                  <a:srgbClr val="6B7280"/>
-                </a:solidFill>
-                <a:latin typeface="Calibri"/>
-              </a:rPr>
-              <a:t>Y</a:t>
-            </a:r>
-          </a:p>
-        </p:txBody>
-      </p:sp>
-      <p:sp>
-        <p:nvSpPr>
-          <p:cNvPr id="160" name="TextBox 159"/>
+                  <a:srgbClr val="B0B0B0"/>
+                </a:solidFill>
+                <a:latin typeface="Calibri"/>
+              </a:rPr>
+              <a:t>—</a:t>
+            </a:r>
+          </a:p>
+        </p:txBody>
+      </p:sp>
+      <p:sp>
+        <p:nvSpPr>
+          <p:cNvPr id="165" name="TextBox 164"/>
           <p:cNvSpPr txBox="1"/>
           <p:nvPr/>
         </p:nvSpPr>
@@ -17250,14 +17570,14 @@
                 </a:solidFill>
                 <a:latin typeface="Calibri"/>
               </a:rPr>
-              <a:t>เวลาอนุมัติ</a:t>
-            </a:r>
-          </a:p>
-        </p:txBody>
-      </p:sp>
-      <p:sp>
-        <p:nvSpPr>
-          <p:cNvPr id="161" name="Rectangle 160"/>
+              <a:t>เวลาสร้าง</a:t>
+            </a:r>
+          </a:p>
+        </p:txBody>
+      </p:sp>
+      <p:sp>
+        <p:nvSpPr>
+          <p:cNvPr id="166" name="Rectangle 165"/>
           <p:cNvSpPr/>
           <p:nvPr/>
         </p:nvSpPr>
@@ -17301,7 +17621,7 @@
       </p:sp>
       <p:sp>
         <p:nvSpPr>
-          <p:cNvPr id="162" name="TextBox 161"/>
+          <p:cNvPr id="167" name="TextBox 166"/>
           <p:cNvSpPr txBox="1"/>
           <p:nvPr/>
         </p:nvSpPr>
@@ -17329,14 +17649,14 @@
                 </a:solidFill>
                 <a:latin typeface="Consolas"/>
               </a:rPr>
-              <a:t>DisposedAt</a:t>
-            </a:r>
-          </a:p>
-        </p:txBody>
-      </p:sp>
-      <p:sp>
-        <p:nvSpPr>
-          <p:cNvPr id="163" name="TextBox 162"/>
+              <a:t>ApprovedAt</a:t>
+            </a:r>
+          </a:p>
+        </p:txBody>
+      </p:sp>
+      <p:sp>
+        <p:nvSpPr>
+          <p:cNvPr id="168" name="TextBox 167"/>
           <p:cNvSpPr txBox="1"/>
           <p:nvPr/>
         </p:nvSpPr>
@@ -17371,7 +17691,7 @@
       </p:sp>
       <p:sp>
         <p:nvSpPr>
-          <p:cNvPr id="164" name="TextBox 163"/>
+          <p:cNvPr id="169" name="TextBox 168"/>
           <p:cNvSpPr txBox="1"/>
           <p:nvPr/>
         </p:nvSpPr>
@@ -17406,7 +17726,7 @@
       </p:sp>
       <p:sp>
         <p:nvSpPr>
-          <p:cNvPr id="165" name="TextBox 164"/>
+          <p:cNvPr id="170" name="TextBox 169"/>
           <p:cNvSpPr txBox="1"/>
           <p:nvPr/>
         </p:nvSpPr>
@@ -17434,6 +17754,146 @@
                 </a:solidFill>
                 <a:latin typeface="Calibri"/>
               </a:rPr>
+              <a:t>เวลาอนุมัติ</a:t>
+            </a:r>
+          </a:p>
+        </p:txBody>
+      </p:sp>
+      <p:sp>
+        <p:nvSpPr>
+          <p:cNvPr id="171" name="TextBox 170"/>
+          <p:cNvSpPr txBox="1"/>
+          <p:nvPr/>
+        </p:nvSpPr>
+        <p:spPr>
+          <a:xfrm>
+            <a:off x="8275320" y="4023360"/>
+            <a:ext cx="768096" cy="214884"/>
+          </a:xfrm>
+          <a:prstGeom prst="rect">
+            <a:avLst/>
+          </a:prstGeom>
+          <a:noFill/>
+        </p:spPr>
+        <p:txBody>
+          <a:bodyPr wrap="square" lIns="27432" rIns="27432" tIns="0" bIns="0" anchor="ctr">
+            <a:spAutoFit/>
+          </a:bodyPr>
+          <a:lstStyle/>
+          <a:p>
+            <a:pPr algn="l"/>
+            <a:r>
+              <a:rPr sz="850" b="1" i="0">
+                <a:solidFill>
+                  <a:srgbClr val="1E2D40"/>
+                </a:solidFill>
+                <a:latin typeface="Consolas"/>
+              </a:rPr>
+              <a:t>DisposedAt</a:t>
+            </a:r>
+          </a:p>
+        </p:txBody>
+      </p:sp>
+      <p:sp>
+        <p:nvSpPr>
+          <p:cNvPr id="172" name="TextBox 171"/>
+          <p:cNvSpPr txBox="1"/>
+          <p:nvPr/>
+        </p:nvSpPr>
+        <p:spPr>
+          <a:xfrm>
+            <a:off x="9116568" y="4023360"/>
+            <a:ext cx="621792" cy="214884"/>
+          </a:xfrm>
+          <a:prstGeom prst="rect">
+            <a:avLst/>
+          </a:prstGeom>
+          <a:noFill/>
+        </p:spPr>
+        <p:txBody>
+          <a:bodyPr wrap="square" lIns="27432" rIns="27432" tIns="0" bIns="0" anchor="ctr">
+            <a:spAutoFit/>
+          </a:bodyPr>
+          <a:lstStyle/>
+          <a:p>
+            <a:pPr algn="l"/>
+            <a:r>
+              <a:rPr sz="800" b="0" i="0">
+                <a:solidFill>
+                  <a:srgbClr val="2563EB"/>
+                </a:solidFill>
+                <a:latin typeface="Consolas"/>
+              </a:rPr>
+              <a:t>datetime</a:t>
+            </a:r>
+          </a:p>
+        </p:txBody>
+      </p:sp>
+      <p:sp>
+        <p:nvSpPr>
+          <p:cNvPr id="173" name="TextBox 172"/>
+          <p:cNvSpPr txBox="1"/>
+          <p:nvPr/>
+        </p:nvSpPr>
+        <p:spPr>
+          <a:xfrm>
+            <a:off x="9765792" y="4023360"/>
+            <a:ext cx="256032" cy="214884"/>
+          </a:xfrm>
+          <a:prstGeom prst="rect">
+            <a:avLst/>
+          </a:prstGeom>
+          <a:noFill/>
+        </p:spPr>
+        <p:txBody>
+          <a:bodyPr wrap="square" lIns="27432" rIns="27432" tIns="0" bIns="0" anchor="ctr">
+            <a:spAutoFit/>
+          </a:bodyPr>
+          <a:lstStyle/>
+          <a:p>
+            <a:pPr algn="ctr"/>
+            <a:r>
+              <a:rPr sz="700" b="0" i="0">
+                <a:solidFill>
+                  <a:srgbClr val="6B7280"/>
+                </a:solidFill>
+                <a:latin typeface="Calibri"/>
+              </a:rPr>
+              <a:t>Y</a:t>
+            </a:r>
+          </a:p>
+        </p:txBody>
+      </p:sp>
+      <p:sp>
+        <p:nvSpPr>
+          <p:cNvPr id="174" name="TextBox 173"/>
+          <p:cNvSpPr txBox="1"/>
+          <p:nvPr/>
+        </p:nvSpPr>
+        <p:spPr>
+          <a:xfrm>
+            <a:off x="10323576" y="4023360"/>
+            <a:ext cx="1536192" cy="214884"/>
+          </a:xfrm>
+          <a:prstGeom prst="rect">
+            <a:avLst/>
+          </a:prstGeom>
+          <a:noFill/>
+        </p:spPr>
+        <p:txBody>
+          <a:bodyPr wrap="square" lIns="27432" rIns="27432" tIns="0" bIns="0" anchor="ctr">
+            <a:spAutoFit/>
+          </a:bodyPr>
+          <a:lstStyle/>
+          <a:p>
+            <a:pPr algn="l"/>
+            <a:r>
+              <a:rPr sz="850" b="0" i="0">
+                <a:solidFill>
+                  <a:srgbClr val="1E2D40"/>
+                </a:solidFill>
+                <a:latin typeface="Calibri"/>
+              </a:rPr>
               <a:t>เวลาทำลาย</a:t>
             </a:r>
           </a:p>
@@ -17441,7 +17901,7 @@
       </p:sp>
       <p:sp>
         <p:nvSpPr>
-          <p:cNvPr id="166" name="TextBox 165"/>
+          <p:cNvPr id="175" name="TextBox 174"/>
           <p:cNvSpPr txBox="1"/>
           <p:nvPr/>
         </p:nvSpPr>
@@ -17476,7 +17936,7 @@
       </p:sp>
       <p:sp>
         <p:nvSpPr>
-          <p:cNvPr id="167" name="TextBox 166"/>
+          <p:cNvPr id="176" name="TextBox 175"/>
           <p:cNvSpPr txBox="1"/>
           <p:nvPr/>
         </p:nvSpPr>
@@ -17511,7 +17971,7 @@
       </p:sp>
       <p:sp>
         <p:nvSpPr>
-          <p:cNvPr id="168" name="TextBox 167"/>
+          <p:cNvPr id="177" name="TextBox 176"/>
           <p:cNvSpPr txBox="1"/>
           <p:nvPr/>
         </p:nvSpPr>
@@ -17546,7 +18006,7 @@
       </p:sp>
       <p:sp>
         <p:nvSpPr>
-          <p:cNvPr id="169" name="TextBox 168"/>
+          <p:cNvPr id="178" name="TextBox 177"/>
           <p:cNvSpPr txBox="1"/>
           <p:nvPr/>
         </p:nvSpPr>
@@ -17581,7 +18041,7 @@
       </p:sp>
       <p:sp>
         <p:nvSpPr>
-          <p:cNvPr id="170" name="TextBox 169"/>
+          <p:cNvPr id="179" name="TextBox 178"/>
           <p:cNvSpPr txBox="1"/>
           <p:nvPr/>
         </p:nvSpPr>
@@ -17616,7 +18076,7 @@
       </p:sp>
       <p:sp>
         <p:nvSpPr>
-          <p:cNvPr id="171" name="TextBox 170"/>
+          <p:cNvPr id="180" name="TextBox 179"/>
           <p:cNvSpPr txBox="1"/>
           <p:nvPr/>
         </p:nvSpPr>
@@ -17651,7 +18111,7 @@
       </p:sp>
       <p:sp>
         <p:nvSpPr>
-          <p:cNvPr id="172" name="TextBox 171"/>
+          <p:cNvPr id="181" name="TextBox 180"/>
           <p:cNvSpPr txBox="1"/>
           <p:nvPr/>
         </p:nvSpPr>
@@ -17686,7 +18146,7 @@
       </p:sp>
       <p:sp>
         <p:nvSpPr>
-          <p:cNvPr id="173" name="TextBox 172"/>
+          <p:cNvPr id="182" name="TextBox 181"/>
           <p:cNvSpPr txBox="1"/>
           <p:nvPr/>
         </p:nvSpPr>
@@ -22647,7 +23107,7 @@
         <p:spPr>
           <a:xfrm>
             <a:off x="548640" y="1307592"/>
-            <a:ext cx="11064240" cy="4727448"/>
+            <a:ext cx="11064240" cy="4942331"/>
           </a:xfrm>
           <a:prstGeom prst="rect">
             <a:avLst/>
@@ -26361,6 +26821,146 @@
         </p:nvSpPr>
         <p:spPr>
           <a:xfrm>
+            <a:off x="594360" y="6035040"/>
+            <a:ext cx="2471623" cy="214884"/>
+          </a:xfrm>
+          <a:prstGeom prst="rect">
+            <a:avLst/>
+          </a:prstGeom>
+          <a:noFill/>
+        </p:spPr>
+        <p:txBody>
+          <a:bodyPr wrap="square" lIns="27432" rIns="27432" tIns="0" bIns="0" anchor="ctr">
+            <a:spAutoFit/>
+          </a:bodyPr>
+          <a:lstStyle/>
+          <a:p>
+            <a:pPr algn="l"/>
+            <a:r>
+              <a:rPr sz="850" b="1" i="0">
+                <a:solidFill>
+                  <a:srgbClr val="1E2D40"/>
+                </a:solidFill>
+                <a:latin typeface="Consolas"/>
+              </a:rPr>
+              <a:t>RowVersion</a:t>
+            </a:r>
+          </a:p>
+        </p:txBody>
+      </p:sp>
+      <p:sp>
+        <p:nvSpPr>
+          <p:cNvPr id="117" name="TextBox 116"/>
+          <p:cNvSpPr txBox="1"/>
+          <p:nvPr/>
+        </p:nvSpPr>
+        <p:spPr>
+          <a:xfrm>
+            <a:off x="3139135" y="6035040"/>
+            <a:ext cx="2029053" cy="214884"/>
+          </a:xfrm>
+          <a:prstGeom prst="rect">
+            <a:avLst/>
+          </a:prstGeom>
+          <a:noFill/>
+        </p:spPr>
+        <p:txBody>
+          <a:bodyPr wrap="square" lIns="27432" rIns="27432" tIns="0" bIns="0" anchor="ctr">
+            <a:spAutoFit/>
+          </a:bodyPr>
+          <a:lstStyle/>
+          <a:p>
+            <a:pPr algn="l"/>
+            <a:r>
+              <a:rPr sz="800" b="0" i="0">
+                <a:solidFill>
+                  <a:srgbClr val="2563EB"/>
+                </a:solidFill>
+                <a:latin typeface="Consolas"/>
+              </a:rPr>
+              <a:t>varchar(32)</a:t>
+            </a:r>
+          </a:p>
+        </p:txBody>
+      </p:sp>
+      <p:sp>
+        <p:nvSpPr>
+          <p:cNvPr id="118" name="TextBox 117"/>
+          <p:cNvSpPr txBox="1"/>
+          <p:nvPr/>
+        </p:nvSpPr>
+        <p:spPr>
+          <a:xfrm>
+            <a:off x="5195620" y="6035040"/>
+            <a:ext cx="774496" cy="214884"/>
+          </a:xfrm>
+          <a:prstGeom prst="rect">
+            <a:avLst/>
+          </a:prstGeom>
+          <a:noFill/>
+        </p:spPr>
+        <p:txBody>
+          <a:bodyPr wrap="square" lIns="27432" rIns="27432" tIns="0" bIns="0" anchor="ctr">
+            <a:spAutoFit/>
+          </a:bodyPr>
+          <a:lstStyle/>
+          <a:p>
+            <a:pPr algn="ctr"/>
+            <a:r>
+              <a:rPr sz="700" b="0" i="0">
+                <a:solidFill>
+                  <a:srgbClr val="B0B0B0"/>
+                </a:solidFill>
+                <a:latin typeface="Calibri"/>
+              </a:rPr>
+              <a:t>—</a:t>
+            </a:r>
+          </a:p>
+        </p:txBody>
+      </p:sp>
+      <p:sp>
+        <p:nvSpPr>
+          <p:cNvPr id="119" name="TextBox 118"/>
+          <p:cNvSpPr txBox="1"/>
+          <p:nvPr/>
+        </p:nvSpPr>
+        <p:spPr>
+          <a:xfrm>
+            <a:off x="6790334" y="6035040"/>
+            <a:ext cx="4795113" cy="214884"/>
+          </a:xfrm>
+          <a:prstGeom prst="rect">
+            <a:avLst/>
+          </a:prstGeom>
+          <a:noFill/>
+        </p:spPr>
+        <p:txBody>
+          <a:bodyPr wrap="square" lIns="27432" rIns="27432" tIns="0" bIns="0" anchor="ctr">
+            <a:spAutoFit/>
+          </a:bodyPr>
+          <a:lstStyle/>
+          <a:p>
+            <a:pPr algn="l"/>
+            <a:r>
+              <a:rPr sz="850" b="0" i="0">
+                <a:solidFill>
+                  <a:srgbClr val="1E2D40"/>
+                </a:solidFill>
+                <a:latin typeface="Calibri"/>
+              </a:rPr>
+              <a:t>concurrency token (กันแก้ทับกัน)</a:t>
+            </a:r>
+          </a:p>
+        </p:txBody>
+      </p:sp>
+      <p:sp>
+        <p:nvSpPr>
+          <p:cNvPr id="120" name="TextBox 119"/>
+          <p:cNvSpPr txBox="1"/>
+          <p:nvPr/>
+        </p:nvSpPr>
+        <p:spPr>
+          <a:xfrm>
             <a:off x="365760" y="6547104"/>
             <a:ext cx="274320" cy="201168"/>
           </a:xfrm>
@@ -26390,7 +26990,7 @@
       </p:sp>
       <p:sp>
         <p:nvSpPr>
-          <p:cNvPr id="117" name="TextBox 116"/>
+          <p:cNvPr id="121" name="TextBox 120"/>
           <p:cNvSpPr txBox="1"/>
           <p:nvPr/>
         </p:nvSpPr>
@@ -26425,7 +27025,7 @@
       </p:sp>
       <p:sp>
         <p:nvSpPr>
-          <p:cNvPr id="118" name="TextBox 117"/>
+          <p:cNvPr id="122" name="TextBox 121"/>
           <p:cNvSpPr txBox="1"/>
           <p:nvPr/>
         </p:nvSpPr>
@@ -26460,7 +27060,7 @@
       </p:sp>
       <p:sp>
         <p:nvSpPr>
-          <p:cNvPr id="119" name="TextBox 118"/>
+          <p:cNvPr id="123" name="TextBox 122"/>
           <p:cNvSpPr txBox="1"/>
           <p:nvPr/>
         </p:nvSpPr>
@@ -26495,7 +27095,7 @@
       </p:sp>
       <p:sp>
         <p:nvSpPr>
-          <p:cNvPr id="120" name="TextBox 119"/>
+          <p:cNvPr id="124" name="TextBox 123"/>
           <p:cNvSpPr txBox="1"/>
           <p:nvPr/>
         </p:nvSpPr>
@@ -26530,7 +27130,7 @@
       </p:sp>
       <p:sp>
         <p:nvSpPr>
-          <p:cNvPr id="121" name="TextBox 120"/>
+          <p:cNvPr id="125" name="TextBox 124"/>
           <p:cNvSpPr txBox="1"/>
           <p:nvPr/>
         </p:nvSpPr>
@@ -26565,7 +27165,7 @@
       </p:sp>
       <p:sp>
         <p:nvSpPr>
-          <p:cNvPr id="122" name="TextBox 121"/>
+          <p:cNvPr id="126" name="TextBox 125"/>
           <p:cNvSpPr txBox="1"/>
           <p:nvPr/>
         </p:nvSpPr>
@@ -26600,7 +27200,7 @@
       </p:sp>
       <p:sp>
         <p:nvSpPr>
-          <p:cNvPr id="123" name="TextBox 122"/>
+          <p:cNvPr id="127" name="TextBox 126"/>
           <p:cNvSpPr txBox="1"/>
           <p:nvPr/>
         </p:nvSpPr>
@@ -32299,7 +32899,7 @@
         <p:spPr>
           <a:xfrm>
             <a:off x="365760" y="3913632"/>
-            <a:ext cx="5577840" cy="644652"/>
+            <a:ext cx="5577840" cy="859536"/>
           </a:xfrm>
           <a:prstGeom prst="rect">
             <a:avLst/>
@@ -32760,7 +33360,7 @@
                 </a:solidFill>
                 <a:latin typeface="Consolas"/>
               </a:rPr>
-              <a:t>PartNo</a:t>
+              <a:t>PartId</a:t>
             </a:r>
           </a:p>
         </p:txBody>
@@ -32795,7 +33395,7 @@
                 </a:solidFill>
                 <a:latin typeface="Consolas"/>
               </a:rPr>
-              <a:t>varchar(50)</a:t>
+              <a:t>int</a:t>
             </a:r>
           </a:p>
         </p:txBody>
@@ -32861,11 +33461,11 @@
             <a:r>
               <a:rPr sz="800" b="1" i="0">
                 <a:solidFill>
-                  <a:srgbClr val="B45309"/>
-                </a:solidFill>
-                <a:latin typeface="Calibri"/>
-              </a:rPr>
-              <a:t>~</a:t>
+                  <a:srgbClr val="059669"/>
+                </a:solidFill>
+                <a:latin typeface="Calibri"/>
+              </a:rPr>
+              <a:t>FK</a:t>
             </a:r>
           </a:p>
         </p:txBody>
@@ -32900,14 +33500,198 @@
                 </a:solidFill>
                 <a:latin typeface="Calibri"/>
               </a:rPr>
-              <a:t>อ้าง Part.PartNo — UK(AtmModelId,PartNo)</a:t>
-            </a:r>
-          </a:p>
-        </p:txBody>
-      </p:sp>
-      <p:sp>
-        <p:nvSpPr>
-          <p:cNvPr id="65" name="TextBox 64"/>
+              <a:t>→ Part (Restrict)</a:t>
+            </a:r>
+          </a:p>
+        </p:txBody>
+      </p:sp>
+      <p:sp>
+        <p:nvSpPr>
+          <p:cNvPr id="65" name="Rectangle 64"/>
+          <p:cNvSpPr/>
+          <p:nvPr/>
+        </p:nvSpPr>
+        <p:spPr>
+          <a:xfrm>
+            <a:off x="384048" y="4558284"/>
+            <a:ext cx="5541264" cy="214884"/>
+          </a:xfrm>
+          <a:prstGeom prst="rect">
+            <a:avLst/>
+          </a:prstGeom>
+          <a:solidFill>
+            <a:srgbClr val="F3F6FB"/>
+          </a:solidFill>
+          <a:ln>
+            <a:noFill/>
+          </a:ln>
+          <a:effectLst/>
+        </p:spPr>
+        <p:style>
+          <a:lnRef idx="1">
+            <a:schemeClr val="accent1"/>
+          </a:lnRef>
+          <a:fillRef idx="3">
+            <a:schemeClr val="accent1"/>
+          </a:fillRef>
+          <a:effectRef idx="2">
+            <a:schemeClr val="accent1"/>
+          </a:effectRef>
+          <a:fontRef idx="minor">
+            <a:schemeClr val="lt1"/>
+          </a:fontRef>
+        </p:style>
+        <p:txBody>
+          <a:bodyPr rtlCol="0" anchor="ctr"/>
+          <a:lstStyle/>
+          <a:p>
+            <a:pPr algn="ctr"/>
+          </a:p>
+        </p:txBody>
+      </p:sp>
+      <p:sp>
+        <p:nvSpPr>
+          <p:cNvPr id="66" name="TextBox 65"/>
+          <p:cNvSpPr txBox="1"/>
+          <p:nvPr/>
+        </p:nvSpPr>
+        <p:spPr>
+          <a:xfrm>
+            <a:off x="411480" y="4558284"/>
+            <a:ext cx="1209751" cy="214884"/>
+          </a:xfrm>
+          <a:prstGeom prst="rect">
+            <a:avLst/>
+          </a:prstGeom>
+          <a:noFill/>
+        </p:spPr>
+        <p:txBody>
+          <a:bodyPr wrap="square" lIns="27432" rIns="27432" tIns="0" bIns="0" anchor="ctr">
+            <a:spAutoFit/>
+          </a:bodyPr>
+          <a:lstStyle/>
+          <a:p>
+            <a:pPr algn="l"/>
+            <a:r>
+              <a:rPr sz="850" b="1" i="0">
+                <a:solidFill>
+                  <a:srgbClr val="1E2D40"/>
+                </a:solidFill>
+                <a:latin typeface="Consolas"/>
+              </a:rPr>
+              <a:t>PartNo</a:t>
+            </a:r>
+          </a:p>
+        </p:txBody>
+      </p:sp>
+      <p:sp>
+        <p:nvSpPr>
+          <p:cNvPr id="67" name="TextBox 66"/>
+          <p:cNvSpPr txBox="1"/>
+          <p:nvPr/>
+        </p:nvSpPr>
+        <p:spPr>
+          <a:xfrm>
+            <a:off x="1694383" y="4558284"/>
+            <a:ext cx="986637" cy="214884"/>
+          </a:xfrm>
+          <a:prstGeom prst="rect">
+            <a:avLst/>
+          </a:prstGeom>
+          <a:noFill/>
+        </p:spPr>
+        <p:txBody>
+          <a:bodyPr wrap="square" lIns="27432" rIns="27432" tIns="0" bIns="0" anchor="ctr">
+            <a:spAutoFit/>
+          </a:bodyPr>
+          <a:lstStyle/>
+          <a:p>
+            <a:pPr algn="l"/>
+            <a:r>
+              <a:rPr sz="800" b="0" i="0">
+                <a:solidFill>
+                  <a:srgbClr val="2563EB"/>
+                </a:solidFill>
+                <a:latin typeface="Consolas"/>
+              </a:rPr>
+              <a:t>varchar(50)</a:t>
+            </a:r>
+          </a:p>
+        </p:txBody>
+      </p:sp>
+      <p:sp>
+        <p:nvSpPr>
+          <p:cNvPr id="68" name="TextBox 67"/>
+          <p:cNvSpPr txBox="1"/>
+          <p:nvPr/>
+        </p:nvSpPr>
+        <p:spPr>
+          <a:xfrm>
+            <a:off x="2708452" y="4558284"/>
+            <a:ext cx="390448" cy="214884"/>
+          </a:xfrm>
+          <a:prstGeom prst="rect">
+            <a:avLst/>
+          </a:prstGeom>
+          <a:noFill/>
+        </p:spPr>
+        <p:txBody>
+          <a:bodyPr wrap="square" lIns="27432" rIns="27432" tIns="0" bIns="0" anchor="ctr">
+            <a:spAutoFit/>
+          </a:bodyPr>
+          <a:lstStyle/>
+          <a:p>
+            <a:pPr algn="ctr"/>
+            <a:r>
+              <a:rPr sz="700" b="0" i="0">
+                <a:solidFill>
+                  <a:srgbClr val="B0B0B0"/>
+                </a:solidFill>
+                <a:latin typeface="Calibri"/>
+              </a:rPr>
+              <a:t>—</a:t>
+            </a:r>
+          </a:p>
+        </p:txBody>
+      </p:sp>
+      <p:sp>
+        <p:nvSpPr>
+          <p:cNvPr id="69" name="TextBox 68"/>
+          <p:cNvSpPr txBox="1"/>
+          <p:nvPr/>
+        </p:nvSpPr>
+        <p:spPr>
+          <a:xfrm>
+            <a:off x="3535070" y="4558284"/>
+            <a:ext cx="2381097" cy="214884"/>
+          </a:xfrm>
+          <a:prstGeom prst="rect">
+            <a:avLst/>
+          </a:prstGeom>
+          <a:noFill/>
+        </p:spPr>
+        <p:txBody>
+          <a:bodyPr wrap="square" lIns="27432" rIns="27432" tIns="0" bIns="0" anchor="ctr">
+            <a:spAutoFit/>
+          </a:bodyPr>
+          <a:lstStyle/>
+          <a:p>
+            <a:pPr algn="l"/>
+            <a:r>
+              <a:rPr sz="850" b="0" i="0">
+                <a:solidFill>
+                  <a:srgbClr val="1E2D40"/>
+                </a:solidFill>
+                <a:latin typeface="Calibri"/>
+              </a:rPr>
+              <a:t>snapshot — UK(AtmModelId,PartNo)</a:t>
+            </a:r>
+          </a:p>
+        </p:txBody>
+      </p:sp>
+      <p:sp>
+        <p:nvSpPr>
+          <p:cNvPr id="70" name="TextBox 69"/>
           <p:cNvSpPr txBox="1"/>
           <p:nvPr/>
         </p:nvSpPr>
@@ -32942,7 +33726,7 @@
       </p:sp>
       <p:sp>
         <p:nvSpPr>
-          <p:cNvPr id="66" name="Rectangle 65"/>
+          <p:cNvPr id="71" name="Rectangle 70"/>
           <p:cNvSpPr/>
           <p:nvPr/>
         </p:nvSpPr>
@@ -32986,7 +33770,7 @@
       </p:sp>
       <p:sp>
         <p:nvSpPr>
-          <p:cNvPr id="67" name="TextBox 66"/>
+          <p:cNvPr id="72" name="TextBox 71"/>
           <p:cNvSpPr txBox="1"/>
           <p:nvPr/>
         </p:nvSpPr>
@@ -33021,7 +33805,7 @@
       </p:sp>
       <p:sp>
         <p:nvSpPr>
-          <p:cNvPr id="68" name="TextBox 67"/>
+          <p:cNvPr id="73" name="TextBox 72"/>
           <p:cNvSpPr txBox="1"/>
           <p:nvPr/>
         </p:nvSpPr>
@@ -33056,7 +33840,7 @@
       </p:sp>
       <p:sp>
         <p:nvSpPr>
-          <p:cNvPr id="69" name="TextBox 68"/>
+          <p:cNvPr id="74" name="TextBox 73"/>
           <p:cNvSpPr txBox="1"/>
           <p:nvPr/>
         </p:nvSpPr>
@@ -33091,7 +33875,7 @@
       </p:sp>
       <p:sp>
         <p:nvSpPr>
-          <p:cNvPr id="70" name="TextBox 69"/>
+          <p:cNvPr id="75" name="TextBox 74"/>
           <p:cNvSpPr txBox="1"/>
           <p:nvPr/>
         </p:nvSpPr>
@@ -33126,7 +33910,7 @@
       </p:sp>
       <p:sp>
         <p:nvSpPr>
-          <p:cNvPr id="71" name="TextBox 70"/>
+          <p:cNvPr id="76" name="TextBox 75"/>
           <p:cNvSpPr txBox="1"/>
           <p:nvPr/>
         </p:nvSpPr>
@@ -33161,7 +33945,7 @@
       </p:sp>
       <p:sp>
         <p:nvSpPr>
-          <p:cNvPr id="72" name="Rectangle 71"/>
+          <p:cNvPr id="77" name="Rectangle 76"/>
           <p:cNvSpPr/>
           <p:nvPr/>
         </p:nvSpPr>
@@ -33207,7 +33991,7 @@
       </p:sp>
       <p:sp>
         <p:nvSpPr>
-          <p:cNvPr id="73" name="TextBox 72"/>
+          <p:cNvPr id="78" name="TextBox 77"/>
           <p:cNvSpPr txBox="1"/>
           <p:nvPr/>
         </p:nvSpPr>
@@ -33242,7 +34026,7 @@
       </p:sp>
       <p:sp>
         <p:nvSpPr>
-          <p:cNvPr id="74" name="TextBox 73"/>
+          <p:cNvPr id="79" name="TextBox 78"/>
           <p:cNvSpPr txBox="1"/>
           <p:nvPr/>
         </p:nvSpPr>
@@ -33277,7 +34061,7 @@
       </p:sp>
       <p:sp>
         <p:nvSpPr>
-          <p:cNvPr id="75" name="TextBox 74"/>
+          <p:cNvPr id="80" name="TextBox 79"/>
           <p:cNvSpPr txBox="1"/>
           <p:nvPr/>
         </p:nvSpPr>
@@ -33312,7 +34096,7 @@
       </p:sp>
       <p:sp>
         <p:nvSpPr>
-          <p:cNvPr id="76" name="TextBox 75"/>
+          <p:cNvPr id="81" name="TextBox 80"/>
           <p:cNvSpPr txBox="1"/>
           <p:nvPr/>
         </p:nvSpPr>
@@ -33347,7 +34131,7 @@
       </p:sp>
       <p:sp>
         <p:nvSpPr>
-          <p:cNvPr id="77" name="TextBox 76"/>
+          <p:cNvPr id="82" name="TextBox 81"/>
           <p:cNvSpPr txBox="1"/>
           <p:nvPr/>
         </p:nvSpPr>
@@ -33382,7 +34166,7 @@
       </p:sp>
       <p:sp>
         <p:nvSpPr>
-          <p:cNvPr id="78" name="Rectangle 77"/>
+          <p:cNvPr id="83" name="Rectangle 82"/>
           <p:cNvSpPr/>
           <p:nvPr/>
         </p:nvSpPr>
@@ -33426,7 +34210,7 @@
       </p:sp>
       <p:sp>
         <p:nvSpPr>
-          <p:cNvPr id="79" name="TextBox 78"/>
+          <p:cNvPr id="84" name="TextBox 83"/>
           <p:cNvSpPr txBox="1"/>
           <p:nvPr/>
         </p:nvSpPr>
@@ -33461,7 +34245,7 @@
       </p:sp>
       <p:sp>
         <p:nvSpPr>
-          <p:cNvPr id="80" name="TextBox 79"/>
+          <p:cNvPr id="85" name="TextBox 84"/>
           <p:cNvSpPr txBox="1"/>
           <p:nvPr/>
         </p:nvSpPr>
@@ -33496,7 +34280,7 @@
       </p:sp>
       <p:sp>
         <p:nvSpPr>
-          <p:cNvPr id="81" name="TextBox 80"/>
+          <p:cNvPr id="86" name="TextBox 85"/>
           <p:cNvSpPr txBox="1"/>
           <p:nvPr/>
         </p:nvSpPr>
@@ -33531,7 +34315,7 @@
       </p:sp>
       <p:sp>
         <p:nvSpPr>
-          <p:cNvPr id="82" name="TextBox 81"/>
+          <p:cNvPr id="87" name="TextBox 86"/>
           <p:cNvSpPr txBox="1"/>
           <p:nvPr/>
         </p:nvSpPr>
@@ -33566,7 +34350,7 @@
       </p:sp>
       <p:sp>
         <p:nvSpPr>
-          <p:cNvPr id="83" name="TextBox 82"/>
+          <p:cNvPr id="88" name="TextBox 87"/>
           <p:cNvSpPr txBox="1"/>
           <p:nvPr/>
         </p:nvSpPr>
@@ -33601,7 +34385,7 @@
       </p:sp>
       <p:sp>
         <p:nvSpPr>
-          <p:cNvPr id="84" name="TextBox 83"/>
+          <p:cNvPr id="89" name="TextBox 88"/>
           <p:cNvSpPr txBox="1"/>
           <p:nvPr/>
         </p:nvSpPr>
@@ -33636,7 +34420,7 @@
       </p:sp>
       <p:sp>
         <p:nvSpPr>
-          <p:cNvPr id="85" name="TextBox 84"/>
+          <p:cNvPr id="90" name="TextBox 89"/>
           <p:cNvSpPr txBox="1"/>
           <p:nvPr/>
         </p:nvSpPr>
@@ -33671,7 +34455,7 @@
       </p:sp>
       <p:sp>
         <p:nvSpPr>
-          <p:cNvPr id="86" name="TextBox 85"/>
+          <p:cNvPr id="91" name="TextBox 90"/>
           <p:cNvSpPr txBox="1"/>
           <p:nvPr/>
         </p:nvSpPr>
@@ -33706,7 +34490,7 @@
       </p:sp>
       <p:sp>
         <p:nvSpPr>
-          <p:cNvPr id="87" name="Rectangle 86"/>
+          <p:cNvPr id="92" name="Rectangle 91"/>
           <p:cNvSpPr/>
           <p:nvPr/>
         </p:nvSpPr>
@@ -33750,7 +34534,7 @@
       </p:sp>
       <p:sp>
         <p:nvSpPr>
-          <p:cNvPr id="88" name="TextBox 87"/>
+          <p:cNvPr id="93" name="TextBox 92"/>
           <p:cNvSpPr txBox="1"/>
           <p:nvPr/>
         </p:nvSpPr>
@@ -33785,7 +34569,7 @@
       </p:sp>
       <p:sp>
         <p:nvSpPr>
-          <p:cNvPr id="89" name="TextBox 88"/>
+          <p:cNvPr id="94" name="TextBox 93"/>
           <p:cNvSpPr txBox="1"/>
           <p:nvPr/>
         </p:nvSpPr>
@@ -33820,7 +34604,7 @@
       </p:sp>
       <p:sp>
         <p:nvSpPr>
-          <p:cNvPr id="90" name="TextBox 89"/>
+          <p:cNvPr id="95" name="TextBox 94"/>
           <p:cNvSpPr txBox="1"/>
           <p:nvPr/>
         </p:nvSpPr>
@@ -33855,7 +34639,7 @@
       </p:sp>
       <p:sp>
         <p:nvSpPr>
-          <p:cNvPr id="91" name="TextBox 90"/>
+          <p:cNvPr id="96" name="TextBox 95"/>
           <p:cNvSpPr txBox="1"/>
           <p:nvPr/>
         </p:nvSpPr>
@@ -33890,7 +34674,7 @@
       </p:sp>
       <p:sp>
         <p:nvSpPr>
-          <p:cNvPr id="92" name="TextBox 91"/>
+          <p:cNvPr id="97" name="TextBox 96"/>
           <p:cNvSpPr txBox="1"/>
           <p:nvPr/>
         </p:nvSpPr>
@@ -33925,7 +34709,7 @@
       </p:sp>
       <p:sp>
         <p:nvSpPr>
-          <p:cNvPr id="93" name="Rectangle 92"/>
+          <p:cNvPr id="98" name="Rectangle 97"/>
           <p:cNvSpPr/>
           <p:nvPr/>
         </p:nvSpPr>
@@ -33969,7 +34753,7 @@
       </p:sp>
       <p:sp>
         <p:nvSpPr>
-          <p:cNvPr id="94" name="TextBox 93"/>
+          <p:cNvPr id="99" name="TextBox 98"/>
           <p:cNvSpPr txBox="1"/>
           <p:nvPr/>
         </p:nvSpPr>
@@ -34004,7 +34788,7 @@
       </p:sp>
       <p:sp>
         <p:nvSpPr>
-          <p:cNvPr id="95" name="TextBox 94"/>
+          <p:cNvPr id="100" name="TextBox 99"/>
           <p:cNvSpPr txBox="1"/>
           <p:nvPr/>
         </p:nvSpPr>
@@ -34039,7 +34823,7 @@
       </p:sp>
       <p:sp>
         <p:nvSpPr>
-          <p:cNvPr id="96" name="TextBox 95"/>
+          <p:cNvPr id="101" name="TextBox 100"/>
           <p:cNvSpPr txBox="1"/>
           <p:nvPr/>
         </p:nvSpPr>
@@ -34074,7 +34858,7 @@
       </p:sp>
       <p:sp>
         <p:nvSpPr>
-          <p:cNvPr id="97" name="TextBox 96"/>
+          <p:cNvPr id="102" name="TextBox 101"/>
           <p:cNvSpPr txBox="1"/>
           <p:nvPr/>
         </p:nvSpPr>
@@ -34109,7 +34893,7 @@
       </p:sp>
       <p:sp>
         <p:nvSpPr>
-          <p:cNvPr id="98" name="TextBox 97"/>
+          <p:cNvPr id="103" name="TextBox 102"/>
           <p:cNvSpPr txBox="1"/>
           <p:nvPr/>
         </p:nvSpPr>
@@ -34144,14 +34928,14 @@
       </p:sp>
       <p:sp>
         <p:nvSpPr>
-          <p:cNvPr id="99" name="Rectangle 98"/>
+          <p:cNvPr id="104" name="Rectangle 103"/>
           <p:cNvSpPr/>
           <p:nvPr/>
         </p:nvSpPr>
         <p:spPr>
           <a:xfrm>
             <a:off x="6217920" y="3364991"/>
-            <a:ext cx="5577840" cy="644652"/>
+            <a:ext cx="5577840" cy="859536"/>
           </a:xfrm>
           <a:prstGeom prst="rect">
             <a:avLst/>
@@ -34190,7 +34974,7 @@
       </p:sp>
       <p:sp>
         <p:nvSpPr>
-          <p:cNvPr id="100" name="TextBox 99"/>
+          <p:cNvPr id="105" name="TextBox 104"/>
           <p:cNvSpPr txBox="1"/>
           <p:nvPr/>
         </p:nvSpPr>
@@ -34225,7 +35009,7 @@
       </p:sp>
       <p:sp>
         <p:nvSpPr>
-          <p:cNvPr id="101" name="TextBox 100"/>
+          <p:cNvPr id="106" name="TextBox 105"/>
           <p:cNvSpPr txBox="1"/>
           <p:nvPr/>
         </p:nvSpPr>
@@ -34260,7 +35044,7 @@
       </p:sp>
       <p:sp>
         <p:nvSpPr>
-          <p:cNvPr id="102" name="TextBox 101"/>
+          <p:cNvPr id="107" name="TextBox 106"/>
           <p:cNvSpPr txBox="1"/>
           <p:nvPr/>
         </p:nvSpPr>
@@ -34295,7 +35079,7 @@
       </p:sp>
       <p:sp>
         <p:nvSpPr>
-          <p:cNvPr id="103" name="TextBox 102"/>
+          <p:cNvPr id="108" name="TextBox 107"/>
           <p:cNvSpPr txBox="1"/>
           <p:nvPr/>
         </p:nvSpPr>
@@ -34330,7 +35114,7 @@
       </p:sp>
       <p:sp>
         <p:nvSpPr>
-          <p:cNvPr id="104" name="TextBox 103"/>
+          <p:cNvPr id="109" name="TextBox 108"/>
           <p:cNvSpPr txBox="1"/>
           <p:nvPr/>
         </p:nvSpPr>
@@ -34365,7 +35149,7 @@
       </p:sp>
       <p:sp>
         <p:nvSpPr>
-          <p:cNvPr id="105" name="Rectangle 104"/>
+          <p:cNvPr id="110" name="Rectangle 109"/>
           <p:cNvSpPr/>
           <p:nvPr/>
         </p:nvSpPr>
@@ -34409,7 +35193,7 @@
       </p:sp>
       <p:sp>
         <p:nvSpPr>
-          <p:cNvPr id="106" name="TextBox 105"/>
+          <p:cNvPr id="111" name="TextBox 110"/>
           <p:cNvSpPr txBox="1"/>
           <p:nvPr/>
         </p:nvSpPr>
@@ -34444,7 +35228,7 @@
       </p:sp>
       <p:sp>
         <p:nvSpPr>
-          <p:cNvPr id="107" name="TextBox 106"/>
+          <p:cNvPr id="112" name="TextBox 111"/>
           <p:cNvSpPr txBox="1"/>
           <p:nvPr/>
         </p:nvSpPr>
@@ -34479,7 +35263,7 @@
       </p:sp>
       <p:sp>
         <p:nvSpPr>
-          <p:cNvPr id="108" name="TextBox 107"/>
+          <p:cNvPr id="113" name="TextBox 112"/>
           <p:cNvSpPr txBox="1"/>
           <p:nvPr/>
         </p:nvSpPr>
@@ -34514,7 +35298,7 @@
       </p:sp>
       <p:sp>
         <p:nvSpPr>
-          <p:cNvPr id="109" name="TextBox 108"/>
+          <p:cNvPr id="114" name="TextBox 113"/>
           <p:cNvSpPr txBox="1"/>
           <p:nvPr/>
         </p:nvSpPr>
@@ -34549,7 +35333,7 @@
       </p:sp>
       <p:sp>
         <p:nvSpPr>
-          <p:cNvPr id="110" name="TextBox 109"/>
+          <p:cNvPr id="115" name="TextBox 114"/>
           <p:cNvSpPr txBox="1"/>
           <p:nvPr/>
         </p:nvSpPr>
@@ -34584,7 +35368,7 @@
       </p:sp>
       <p:sp>
         <p:nvSpPr>
-          <p:cNvPr id="111" name="TextBox 110"/>
+          <p:cNvPr id="116" name="TextBox 115"/>
           <p:cNvSpPr txBox="1"/>
           <p:nvPr/>
         </p:nvSpPr>
@@ -34612,14 +35396,14 @@
                 </a:solidFill>
                 <a:latin typeface="Consolas"/>
               </a:rPr>
-              <a:t>PartNo</a:t>
-            </a:r>
-          </a:p>
-        </p:txBody>
-      </p:sp>
-      <p:sp>
-        <p:nvSpPr>
-          <p:cNvPr id="112" name="TextBox 111"/>
+              <a:t>PartId</a:t>
+            </a:r>
+          </a:p>
+        </p:txBody>
+      </p:sp>
+      <p:sp>
+        <p:nvSpPr>
+          <p:cNvPr id="117" name="TextBox 116"/>
           <p:cNvSpPr txBox="1"/>
           <p:nvPr/>
         </p:nvSpPr>
@@ -34647,14 +35431,14 @@
                 </a:solidFill>
                 <a:latin typeface="Consolas"/>
               </a:rPr>
-              <a:t>varchar(50)</a:t>
-            </a:r>
-          </a:p>
-        </p:txBody>
-      </p:sp>
-      <p:sp>
-        <p:nvSpPr>
-          <p:cNvPr id="113" name="TextBox 112"/>
+              <a:t>int</a:t>
+            </a:r>
+          </a:p>
+        </p:txBody>
+      </p:sp>
+      <p:sp>
+        <p:nvSpPr>
+          <p:cNvPr id="118" name="TextBox 117"/>
           <p:cNvSpPr txBox="1"/>
           <p:nvPr/>
         </p:nvSpPr>
@@ -34689,7 +35473,7 @@
       </p:sp>
       <p:sp>
         <p:nvSpPr>
-          <p:cNvPr id="114" name="TextBox 113"/>
+          <p:cNvPr id="119" name="TextBox 118"/>
           <p:cNvSpPr txBox="1"/>
           <p:nvPr/>
         </p:nvSpPr>
@@ -34713,18 +35497,18 @@
             <a:r>
               <a:rPr sz="800" b="1" i="0">
                 <a:solidFill>
-                  <a:srgbClr val="B45309"/>
-                </a:solidFill>
-                <a:latin typeface="Calibri"/>
-              </a:rPr>
-              <a:t>~</a:t>
-            </a:r>
-          </a:p>
-        </p:txBody>
-      </p:sp>
-      <p:sp>
-        <p:nvSpPr>
-          <p:cNvPr id="115" name="TextBox 114"/>
+                  <a:srgbClr val="059669"/>
+                </a:solidFill>
+                <a:latin typeface="Calibri"/>
+              </a:rPr>
+              <a:t>FK</a:t>
+            </a:r>
+          </a:p>
+        </p:txBody>
+      </p:sp>
+      <p:sp>
+        <p:nvSpPr>
+          <p:cNvPr id="120" name="TextBox 119"/>
           <p:cNvSpPr txBox="1"/>
           <p:nvPr/>
         </p:nvSpPr>
@@ -34752,14 +35536,198 @@
                 </a:solidFill>
                 <a:latin typeface="Calibri"/>
               </a:rPr>
-              <a:t>อ้าง Part.PartNo — UK(GroupId,PartNo)</a:t>
-            </a:r>
-          </a:p>
-        </p:txBody>
-      </p:sp>
-      <p:sp>
-        <p:nvSpPr>
-          <p:cNvPr id="116" name="TextBox 115"/>
+              <a:t>→ Part (Restrict)</a:t>
+            </a:r>
+          </a:p>
+        </p:txBody>
+      </p:sp>
+      <p:sp>
+        <p:nvSpPr>
+          <p:cNvPr id="121" name="Rectangle 120"/>
+          <p:cNvSpPr/>
+          <p:nvPr/>
+        </p:nvSpPr>
+        <p:spPr>
+          <a:xfrm>
+            <a:off x="6236207" y="4009644"/>
+            <a:ext cx="5541264" cy="214884"/>
+          </a:xfrm>
+          <a:prstGeom prst="rect">
+            <a:avLst/>
+          </a:prstGeom>
+          <a:solidFill>
+            <a:srgbClr val="F3F6FB"/>
+          </a:solidFill>
+          <a:ln>
+            <a:noFill/>
+          </a:ln>
+          <a:effectLst/>
+        </p:spPr>
+        <p:style>
+          <a:lnRef idx="1">
+            <a:schemeClr val="accent1"/>
+          </a:lnRef>
+          <a:fillRef idx="3">
+            <a:schemeClr val="accent1"/>
+          </a:fillRef>
+          <a:effectRef idx="2">
+            <a:schemeClr val="accent1"/>
+          </a:effectRef>
+          <a:fontRef idx="minor">
+            <a:schemeClr val="lt1"/>
+          </a:fontRef>
+        </p:style>
+        <p:txBody>
+          <a:bodyPr rtlCol="0" anchor="ctr"/>
+          <a:lstStyle/>
+          <a:p>
+            <a:pPr algn="ctr"/>
+          </a:p>
+        </p:txBody>
+      </p:sp>
+      <p:sp>
+        <p:nvSpPr>
+          <p:cNvPr id="122" name="TextBox 121"/>
+          <p:cNvSpPr txBox="1"/>
+          <p:nvPr/>
+        </p:nvSpPr>
+        <p:spPr>
+          <a:xfrm>
+            <a:off x="6263640" y="4009644"/>
+            <a:ext cx="1209751" cy="214884"/>
+          </a:xfrm>
+          <a:prstGeom prst="rect">
+            <a:avLst/>
+          </a:prstGeom>
+          <a:noFill/>
+        </p:spPr>
+        <p:txBody>
+          <a:bodyPr wrap="square" lIns="27432" rIns="27432" tIns="0" bIns="0" anchor="ctr">
+            <a:spAutoFit/>
+          </a:bodyPr>
+          <a:lstStyle/>
+          <a:p>
+            <a:pPr algn="l"/>
+            <a:r>
+              <a:rPr sz="850" b="1" i="0">
+                <a:solidFill>
+                  <a:srgbClr val="1E2D40"/>
+                </a:solidFill>
+                <a:latin typeface="Consolas"/>
+              </a:rPr>
+              <a:t>PartNo</a:t>
+            </a:r>
+          </a:p>
+        </p:txBody>
+      </p:sp>
+      <p:sp>
+        <p:nvSpPr>
+          <p:cNvPr id="123" name="TextBox 122"/>
+          <p:cNvSpPr txBox="1"/>
+          <p:nvPr/>
+        </p:nvSpPr>
+        <p:spPr>
+          <a:xfrm>
+            <a:off x="7546543" y="4009644"/>
+            <a:ext cx="986637" cy="214884"/>
+          </a:xfrm>
+          <a:prstGeom prst="rect">
+            <a:avLst/>
+          </a:prstGeom>
+          <a:noFill/>
+        </p:spPr>
+        <p:txBody>
+          <a:bodyPr wrap="square" lIns="27432" rIns="27432" tIns="0" bIns="0" anchor="ctr">
+            <a:spAutoFit/>
+          </a:bodyPr>
+          <a:lstStyle/>
+          <a:p>
+            <a:pPr algn="l"/>
+            <a:r>
+              <a:rPr sz="800" b="0" i="0">
+                <a:solidFill>
+                  <a:srgbClr val="2563EB"/>
+                </a:solidFill>
+                <a:latin typeface="Consolas"/>
+              </a:rPr>
+              <a:t>varchar(50)</a:t>
+            </a:r>
+          </a:p>
+        </p:txBody>
+      </p:sp>
+      <p:sp>
+        <p:nvSpPr>
+          <p:cNvPr id="124" name="TextBox 123"/>
+          <p:cNvSpPr txBox="1"/>
+          <p:nvPr/>
+        </p:nvSpPr>
+        <p:spPr>
+          <a:xfrm>
+            <a:off x="8560612" y="4009644"/>
+            <a:ext cx="390448" cy="214884"/>
+          </a:xfrm>
+          <a:prstGeom prst="rect">
+            <a:avLst/>
+          </a:prstGeom>
+          <a:noFill/>
+        </p:spPr>
+        <p:txBody>
+          <a:bodyPr wrap="square" lIns="27432" rIns="27432" tIns="0" bIns="0" anchor="ctr">
+            <a:spAutoFit/>
+          </a:bodyPr>
+          <a:lstStyle/>
+          <a:p>
+            <a:pPr algn="ctr"/>
+            <a:r>
+              <a:rPr sz="700" b="0" i="0">
+                <a:solidFill>
+                  <a:srgbClr val="B0B0B0"/>
+                </a:solidFill>
+                <a:latin typeface="Calibri"/>
+              </a:rPr>
+              <a:t>—</a:t>
+            </a:r>
+          </a:p>
+        </p:txBody>
+      </p:sp>
+      <p:sp>
+        <p:nvSpPr>
+          <p:cNvPr id="125" name="TextBox 124"/>
+          <p:cNvSpPr txBox="1"/>
+          <p:nvPr/>
+        </p:nvSpPr>
+        <p:spPr>
+          <a:xfrm>
+            <a:off x="9387230" y="4009644"/>
+            <a:ext cx="2381097" cy="214884"/>
+          </a:xfrm>
+          <a:prstGeom prst="rect">
+            <a:avLst/>
+          </a:prstGeom>
+          <a:noFill/>
+        </p:spPr>
+        <p:txBody>
+          <a:bodyPr wrap="square" lIns="27432" rIns="27432" tIns="0" bIns="0" anchor="ctr">
+            <a:spAutoFit/>
+          </a:bodyPr>
+          <a:lstStyle/>
+          <a:p>
+            <a:pPr algn="l"/>
+            <a:r>
+              <a:rPr sz="850" b="0" i="0">
+                <a:solidFill>
+                  <a:srgbClr val="1E2D40"/>
+                </a:solidFill>
+                <a:latin typeface="Calibri"/>
+              </a:rPr>
+              <a:t>snapshot — UK(GroupId,PartNo)</a:t>
+            </a:r>
+          </a:p>
+        </p:txBody>
+      </p:sp>
+      <p:sp>
+        <p:nvSpPr>
+          <p:cNvPr id="126" name="TextBox 125"/>
           <p:cNvSpPr txBox="1"/>
           <p:nvPr/>
         </p:nvSpPr>
@@ -34794,7 +35762,7 @@
       </p:sp>
       <p:sp>
         <p:nvSpPr>
-          <p:cNvPr id="117" name="Rectangle 116"/>
+          <p:cNvPr id="127" name="Rectangle 126"/>
           <p:cNvSpPr/>
           <p:nvPr/>
         </p:nvSpPr>
@@ -34838,7 +35806,7 @@
       </p:sp>
       <p:sp>
         <p:nvSpPr>
-          <p:cNvPr id="118" name="TextBox 117"/>
+          <p:cNvPr id="128" name="TextBox 127"/>
           <p:cNvSpPr txBox="1"/>
           <p:nvPr/>
         </p:nvSpPr>
@@ -34873,7 +35841,7 @@
       </p:sp>
       <p:sp>
         <p:nvSpPr>
-          <p:cNvPr id="119" name="TextBox 118"/>
+          <p:cNvPr id="129" name="TextBox 128"/>
           <p:cNvSpPr txBox="1"/>
           <p:nvPr/>
         </p:nvSpPr>
@@ -34908,7 +35876,7 @@
       </p:sp>
       <p:sp>
         <p:nvSpPr>
-          <p:cNvPr id="120" name="TextBox 119"/>
+          <p:cNvPr id="130" name="TextBox 129"/>
           <p:cNvSpPr txBox="1"/>
           <p:nvPr/>
         </p:nvSpPr>
@@ -34943,7 +35911,7 @@
       </p:sp>
       <p:sp>
         <p:nvSpPr>
-          <p:cNvPr id="121" name="TextBox 120"/>
+          <p:cNvPr id="131" name="TextBox 130"/>
           <p:cNvSpPr txBox="1"/>
           <p:nvPr/>
         </p:nvSpPr>
@@ -34978,7 +35946,7 @@
       </p:sp>
       <p:sp>
         <p:nvSpPr>
-          <p:cNvPr id="122" name="TextBox 121"/>
+          <p:cNvPr id="132" name="TextBox 131"/>
           <p:cNvSpPr txBox="1"/>
           <p:nvPr/>
         </p:nvSpPr>
@@ -35013,7 +35981,7 @@
       </p:sp>
       <p:sp>
         <p:nvSpPr>
-          <p:cNvPr id="123" name="Rectangle 122"/>
+          <p:cNvPr id="133" name="Rectangle 132"/>
           <p:cNvSpPr/>
           <p:nvPr/>
         </p:nvSpPr>
@@ -35059,7 +36027,7 @@
       </p:sp>
       <p:sp>
         <p:nvSpPr>
-          <p:cNvPr id="124" name="TextBox 123"/>
+          <p:cNvPr id="134" name="TextBox 133"/>
           <p:cNvSpPr txBox="1"/>
           <p:nvPr/>
         </p:nvSpPr>
@@ -35094,7 +36062,7 @@
       </p:sp>
       <p:sp>
         <p:nvSpPr>
-          <p:cNvPr id="125" name="TextBox 124"/>
+          <p:cNvPr id="135" name="TextBox 134"/>
           <p:cNvSpPr txBox="1"/>
           <p:nvPr/>
         </p:nvSpPr>
@@ -35129,7 +36097,7 @@
       </p:sp>
       <p:sp>
         <p:nvSpPr>
-          <p:cNvPr id="126" name="TextBox 125"/>
+          <p:cNvPr id="136" name="TextBox 135"/>
           <p:cNvSpPr txBox="1"/>
           <p:nvPr/>
         </p:nvSpPr>
@@ -35164,7 +36132,7 @@
       </p:sp>
       <p:sp>
         <p:nvSpPr>
-          <p:cNvPr id="127" name="TextBox 126"/>
+          <p:cNvPr id="137" name="TextBox 136"/>
           <p:cNvSpPr txBox="1"/>
           <p:nvPr/>
         </p:nvSpPr>
@@ -35199,7 +36167,7 @@
       </p:sp>
       <p:sp>
         <p:nvSpPr>
-          <p:cNvPr id="128" name="TextBox 127"/>
+          <p:cNvPr id="138" name="TextBox 137"/>
           <p:cNvSpPr txBox="1"/>
           <p:nvPr/>
         </p:nvSpPr>
@@ -35234,7 +36202,7 @@
       </p:sp>
       <p:sp>
         <p:nvSpPr>
-          <p:cNvPr id="129" name="Rectangle 128"/>
+          <p:cNvPr id="139" name="Rectangle 138"/>
           <p:cNvSpPr/>
           <p:nvPr/>
         </p:nvSpPr>
@@ -35278,7 +36246,7 @@
       </p:sp>
       <p:sp>
         <p:nvSpPr>
-          <p:cNvPr id="130" name="TextBox 129"/>
+          <p:cNvPr id="140" name="TextBox 139"/>
           <p:cNvSpPr txBox="1"/>
           <p:nvPr/>
         </p:nvSpPr>
@@ -35313,7 +36281,7 @@
       </p:sp>
       <p:sp>
         <p:nvSpPr>
-          <p:cNvPr id="131" name="TextBox 130"/>
+          <p:cNvPr id="141" name="TextBox 140"/>
           <p:cNvSpPr txBox="1"/>
           <p:nvPr/>
         </p:nvSpPr>
@@ -35348,7 +36316,7 @@
       </p:sp>
       <p:sp>
         <p:nvSpPr>
-          <p:cNvPr id="132" name="TextBox 131"/>
+          <p:cNvPr id="142" name="TextBox 141"/>
           <p:cNvSpPr txBox="1"/>
           <p:nvPr/>
         </p:nvSpPr>
@@ -35383,7 +36351,7 @@
       </p:sp>
       <p:sp>
         <p:nvSpPr>
-          <p:cNvPr id="133" name="TextBox 132"/>
+          <p:cNvPr id="143" name="TextBox 142"/>
           <p:cNvSpPr txBox="1"/>
           <p:nvPr/>
         </p:nvSpPr>
@@ -35418,7 +36386,7 @@
       </p:sp>
       <p:sp>
         <p:nvSpPr>
-          <p:cNvPr id="134" name="TextBox 133"/>
+          <p:cNvPr id="144" name="TextBox 143"/>
           <p:cNvSpPr txBox="1"/>
           <p:nvPr/>
         </p:nvSpPr>
@@ -35453,7 +36421,7 @@
       </p:sp>
       <p:sp>
         <p:nvSpPr>
-          <p:cNvPr id="135" name="TextBox 134"/>
+          <p:cNvPr id="145" name="TextBox 144"/>
           <p:cNvSpPr txBox="1"/>
           <p:nvPr/>
         </p:nvSpPr>
@@ -35488,7 +36456,7 @@
       </p:sp>
       <p:sp>
         <p:nvSpPr>
-          <p:cNvPr id="136" name="TextBox 135"/>
+          <p:cNvPr id="146" name="TextBox 145"/>
           <p:cNvSpPr txBox="1"/>
           <p:nvPr/>
         </p:nvSpPr>
@@ -35523,7 +36491,7 @@
       </p:sp>
       <p:sp>
         <p:nvSpPr>
-          <p:cNvPr id="137" name="TextBox 136"/>
+          <p:cNvPr id="147" name="TextBox 146"/>
           <p:cNvSpPr txBox="1"/>
           <p:nvPr/>
         </p:nvSpPr>
@@ -35558,7 +36526,7 @@
       </p:sp>
       <p:sp>
         <p:nvSpPr>
-          <p:cNvPr id="138" name="TextBox 137"/>
+          <p:cNvPr id="148" name="TextBox 147"/>
           <p:cNvSpPr txBox="1"/>
           <p:nvPr/>
         </p:nvSpPr>
@@ -35593,7 +36561,7 @@
       </p:sp>
       <p:sp>
         <p:nvSpPr>
-          <p:cNvPr id="139" name="TextBox 138"/>
+          <p:cNvPr id="149" name="TextBox 148"/>
           <p:cNvSpPr txBox="1"/>
           <p:nvPr/>
         </p:nvSpPr>
@@ -35628,7 +36596,7 @@
       </p:sp>
       <p:sp>
         <p:nvSpPr>
-          <p:cNvPr id="140" name="TextBox 139"/>
+          <p:cNvPr id="150" name="TextBox 149"/>
           <p:cNvSpPr txBox="1"/>
           <p:nvPr/>
         </p:nvSpPr>
@@ -35663,7 +36631,7 @@
       </p:sp>
       <p:sp>
         <p:nvSpPr>
-          <p:cNvPr id="141" name="TextBox 140"/>
+          <p:cNvPr id="151" name="TextBox 150"/>
           <p:cNvSpPr txBox="1"/>
           <p:nvPr/>
         </p:nvSpPr>
@@ -35698,7 +36666,7 @@
       </p:sp>
       <p:sp>
         <p:nvSpPr>
-          <p:cNvPr id="142" name="TextBox 141"/>
+          <p:cNvPr id="152" name="TextBox 151"/>
           <p:cNvSpPr txBox="1"/>
           <p:nvPr/>
         </p:nvSpPr>
@@ -35733,7 +36701,7 @@
       </p:sp>
       <p:sp>
         <p:nvSpPr>
-          <p:cNvPr id="143" name="TextBox 142"/>
+          <p:cNvPr id="153" name="TextBox 152"/>
           <p:cNvSpPr txBox="1"/>
           <p:nvPr/>
         </p:nvSpPr>
@@ -35768,7 +36736,7 @@
       </p:sp>
       <p:sp>
         <p:nvSpPr>
-          <p:cNvPr id="144" name="TextBox 143"/>
+          <p:cNvPr id="154" name="TextBox 153"/>
           <p:cNvSpPr txBox="1"/>
           <p:nvPr/>
         </p:nvSpPr>
@@ -35803,7 +36771,7 @@
       </p:sp>
       <p:sp>
         <p:nvSpPr>
-          <p:cNvPr id="145" name="TextBox 144"/>
+          <p:cNvPr id="155" name="TextBox 154"/>
           <p:cNvSpPr txBox="1"/>
           <p:nvPr/>
         </p:nvSpPr>
@@ -35838,7 +36806,7 @@
       </p:sp>
       <p:sp>
         <p:nvSpPr>
-          <p:cNvPr id="146" name="TextBox 145"/>
+          <p:cNvPr id="156" name="TextBox 155"/>
           <p:cNvSpPr txBox="1"/>
           <p:nvPr/>
         </p:nvSpPr>
@@ -35873,7 +36841,7 @@
       </p:sp>
       <p:sp>
         <p:nvSpPr>
-          <p:cNvPr id="147" name="TextBox 146"/>
+          <p:cNvPr id="157" name="TextBox 156"/>
           <p:cNvSpPr txBox="1"/>
           <p:nvPr/>
         </p:nvSpPr>
@@ -36318,7 +37286,7 @@
         <p:spPr>
           <a:xfrm>
             <a:off x="457200" y="1444752"/>
-            <a:ext cx="5486400" cy="1074419"/>
+            <a:ext cx="5486400" cy="1504188"/>
           </a:xfrm>
           <a:prstGeom prst="rect">
             <a:avLst/>
@@ -36744,7 +37712,7 @@
                 </a:solidFill>
                 <a:latin typeface="Calibri"/>
               </a:rPr>
-              <a:t>→ Part</a:t>
+              <a:t>→ Part — UQ(PartId,LocationId)</a:t>
             </a:r>
           </a:p>
         </p:txBody>
@@ -37250,7 +38218,331 @@
       </p:sp>
       <p:sp>
         <p:nvSpPr>
-          <p:cNvPr id="38" name="TextBox 37"/>
+          <p:cNvPr id="38" name="Rectangle 37"/>
+          <p:cNvSpPr/>
+          <p:nvPr/>
+        </p:nvSpPr>
+        <p:spPr>
+          <a:xfrm>
+            <a:off x="475488" y="2519172"/>
+            <a:ext cx="5449824" cy="214884"/>
+          </a:xfrm>
+          <a:prstGeom prst="rect">
+            <a:avLst/>
+          </a:prstGeom>
+          <a:solidFill>
+            <a:srgbClr val="F3F6FB"/>
+          </a:solidFill>
+          <a:ln>
+            <a:noFill/>
+          </a:ln>
+          <a:effectLst/>
+        </p:spPr>
+        <p:style>
+          <a:lnRef idx="1">
+            <a:schemeClr val="accent1"/>
+          </a:lnRef>
+          <a:fillRef idx="3">
+            <a:schemeClr val="accent1"/>
+          </a:fillRef>
+          <a:effectRef idx="2">
+            <a:schemeClr val="accent1"/>
+          </a:effectRef>
+          <a:fontRef idx="minor">
+            <a:schemeClr val="lt1"/>
+          </a:fontRef>
+        </p:style>
+        <p:txBody>
+          <a:bodyPr rtlCol="0" anchor="ctr"/>
+          <a:lstStyle/>
+          <a:p>
+            <a:pPr algn="ctr"/>
+          </a:p>
+        </p:txBody>
+      </p:sp>
+      <p:sp>
+        <p:nvSpPr>
+          <p:cNvPr id="39" name="TextBox 38"/>
+          <p:cNvSpPr txBox="1"/>
+          <p:nvPr/>
+        </p:nvSpPr>
+        <p:spPr>
+          <a:xfrm>
+            <a:off x="502920" y="2519172"/>
+            <a:ext cx="1188720" cy="214884"/>
+          </a:xfrm>
+          <a:prstGeom prst="rect">
+            <a:avLst/>
+          </a:prstGeom>
+          <a:noFill/>
+        </p:spPr>
+        <p:txBody>
+          <a:bodyPr wrap="square" lIns="27432" rIns="27432" tIns="0" bIns="0" anchor="ctr">
+            <a:spAutoFit/>
+          </a:bodyPr>
+          <a:lstStyle/>
+          <a:p>
+            <a:pPr algn="l"/>
+            <a:r>
+              <a:rPr sz="850" b="1" i="0">
+                <a:solidFill>
+                  <a:srgbClr val="1E2D40"/>
+                </a:solidFill>
+                <a:latin typeface="Consolas"/>
+              </a:rPr>
+              <a:t>UpdatedAt</a:t>
+            </a:r>
+          </a:p>
+        </p:txBody>
+      </p:sp>
+      <p:sp>
+        <p:nvSpPr>
+          <p:cNvPr id="40" name="TextBox 39"/>
+          <p:cNvSpPr txBox="1"/>
+          <p:nvPr/>
+        </p:nvSpPr>
+        <p:spPr>
+          <a:xfrm>
+            <a:off x="1764792" y="2519172"/>
+            <a:ext cx="969264" cy="214884"/>
+          </a:xfrm>
+          <a:prstGeom prst="rect">
+            <a:avLst/>
+          </a:prstGeom>
+          <a:noFill/>
+        </p:spPr>
+        <p:txBody>
+          <a:bodyPr wrap="square" lIns="27432" rIns="27432" tIns="0" bIns="0" anchor="ctr">
+            <a:spAutoFit/>
+          </a:bodyPr>
+          <a:lstStyle/>
+          <a:p>
+            <a:pPr algn="l"/>
+            <a:r>
+              <a:rPr sz="800" b="0" i="0">
+                <a:solidFill>
+                  <a:srgbClr val="2563EB"/>
+                </a:solidFill>
+                <a:latin typeface="Consolas"/>
+              </a:rPr>
+              <a:t>datetime</a:t>
+            </a:r>
+          </a:p>
+        </p:txBody>
+      </p:sp>
+      <p:sp>
+        <p:nvSpPr>
+          <p:cNvPr id="41" name="TextBox 40"/>
+          <p:cNvSpPr txBox="1"/>
+          <p:nvPr/>
+        </p:nvSpPr>
+        <p:spPr>
+          <a:xfrm>
+            <a:off x="2761488" y="2519172"/>
+            <a:ext cx="384048" cy="214884"/>
+          </a:xfrm>
+          <a:prstGeom prst="rect">
+            <a:avLst/>
+          </a:prstGeom>
+          <a:noFill/>
+        </p:spPr>
+        <p:txBody>
+          <a:bodyPr wrap="square" lIns="27432" rIns="27432" tIns="0" bIns="0" anchor="ctr">
+            <a:spAutoFit/>
+          </a:bodyPr>
+          <a:lstStyle/>
+          <a:p>
+            <a:pPr algn="ctr"/>
+            <a:r>
+              <a:rPr sz="700" b="0" i="0">
+                <a:solidFill>
+                  <a:srgbClr val="B0B0B0"/>
+                </a:solidFill>
+                <a:latin typeface="Calibri"/>
+              </a:rPr>
+              <a:t>—</a:t>
+            </a:r>
+          </a:p>
+        </p:txBody>
+      </p:sp>
+      <p:sp>
+        <p:nvSpPr>
+          <p:cNvPr id="42" name="TextBox 41"/>
+          <p:cNvSpPr txBox="1"/>
+          <p:nvPr/>
+        </p:nvSpPr>
+        <p:spPr>
+          <a:xfrm>
+            <a:off x="3575304" y="2519172"/>
+            <a:ext cx="2340864" cy="214884"/>
+          </a:xfrm>
+          <a:prstGeom prst="rect">
+            <a:avLst/>
+          </a:prstGeom>
+          <a:noFill/>
+        </p:spPr>
+        <p:txBody>
+          <a:bodyPr wrap="square" lIns="27432" rIns="27432" tIns="0" bIns="0" anchor="ctr">
+            <a:spAutoFit/>
+          </a:bodyPr>
+          <a:lstStyle/>
+          <a:p>
+            <a:pPr algn="l"/>
+            <a:r>
+              <a:rPr sz="850" b="0" i="0">
+                <a:solidFill>
+                  <a:srgbClr val="1E2D40"/>
+                </a:solidFill>
+                <a:latin typeface="Calibri"/>
+              </a:rPr>
+              <a:t>เวลายอดเปลี่ยนล่าสุด</a:t>
+            </a:r>
+          </a:p>
+        </p:txBody>
+      </p:sp>
+      <p:sp>
+        <p:nvSpPr>
+          <p:cNvPr id="43" name="TextBox 42"/>
+          <p:cNvSpPr txBox="1"/>
+          <p:nvPr/>
+        </p:nvSpPr>
+        <p:spPr>
+          <a:xfrm>
+            <a:off x="502920" y="2734056"/>
+            <a:ext cx="1188720" cy="214884"/>
+          </a:xfrm>
+          <a:prstGeom prst="rect">
+            <a:avLst/>
+          </a:prstGeom>
+          <a:noFill/>
+        </p:spPr>
+        <p:txBody>
+          <a:bodyPr wrap="square" lIns="27432" rIns="27432" tIns="0" bIns="0" anchor="ctr">
+            <a:spAutoFit/>
+          </a:bodyPr>
+          <a:lstStyle/>
+          <a:p>
+            <a:pPr algn="l"/>
+            <a:r>
+              <a:rPr sz="850" b="1" i="0">
+                <a:solidFill>
+                  <a:srgbClr val="1E2D40"/>
+                </a:solidFill>
+                <a:latin typeface="Consolas"/>
+              </a:rPr>
+              <a:t>RowVersion</a:t>
+            </a:r>
+          </a:p>
+        </p:txBody>
+      </p:sp>
+      <p:sp>
+        <p:nvSpPr>
+          <p:cNvPr id="44" name="TextBox 43"/>
+          <p:cNvSpPr txBox="1"/>
+          <p:nvPr/>
+        </p:nvSpPr>
+        <p:spPr>
+          <a:xfrm>
+            <a:off x="1764792" y="2734056"/>
+            <a:ext cx="969264" cy="214884"/>
+          </a:xfrm>
+          <a:prstGeom prst="rect">
+            <a:avLst/>
+          </a:prstGeom>
+          <a:noFill/>
+        </p:spPr>
+        <p:txBody>
+          <a:bodyPr wrap="square" lIns="27432" rIns="27432" tIns="0" bIns="0" anchor="ctr">
+            <a:spAutoFit/>
+          </a:bodyPr>
+          <a:lstStyle/>
+          <a:p>
+            <a:pPr algn="l"/>
+            <a:r>
+              <a:rPr sz="800" b="0" i="0">
+                <a:solidFill>
+                  <a:srgbClr val="2563EB"/>
+                </a:solidFill>
+                <a:latin typeface="Consolas"/>
+              </a:rPr>
+              <a:t>varchar(32)</a:t>
+            </a:r>
+          </a:p>
+        </p:txBody>
+      </p:sp>
+      <p:sp>
+        <p:nvSpPr>
+          <p:cNvPr id="45" name="TextBox 44"/>
+          <p:cNvSpPr txBox="1"/>
+          <p:nvPr/>
+        </p:nvSpPr>
+        <p:spPr>
+          <a:xfrm>
+            <a:off x="2761488" y="2734056"/>
+            <a:ext cx="384048" cy="214884"/>
+          </a:xfrm>
+          <a:prstGeom prst="rect">
+            <a:avLst/>
+          </a:prstGeom>
+          <a:noFill/>
+        </p:spPr>
+        <p:txBody>
+          <a:bodyPr wrap="square" lIns="27432" rIns="27432" tIns="0" bIns="0" anchor="ctr">
+            <a:spAutoFit/>
+          </a:bodyPr>
+          <a:lstStyle/>
+          <a:p>
+            <a:pPr algn="ctr"/>
+            <a:r>
+              <a:rPr sz="700" b="0" i="0">
+                <a:solidFill>
+                  <a:srgbClr val="B0B0B0"/>
+                </a:solidFill>
+                <a:latin typeface="Calibri"/>
+              </a:rPr>
+              <a:t>—</a:t>
+            </a:r>
+          </a:p>
+        </p:txBody>
+      </p:sp>
+      <p:sp>
+        <p:nvSpPr>
+          <p:cNvPr id="46" name="TextBox 45"/>
+          <p:cNvSpPr txBox="1"/>
+          <p:nvPr/>
+        </p:nvSpPr>
+        <p:spPr>
+          <a:xfrm>
+            <a:off x="3575304" y="2734056"/>
+            <a:ext cx="2340864" cy="214884"/>
+          </a:xfrm>
+          <a:prstGeom prst="rect">
+            <a:avLst/>
+          </a:prstGeom>
+          <a:noFill/>
+        </p:spPr>
+        <p:txBody>
+          <a:bodyPr wrap="square" lIns="27432" rIns="27432" tIns="0" bIns="0" anchor="ctr">
+            <a:spAutoFit/>
+          </a:bodyPr>
+          <a:lstStyle/>
+          <a:p>
+            <a:pPr algn="l"/>
+            <a:r>
+              <a:rPr sz="850" b="0" i="0">
+                <a:solidFill>
+                  <a:srgbClr val="1E2D40"/>
+                </a:solidFill>
+                <a:latin typeface="Calibri"/>
+              </a:rPr>
+              <a:t>concurrency token (กันยอดทับกัน)</a:t>
+            </a:r>
+          </a:p>
+        </p:txBody>
+      </p:sp>
+      <p:sp>
+        <p:nvSpPr>
+          <p:cNvPr id="47" name="TextBox 46"/>
           <p:cNvSpPr txBox="1"/>
           <p:nvPr/>
         </p:nvSpPr>
@@ -37285,7 +38577,7 @@
       </p:sp>
       <p:sp>
         <p:nvSpPr>
-          <p:cNvPr id="39" name="Rectangle 38"/>
+          <p:cNvPr id="48" name="Rectangle 47"/>
           <p:cNvSpPr/>
           <p:nvPr/>
         </p:nvSpPr>
@@ -37329,7 +38621,7 @@
       </p:sp>
       <p:sp>
         <p:nvSpPr>
-          <p:cNvPr id="40" name="TextBox 39"/>
+          <p:cNvPr id="49" name="TextBox 48"/>
           <p:cNvSpPr txBox="1"/>
           <p:nvPr/>
         </p:nvSpPr>
@@ -37364,7 +38656,7 @@
       </p:sp>
       <p:sp>
         <p:nvSpPr>
-          <p:cNvPr id="41" name="TextBox 40"/>
+          <p:cNvPr id="50" name="TextBox 49"/>
           <p:cNvSpPr txBox="1"/>
           <p:nvPr/>
         </p:nvSpPr>
@@ -37399,7 +38691,7 @@
       </p:sp>
       <p:sp>
         <p:nvSpPr>
-          <p:cNvPr id="42" name="TextBox 41"/>
+          <p:cNvPr id="51" name="TextBox 50"/>
           <p:cNvSpPr txBox="1"/>
           <p:nvPr/>
         </p:nvSpPr>
@@ -37434,7 +38726,7 @@
       </p:sp>
       <p:sp>
         <p:nvSpPr>
-          <p:cNvPr id="43" name="TextBox 42"/>
+          <p:cNvPr id="52" name="TextBox 51"/>
           <p:cNvSpPr txBox="1"/>
           <p:nvPr/>
         </p:nvSpPr>
@@ -37469,7 +38761,7 @@
       </p:sp>
       <p:sp>
         <p:nvSpPr>
-          <p:cNvPr id="44" name="TextBox 43"/>
+          <p:cNvPr id="53" name="TextBox 52"/>
           <p:cNvSpPr txBox="1"/>
           <p:nvPr/>
         </p:nvSpPr>
@@ -37504,7 +38796,7 @@
       </p:sp>
       <p:sp>
         <p:nvSpPr>
-          <p:cNvPr id="45" name="Rectangle 44"/>
+          <p:cNvPr id="54" name="Rectangle 53"/>
           <p:cNvSpPr/>
           <p:nvPr/>
         </p:nvSpPr>
@@ -37550,7 +38842,7 @@
       </p:sp>
       <p:sp>
         <p:nvSpPr>
-          <p:cNvPr id="46" name="TextBox 45"/>
+          <p:cNvPr id="55" name="TextBox 54"/>
           <p:cNvSpPr txBox="1"/>
           <p:nvPr/>
         </p:nvSpPr>
@@ -37585,7 +38877,7 @@
       </p:sp>
       <p:sp>
         <p:nvSpPr>
-          <p:cNvPr id="47" name="TextBox 46"/>
+          <p:cNvPr id="56" name="TextBox 55"/>
           <p:cNvSpPr txBox="1"/>
           <p:nvPr/>
         </p:nvSpPr>
@@ -37620,7 +38912,7 @@
       </p:sp>
       <p:sp>
         <p:nvSpPr>
-          <p:cNvPr id="48" name="TextBox 47"/>
+          <p:cNvPr id="57" name="TextBox 56"/>
           <p:cNvSpPr txBox="1"/>
           <p:nvPr/>
         </p:nvSpPr>
@@ -37655,7 +38947,7 @@
       </p:sp>
       <p:sp>
         <p:nvSpPr>
-          <p:cNvPr id="49" name="TextBox 48"/>
+          <p:cNvPr id="58" name="TextBox 57"/>
           <p:cNvSpPr txBox="1"/>
           <p:nvPr/>
         </p:nvSpPr>
@@ -37690,7 +38982,7 @@
       </p:sp>
       <p:sp>
         <p:nvSpPr>
-          <p:cNvPr id="50" name="TextBox 49"/>
+          <p:cNvPr id="59" name="TextBox 58"/>
           <p:cNvSpPr txBox="1"/>
           <p:nvPr/>
         </p:nvSpPr>
@@ -37725,7 +39017,7 @@
       </p:sp>
       <p:sp>
         <p:nvSpPr>
-          <p:cNvPr id="51" name="Rectangle 50"/>
+          <p:cNvPr id="60" name="Rectangle 59"/>
           <p:cNvSpPr/>
           <p:nvPr/>
         </p:nvSpPr>
@@ -37769,7 +39061,7 @@
       </p:sp>
       <p:sp>
         <p:nvSpPr>
-          <p:cNvPr id="52" name="TextBox 51"/>
+          <p:cNvPr id="61" name="TextBox 60"/>
           <p:cNvSpPr txBox="1"/>
           <p:nvPr/>
         </p:nvSpPr>
@@ -37804,7 +39096,7 @@
       </p:sp>
       <p:sp>
         <p:nvSpPr>
-          <p:cNvPr id="53" name="TextBox 52"/>
+          <p:cNvPr id="62" name="TextBox 61"/>
           <p:cNvSpPr txBox="1"/>
           <p:nvPr/>
         </p:nvSpPr>
@@ -37839,7 +39131,7 @@
       </p:sp>
       <p:sp>
         <p:nvSpPr>
-          <p:cNvPr id="54" name="TextBox 53"/>
+          <p:cNvPr id="63" name="TextBox 62"/>
           <p:cNvSpPr txBox="1"/>
           <p:nvPr/>
         </p:nvSpPr>
@@ -37874,7 +39166,7 @@
       </p:sp>
       <p:sp>
         <p:nvSpPr>
-          <p:cNvPr id="55" name="TextBox 54"/>
+          <p:cNvPr id="64" name="TextBox 63"/>
           <p:cNvSpPr txBox="1"/>
           <p:nvPr/>
         </p:nvSpPr>
@@ -37909,7 +39201,7 @@
       </p:sp>
       <p:sp>
         <p:nvSpPr>
-          <p:cNvPr id="56" name="TextBox 55"/>
+          <p:cNvPr id="65" name="TextBox 64"/>
           <p:cNvSpPr txBox="1"/>
           <p:nvPr/>
         </p:nvSpPr>
@@ -37944,7 +39236,7 @@
       </p:sp>
       <p:sp>
         <p:nvSpPr>
-          <p:cNvPr id="57" name="TextBox 56"/>
+          <p:cNvPr id="66" name="TextBox 65"/>
           <p:cNvSpPr txBox="1"/>
           <p:nvPr/>
         </p:nvSpPr>
@@ -37979,7 +39271,7 @@
       </p:sp>
       <p:sp>
         <p:nvSpPr>
-          <p:cNvPr id="58" name="TextBox 57"/>
+          <p:cNvPr id="67" name="TextBox 66"/>
           <p:cNvSpPr txBox="1"/>
           <p:nvPr/>
         </p:nvSpPr>
@@ -38014,7 +39306,7 @@
       </p:sp>
       <p:sp>
         <p:nvSpPr>
-          <p:cNvPr id="59" name="TextBox 58"/>
+          <p:cNvPr id="68" name="TextBox 67"/>
           <p:cNvSpPr txBox="1"/>
           <p:nvPr/>
         </p:nvSpPr>
@@ -38049,7 +39341,7 @@
       </p:sp>
       <p:sp>
         <p:nvSpPr>
-          <p:cNvPr id="60" name="TextBox 59"/>
+          <p:cNvPr id="69" name="TextBox 68"/>
           <p:cNvSpPr txBox="1"/>
           <p:nvPr/>
         </p:nvSpPr>
@@ -38084,7 +39376,7 @@
       </p:sp>
       <p:sp>
         <p:nvSpPr>
-          <p:cNvPr id="61" name="TextBox 60"/>
+          <p:cNvPr id="70" name="TextBox 69"/>
           <p:cNvSpPr txBox="1"/>
           <p:nvPr/>
         </p:nvSpPr>
@@ -38119,7 +39411,7 @@
       </p:sp>
       <p:sp>
         <p:nvSpPr>
-          <p:cNvPr id="62" name="Rectangle 61"/>
+          <p:cNvPr id="71" name="Rectangle 70"/>
           <p:cNvSpPr/>
           <p:nvPr/>
         </p:nvSpPr>
@@ -38163,7 +39455,7 @@
       </p:sp>
       <p:sp>
         <p:nvSpPr>
-          <p:cNvPr id="63" name="TextBox 62"/>
+          <p:cNvPr id="72" name="TextBox 71"/>
           <p:cNvSpPr txBox="1"/>
           <p:nvPr/>
         </p:nvSpPr>
@@ -38198,7 +39490,7 @@
       </p:sp>
       <p:sp>
         <p:nvSpPr>
-          <p:cNvPr id="64" name="TextBox 63"/>
+          <p:cNvPr id="73" name="TextBox 72"/>
           <p:cNvSpPr txBox="1"/>
           <p:nvPr/>
         </p:nvSpPr>
@@ -38233,7 +39525,7 @@
       </p:sp>
       <p:sp>
         <p:nvSpPr>
-          <p:cNvPr id="65" name="TextBox 64"/>
+          <p:cNvPr id="74" name="TextBox 73"/>
           <p:cNvSpPr txBox="1"/>
           <p:nvPr/>
         </p:nvSpPr>
@@ -38268,7 +39560,7 @@
       </p:sp>
       <p:sp>
         <p:nvSpPr>
-          <p:cNvPr id="66" name="TextBox 65"/>
+          <p:cNvPr id="75" name="TextBox 74"/>
           <p:cNvSpPr txBox="1"/>
           <p:nvPr/>
         </p:nvSpPr>
@@ -38303,7 +39595,7 @@
       </p:sp>
       <p:sp>
         <p:nvSpPr>
-          <p:cNvPr id="67" name="TextBox 66"/>
+          <p:cNvPr id="76" name="TextBox 75"/>
           <p:cNvSpPr txBox="1"/>
           <p:nvPr/>
         </p:nvSpPr>
@@ -38338,7 +39630,7 @@
       </p:sp>
       <p:sp>
         <p:nvSpPr>
-          <p:cNvPr id="68" name="TextBox 67"/>
+          <p:cNvPr id="77" name="TextBox 76"/>
           <p:cNvSpPr txBox="1"/>
           <p:nvPr/>
         </p:nvSpPr>
@@ -38373,7 +39665,7 @@
       </p:sp>
       <p:sp>
         <p:nvSpPr>
-          <p:cNvPr id="69" name="TextBox 68"/>
+          <p:cNvPr id="78" name="TextBox 77"/>
           <p:cNvSpPr txBox="1"/>
           <p:nvPr/>
         </p:nvSpPr>
@@ -38408,7 +39700,7 @@
       </p:sp>
       <p:sp>
         <p:nvSpPr>
-          <p:cNvPr id="70" name="TextBox 69"/>
+          <p:cNvPr id="79" name="TextBox 78"/>
           <p:cNvSpPr txBox="1"/>
           <p:nvPr/>
         </p:nvSpPr>
@@ -38443,7 +39735,7 @@
       </p:sp>
       <p:sp>
         <p:nvSpPr>
-          <p:cNvPr id="71" name="TextBox 70"/>
+          <p:cNvPr id="80" name="TextBox 79"/>
           <p:cNvSpPr txBox="1"/>
           <p:nvPr/>
         </p:nvSpPr>
@@ -38478,7 +39770,7 @@
       </p:sp>
       <p:sp>
         <p:nvSpPr>
-          <p:cNvPr id="72" name="Rectangle 71"/>
+          <p:cNvPr id="81" name="Rectangle 80"/>
           <p:cNvSpPr/>
           <p:nvPr/>
         </p:nvSpPr>
@@ -38522,7 +39814,7 @@
       </p:sp>
       <p:sp>
         <p:nvSpPr>
-          <p:cNvPr id="73" name="TextBox 72"/>
+          <p:cNvPr id="82" name="TextBox 81"/>
           <p:cNvSpPr txBox="1"/>
           <p:nvPr/>
         </p:nvSpPr>
@@ -38557,7 +39849,7 @@
       </p:sp>
       <p:sp>
         <p:nvSpPr>
-          <p:cNvPr id="74" name="TextBox 73"/>
+          <p:cNvPr id="83" name="TextBox 82"/>
           <p:cNvSpPr txBox="1"/>
           <p:nvPr/>
         </p:nvSpPr>
@@ -38592,7 +39884,7 @@
       </p:sp>
       <p:sp>
         <p:nvSpPr>
-          <p:cNvPr id="75" name="TextBox 74"/>
+          <p:cNvPr id="84" name="TextBox 83"/>
           <p:cNvSpPr txBox="1"/>
           <p:nvPr/>
         </p:nvSpPr>
@@ -38627,7 +39919,7 @@
       </p:sp>
       <p:sp>
         <p:nvSpPr>
-          <p:cNvPr id="76" name="TextBox 75"/>
+          <p:cNvPr id="85" name="TextBox 84"/>
           <p:cNvSpPr txBox="1"/>
           <p:nvPr/>
         </p:nvSpPr>
@@ -38662,7 +39954,7 @@
       </p:sp>
       <p:sp>
         <p:nvSpPr>
-          <p:cNvPr id="77" name="TextBox 76"/>
+          <p:cNvPr id="86" name="TextBox 85"/>
           <p:cNvSpPr txBox="1"/>
           <p:nvPr/>
         </p:nvSpPr>
@@ -38697,7 +39989,7 @@
       </p:sp>
       <p:sp>
         <p:nvSpPr>
-          <p:cNvPr id="78" name="TextBox 77"/>
+          <p:cNvPr id="87" name="TextBox 86"/>
           <p:cNvSpPr txBox="1"/>
           <p:nvPr/>
         </p:nvSpPr>
@@ -38732,7 +40024,7 @@
       </p:sp>
       <p:sp>
         <p:nvSpPr>
-          <p:cNvPr id="79" name="TextBox 78"/>
+          <p:cNvPr id="88" name="TextBox 87"/>
           <p:cNvSpPr txBox="1"/>
           <p:nvPr/>
         </p:nvSpPr>
@@ -38767,7 +40059,7 @@
       </p:sp>
       <p:sp>
         <p:nvSpPr>
-          <p:cNvPr id="80" name="TextBox 79"/>
+          <p:cNvPr id="89" name="TextBox 88"/>
           <p:cNvSpPr txBox="1"/>
           <p:nvPr/>
         </p:nvSpPr>
@@ -38802,7 +40094,7 @@
       </p:sp>
       <p:sp>
         <p:nvSpPr>
-          <p:cNvPr id="81" name="Rectangle 80"/>
+          <p:cNvPr id="90" name="Rectangle 89"/>
           <p:cNvSpPr/>
           <p:nvPr/>
         </p:nvSpPr>
@@ -38846,7 +40138,7 @@
       </p:sp>
       <p:sp>
         <p:nvSpPr>
-          <p:cNvPr id="82" name="TextBox 81"/>
+          <p:cNvPr id="91" name="TextBox 90"/>
           <p:cNvSpPr txBox="1"/>
           <p:nvPr/>
         </p:nvSpPr>
@@ -38881,7 +40173,7 @@
       </p:sp>
       <p:sp>
         <p:nvSpPr>
-          <p:cNvPr id="83" name="TextBox 82"/>
+          <p:cNvPr id="92" name="TextBox 91"/>
           <p:cNvSpPr txBox="1"/>
           <p:nvPr/>
         </p:nvSpPr>
@@ -38916,7 +40208,7 @@
       </p:sp>
       <p:sp>
         <p:nvSpPr>
-          <p:cNvPr id="84" name="TextBox 83"/>
+          <p:cNvPr id="93" name="TextBox 92"/>
           <p:cNvSpPr txBox="1"/>
           <p:nvPr/>
         </p:nvSpPr>
@@ -38951,7 +40243,7 @@
       </p:sp>
       <p:sp>
         <p:nvSpPr>
-          <p:cNvPr id="85" name="TextBox 84"/>
+          <p:cNvPr id="94" name="TextBox 93"/>
           <p:cNvSpPr txBox="1"/>
           <p:nvPr/>
         </p:nvSpPr>
@@ -38986,7 +40278,7 @@
       </p:sp>
       <p:sp>
         <p:nvSpPr>
-          <p:cNvPr id="86" name="TextBox 85"/>
+          <p:cNvPr id="95" name="TextBox 94"/>
           <p:cNvSpPr txBox="1"/>
           <p:nvPr/>
         </p:nvSpPr>
@@ -39021,7 +40313,7 @@
       </p:sp>
       <p:sp>
         <p:nvSpPr>
-          <p:cNvPr id="87" name="TextBox 86"/>
+          <p:cNvPr id="96" name="TextBox 95"/>
           <p:cNvSpPr txBox="1"/>
           <p:nvPr/>
         </p:nvSpPr>
@@ -39056,7 +40348,7 @@
       </p:sp>
       <p:sp>
         <p:nvSpPr>
-          <p:cNvPr id="88" name="TextBox 87"/>
+          <p:cNvPr id="97" name="TextBox 96"/>
           <p:cNvSpPr txBox="1"/>
           <p:nvPr/>
         </p:nvSpPr>
@@ -39091,7 +40383,7 @@
       </p:sp>
       <p:sp>
         <p:nvSpPr>
-          <p:cNvPr id="89" name="TextBox 88"/>
+          <p:cNvPr id="98" name="TextBox 97"/>
           <p:cNvSpPr txBox="1"/>
           <p:nvPr/>
         </p:nvSpPr>
@@ -39126,7 +40418,7 @@
       </p:sp>
       <p:sp>
         <p:nvSpPr>
-          <p:cNvPr id="90" name="TextBox 89"/>
+          <p:cNvPr id="99" name="TextBox 98"/>
           <p:cNvSpPr txBox="1"/>
           <p:nvPr/>
         </p:nvSpPr>
@@ -39161,7 +40453,7 @@
       </p:sp>
       <p:sp>
         <p:nvSpPr>
-          <p:cNvPr id="91" name="TextBox 90"/>
+          <p:cNvPr id="100" name="TextBox 99"/>
           <p:cNvSpPr txBox="1"/>
           <p:nvPr/>
         </p:nvSpPr>
@@ -39196,7 +40488,7 @@
       </p:sp>
       <p:sp>
         <p:nvSpPr>
-          <p:cNvPr id="92" name="TextBox 91"/>
+          <p:cNvPr id="101" name="TextBox 100"/>
           <p:cNvSpPr txBox="1"/>
           <p:nvPr/>
         </p:nvSpPr>
@@ -39231,7 +40523,7 @@
       </p:sp>
       <p:sp>
         <p:nvSpPr>
-          <p:cNvPr id="93" name="TextBox 92"/>
+          <p:cNvPr id="102" name="TextBox 101"/>
           <p:cNvSpPr txBox="1"/>
           <p:nvPr/>
         </p:nvSpPr>
@@ -39266,7 +40558,7 @@
       </p:sp>
       <p:sp>
         <p:nvSpPr>
-          <p:cNvPr id="94" name="TextBox 93"/>
+          <p:cNvPr id="103" name="TextBox 102"/>
           <p:cNvSpPr txBox="1"/>
           <p:nvPr/>
         </p:nvSpPr>
@@ -39301,7 +40593,7 @@
       </p:sp>
       <p:sp>
         <p:nvSpPr>
-          <p:cNvPr id="95" name="TextBox 94"/>
+          <p:cNvPr id="104" name="TextBox 103"/>
           <p:cNvSpPr txBox="1"/>
           <p:nvPr/>
         </p:nvSpPr>
@@ -39336,7 +40628,7 @@
       </p:sp>
       <p:sp>
         <p:nvSpPr>
-          <p:cNvPr id="96" name="TextBox 95"/>
+          <p:cNvPr id="105" name="TextBox 104"/>
           <p:cNvSpPr txBox="1"/>
           <p:nvPr/>
         </p:nvSpPr>
@@ -39371,7 +40663,7 @@
       </p:sp>
       <p:sp>
         <p:nvSpPr>
-          <p:cNvPr id="97" name="TextBox 96"/>
+          <p:cNvPr id="106" name="TextBox 105"/>
           <p:cNvSpPr txBox="1"/>
           <p:nvPr/>
         </p:nvSpPr>
@@ -39851,7 +41143,7 @@
         <p:spPr>
           <a:xfrm>
             <a:off x="640080" y="1444752"/>
-            <a:ext cx="10881360" cy="3223260"/>
+            <a:ext cx="10881360" cy="3438144"/>
           </a:xfrm>
           <a:prstGeom prst="rect">
             <a:avLst/>
@@ -40417,7 +41709,7 @@
                 </a:solidFill>
                 <a:latin typeface="Calibri"/>
               </a:rPr>
-              <a:t>→ Part (Restrict) — NEW</a:t>
+              <a:t>→ Part (Restrict)</a:t>
             </a:r>
           </a:p>
         </p:txBody>
@@ -40636,7 +41928,7 @@
                 </a:solidFill>
                 <a:latin typeface="Consolas"/>
               </a:rPr>
-              <a:t>FromLocationId</a:t>
+              <a:t>PartUnitId</a:t>
             </a:r>
           </a:p>
         </p:txBody>
@@ -40719,6 +42011,41 @@
         </p:nvSpPr>
         <p:spPr>
           <a:xfrm>
+            <a:off x="5971946" y="2304288"/>
+            <a:ext cx="761695" cy="214884"/>
+          </a:xfrm>
+          <a:prstGeom prst="rect">
+            <a:avLst/>
+          </a:prstGeom>
+          <a:noFill/>
+        </p:spPr>
+        <p:txBody>
+          <a:bodyPr wrap="square" lIns="27432" rIns="27432" tIns="0" bIns="0" anchor="ctr">
+            <a:spAutoFit/>
+          </a:bodyPr>
+          <a:lstStyle/>
+          <a:p>
+            <a:pPr algn="ctr"/>
+            <a:r>
+              <a:rPr sz="800" b="1" i="0">
+                <a:solidFill>
+                  <a:srgbClr val="059669"/>
+                </a:solidFill>
+                <a:latin typeface="Calibri"/>
+              </a:rPr>
+              <a:t>FK</a:t>
+            </a:r>
+          </a:p>
+        </p:txBody>
+      </p:sp>
+      <p:sp>
+        <p:nvSpPr>
+          <p:cNvPr id="38" name="TextBox 37"/>
+          <p:cNvSpPr txBox="1"/>
+          <p:nvPr/>
+        </p:nvSpPr>
+        <p:spPr>
+          <a:xfrm>
             <a:off x="6779361" y="2304288"/>
             <a:ext cx="4714646" cy="214884"/>
           </a:xfrm>
@@ -40741,14 +42068,14 @@
                 </a:solidFill>
                 <a:latin typeface="Calibri"/>
               </a:rPr>
-              <a:t>คลังต้นทาง (ออก)</a:t>
-            </a:r>
-          </a:p>
-        </p:txBody>
-      </p:sp>
-      <p:sp>
-        <p:nvSpPr>
-          <p:cNvPr id="38" name="Rectangle 37"/>
+              <a:t>→ PartUnit (ชิ้นซีเรียล ถ้ามี, SetNull)</a:t>
+            </a:r>
+          </a:p>
+        </p:txBody>
+      </p:sp>
+      <p:sp>
+        <p:nvSpPr>
+          <p:cNvPr id="39" name="Rectangle 38"/>
           <p:cNvSpPr/>
           <p:nvPr/>
         </p:nvSpPr>
@@ -40792,7 +42119,7 @@
       </p:sp>
       <p:sp>
         <p:nvSpPr>
-          <p:cNvPr id="39" name="TextBox 38"/>
+          <p:cNvPr id="40" name="TextBox 39"/>
           <p:cNvSpPr txBox="1"/>
           <p:nvPr/>
         </p:nvSpPr>
@@ -40820,14 +42147,14 @@
                 </a:solidFill>
                 <a:latin typeface="Consolas"/>
               </a:rPr>
-              <a:t>ToLocationId</a:t>
-            </a:r>
-          </a:p>
-        </p:txBody>
-      </p:sp>
-      <p:sp>
-        <p:nvSpPr>
-          <p:cNvPr id="40" name="TextBox 39"/>
+              <a:t>FromLocationId</a:t>
+            </a:r>
+          </a:p>
+        </p:txBody>
+      </p:sp>
+      <p:sp>
+        <p:nvSpPr>
+          <p:cNvPr id="41" name="TextBox 40"/>
           <p:cNvSpPr txBox="1"/>
           <p:nvPr/>
         </p:nvSpPr>
@@ -40862,7 +42189,7 @@
       </p:sp>
       <p:sp>
         <p:nvSpPr>
-          <p:cNvPr id="41" name="TextBox 40"/>
+          <p:cNvPr id="42" name="TextBox 41"/>
           <p:cNvSpPr txBox="1"/>
           <p:nvPr/>
         </p:nvSpPr>
@@ -40897,7 +42224,7 @@
       </p:sp>
       <p:sp>
         <p:nvSpPr>
-          <p:cNvPr id="42" name="TextBox 41"/>
+          <p:cNvPr id="43" name="TextBox 42"/>
           <p:cNvSpPr txBox="1"/>
           <p:nvPr/>
         </p:nvSpPr>
@@ -40925,14 +42252,14 @@
                 </a:solidFill>
                 <a:latin typeface="Calibri"/>
               </a:rPr>
-              <a:t>คลังปลายทาง (เข้า)</a:t>
-            </a:r>
-          </a:p>
-        </p:txBody>
-      </p:sp>
-      <p:sp>
-        <p:nvSpPr>
-          <p:cNvPr id="43" name="TextBox 42"/>
+              <a:t>คลังต้นทาง (ออก)</a:t>
+            </a:r>
+          </a:p>
+        </p:txBody>
+      </p:sp>
+      <p:sp>
+        <p:nvSpPr>
+          <p:cNvPr id="44" name="TextBox 43"/>
           <p:cNvSpPr txBox="1"/>
           <p:nvPr/>
         </p:nvSpPr>
@@ -40960,14 +42287,14 @@
                 </a:solidFill>
                 <a:latin typeface="Consolas"/>
               </a:rPr>
-              <a:t>Qty</a:t>
-            </a:r>
-          </a:p>
-        </p:txBody>
-      </p:sp>
-      <p:sp>
-        <p:nvSpPr>
-          <p:cNvPr id="44" name="TextBox 43"/>
+              <a:t>ToLocationId</a:t>
+            </a:r>
+          </a:p>
+        </p:txBody>
+      </p:sp>
+      <p:sp>
+        <p:nvSpPr>
+          <p:cNvPr id="45" name="TextBox 44"/>
           <p:cNvSpPr txBox="1"/>
           <p:nvPr/>
         </p:nvSpPr>
@@ -41002,7 +42329,7 @@
       </p:sp>
       <p:sp>
         <p:nvSpPr>
-          <p:cNvPr id="45" name="TextBox 44"/>
+          <p:cNvPr id="46" name="TextBox 45"/>
           <p:cNvSpPr txBox="1"/>
           <p:nvPr/>
         </p:nvSpPr>
@@ -41026,18 +42353,18 @@
             <a:r>
               <a:rPr sz="700" b="0" i="0">
                 <a:solidFill>
-                  <a:srgbClr val="B0B0B0"/>
-                </a:solidFill>
-                <a:latin typeface="Calibri"/>
-              </a:rPr>
-              <a:t>—</a:t>
-            </a:r>
-          </a:p>
-        </p:txBody>
-      </p:sp>
-      <p:sp>
-        <p:nvSpPr>
-          <p:cNvPr id="46" name="TextBox 45"/>
+                  <a:srgbClr val="6B7280"/>
+                </a:solidFill>
+                <a:latin typeface="Calibri"/>
+              </a:rPr>
+              <a:t>Y</a:t>
+            </a:r>
+          </a:p>
+        </p:txBody>
+      </p:sp>
+      <p:sp>
+        <p:nvSpPr>
+          <p:cNvPr id="47" name="TextBox 46"/>
           <p:cNvSpPr txBox="1"/>
           <p:nvPr/>
         </p:nvSpPr>
@@ -41065,14 +42392,14 @@
                 </a:solidFill>
                 <a:latin typeface="Calibri"/>
               </a:rPr>
-              <a:t>จำนวนที่ขยับ</a:t>
-            </a:r>
-          </a:p>
-        </p:txBody>
-      </p:sp>
-      <p:sp>
-        <p:nvSpPr>
-          <p:cNvPr id="47" name="Rectangle 46"/>
+              <a:t>คลังปลายทาง (เข้า)</a:t>
+            </a:r>
+          </a:p>
+        </p:txBody>
+      </p:sp>
+      <p:sp>
+        <p:nvSpPr>
+          <p:cNvPr id="48" name="Rectangle 47"/>
           <p:cNvSpPr/>
           <p:nvPr/>
         </p:nvSpPr>
@@ -41116,7 +42443,7 @@
       </p:sp>
       <p:sp>
         <p:nvSpPr>
-          <p:cNvPr id="48" name="TextBox 47"/>
+          <p:cNvPr id="49" name="TextBox 48"/>
           <p:cNvSpPr txBox="1"/>
           <p:nvPr/>
         </p:nvSpPr>
@@ -41144,14 +42471,14 @@
                 </a:solidFill>
                 <a:latin typeface="Consolas"/>
               </a:rPr>
-              <a:t>Condition</a:t>
-            </a:r>
-          </a:p>
-        </p:txBody>
-      </p:sp>
-      <p:sp>
-        <p:nvSpPr>
-          <p:cNvPr id="49" name="TextBox 48"/>
+              <a:t>Qty</a:t>
+            </a:r>
+          </a:p>
+        </p:txBody>
+      </p:sp>
+      <p:sp>
+        <p:nvSpPr>
+          <p:cNvPr id="50" name="TextBox 49"/>
           <p:cNvSpPr txBox="1"/>
           <p:nvPr/>
         </p:nvSpPr>
@@ -41179,14 +42506,14 @@
                 </a:solidFill>
                 <a:latin typeface="Consolas"/>
               </a:rPr>
-              <a:t>varchar(20)</a:t>
-            </a:r>
-          </a:p>
-        </p:txBody>
-      </p:sp>
-      <p:sp>
-        <p:nvSpPr>
-          <p:cNvPr id="50" name="TextBox 49"/>
+              <a:t>int</a:t>
+            </a:r>
+          </a:p>
+        </p:txBody>
+      </p:sp>
+      <p:sp>
+        <p:nvSpPr>
+          <p:cNvPr id="51" name="TextBox 50"/>
           <p:cNvSpPr txBox="1"/>
           <p:nvPr/>
         </p:nvSpPr>
@@ -41221,7 +42548,7 @@
       </p:sp>
       <p:sp>
         <p:nvSpPr>
-          <p:cNvPr id="51" name="TextBox 50"/>
+          <p:cNvPr id="52" name="TextBox 51"/>
           <p:cNvSpPr txBox="1"/>
           <p:nvPr/>
         </p:nvSpPr>
@@ -41249,14 +42576,14 @@
                 </a:solidFill>
                 <a:latin typeface="Calibri"/>
               </a:rPr>
-              <a:t>Good | Defective</a:t>
-            </a:r>
-          </a:p>
-        </p:txBody>
-      </p:sp>
-      <p:sp>
-        <p:nvSpPr>
-          <p:cNvPr id="52" name="TextBox 51"/>
+              <a:t>จำนวนที่ขยับ</a:t>
+            </a:r>
+          </a:p>
+        </p:txBody>
+      </p:sp>
+      <p:sp>
+        <p:nvSpPr>
+          <p:cNvPr id="53" name="TextBox 52"/>
           <p:cNvSpPr txBox="1"/>
           <p:nvPr/>
         </p:nvSpPr>
@@ -41284,14 +42611,14 @@
                 </a:solidFill>
                 <a:latin typeface="Consolas"/>
               </a:rPr>
-              <a:t>RefType</a:t>
-            </a:r>
-          </a:p>
-        </p:txBody>
-      </p:sp>
-      <p:sp>
-        <p:nvSpPr>
-          <p:cNvPr id="53" name="TextBox 52"/>
+              <a:t>Condition</a:t>
+            </a:r>
+          </a:p>
+        </p:txBody>
+      </p:sp>
+      <p:sp>
+        <p:nvSpPr>
+          <p:cNvPr id="54" name="TextBox 53"/>
           <p:cNvSpPr txBox="1"/>
           <p:nvPr/>
         </p:nvSpPr>
@@ -41326,7 +42653,7 @@
       </p:sp>
       <p:sp>
         <p:nvSpPr>
-          <p:cNvPr id="54" name="TextBox 53"/>
+          <p:cNvPr id="55" name="TextBox 54"/>
           <p:cNvSpPr txBox="1"/>
           <p:nvPr/>
         </p:nvSpPr>
@@ -41350,18 +42677,18 @@
             <a:r>
               <a:rPr sz="700" b="0" i="0">
                 <a:solidFill>
-                  <a:srgbClr val="6B7280"/>
-                </a:solidFill>
-                <a:latin typeface="Calibri"/>
-              </a:rPr>
-              <a:t>Y</a:t>
-            </a:r>
-          </a:p>
-        </p:txBody>
-      </p:sp>
-      <p:sp>
-        <p:nvSpPr>
-          <p:cNvPr id="55" name="TextBox 54"/>
+                  <a:srgbClr val="B0B0B0"/>
+                </a:solidFill>
+                <a:latin typeface="Calibri"/>
+              </a:rPr>
+              <a:t>—</a:t>
+            </a:r>
+          </a:p>
+        </p:txBody>
+      </p:sp>
+      <p:sp>
+        <p:nvSpPr>
+          <p:cNvPr id="56" name="TextBox 55"/>
           <p:cNvSpPr txBox="1"/>
           <p:nvPr/>
         </p:nvSpPr>
@@ -41389,14 +42716,14 @@
                 </a:solidFill>
                 <a:latin typeface="Calibri"/>
               </a:rPr>
-              <a:t>Ticket/GoodsReceipt/Transfer...</a:t>
-            </a:r>
-          </a:p>
-        </p:txBody>
-      </p:sp>
-      <p:sp>
-        <p:nvSpPr>
-          <p:cNvPr id="56" name="Rectangle 55"/>
+              <a:t>Good | Defective</a:t>
+            </a:r>
+          </a:p>
+        </p:txBody>
+      </p:sp>
+      <p:sp>
+        <p:nvSpPr>
+          <p:cNvPr id="57" name="Rectangle 56"/>
           <p:cNvSpPr/>
           <p:nvPr/>
         </p:nvSpPr>
@@ -41440,7 +42767,7 @@
       </p:sp>
       <p:sp>
         <p:nvSpPr>
-          <p:cNvPr id="57" name="TextBox 56"/>
+          <p:cNvPr id="58" name="TextBox 57"/>
           <p:cNvSpPr txBox="1"/>
           <p:nvPr/>
         </p:nvSpPr>
@@ -41468,14 +42795,14 @@
                 </a:solidFill>
                 <a:latin typeface="Consolas"/>
               </a:rPr>
-              <a:t>RefId</a:t>
-            </a:r>
-          </a:p>
-        </p:txBody>
-      </p:sp>
-      <p:sp>
-        <p:nvSpPr>
-          <p:cNvPr id="58" name="TextBox 57"/>
+              <a:t>RefType</a:t>
+            </a:r>
+          </a:p>
+        </p:txBody>
+      </p:sp>
+      <p:sp>
+        <p:nvSpPr>
+          <p:cNvPr id="59" name="TextBox 58"/>
           <p:cNvSpPr txBox="1"/>
           <p:nvPr/>
         </p:nvSpPr>
@@ -41503,14 +42830,14 @@
                 </a:solidFill>
                 <a:latin typeface="Consolas"/>
               </a:rPr>
-              <a:t>varchar(50)</a:t>
-            </a:r>
-          </a:p>
-        </p:txBody>
-      </p:sp>
-      <p:sp>
-        <p:nvSpPr>
-          <p:cNvPr id="59" name="TextBox 58"/>
+              <a:t>varchar(20)</a:t>
+            </a:r>
+          </a:p>
+        </p:txBody>
+      </p:sp>
+      <p:sp>
+        <p:nvSpPr>
+          <p:cNvPr id="60" name="TextBox 59"/>
           <p:cNvSpPr txBox="1"/>
           <p:nvPr/>
         </p:nvSpPr>
@@ -41545,7 +42872,7 @@
       </p:sp>
       <p:sp>
         <p:nvSpPr>
-          <p:cNvPr id="60" name="TextBox 59"/>
+          <p:cNvPr id="61" name="TextBox 60"/>
           <p:cNvSpPr txBox="1"/>
           <p:nvPr/>
         </p:nvSpPr>
@@ -41573,14 +42900,14 @@
                 </a:solidFill>
                 <a:latin typeface="Calibri"/>
               </a:rPr>
-              <a:t>เลขเอกสารอ้างอิง</a:t>
-            </a:r>
-          </a:p>
-        </p:txBody>
-      </p:sp>
-      <p:sp>
-        <p:nvSpPr>
-          <p:cNvPr id="61" name="TextBox 60"/>
+              <a:t>Ticket/GoodsReceipt/Transfer...</a:t>
+            </a:r>
+          </a:p>
+        </p:txBody>
+      </p:sp>
+      <p:sp>
+        <p:nvSpPr>
+          <p:cNvPr id="62" name="TextBox 61"/>
           <p:cNvSpPr txBox="1"/>
           <p:nvPr/>
         </p:nvSpPr>
@@ -41608,14 +42935,14 @@
                 </a:solidFill>
                 <a:latin typeface="Consolas"/>
               </a:rPr>
-              <a:t>Cost</a:t>
-            </a:r>
-          </a:p>
-        </p:txBody>
-      </p:sp>
-      <p:sp>
-        <p:nvSpPr>
-          <p:cNvPr id="62" name="TextBox 61"/>
+              <a:t>RefId</a:t>
+            </a:r>
+          </a:p>
+        </p:txBody>
+      </p:sp>
+      <p:sp>
+        <p:nvSpPr>
+          <p:cNvPr id="63" name="TextBox 62"/>
           <p:cNvSpPr txBox="1"/>
           <p:nvPr/>
         </p:nvSpPr>
@@ -41643,14 +42970,14 @@
                 </a:solidFill>
                 <a:latin typeface="Consolas"/>
               </a:rPr>
-              <a:t>decimal(18,2)</a:t>
-            </a:r>
-          </a:p>
-        </p:txBody>
-      </p:sp>
-      <p:sp>
-        <p:nvSpPr>
-          <p:cNvPr id="63" name="TextBox 62"/>
+              <a:t>varchar(50)</a:t>
+            </a:r>
+          </a:p>
+        </p:txBody>
+      </p:sp>
+      <p:sp>
+        <p:nvSpPr>
+          <p:cNvPr id="64" name="TextBox 63"/>
           <p:cNvSpPr txBox="1"/>
           <p:nvPr/>
         </p:nvSpPr>
@@ -41685,7 +43012,7 @@
       </p:sp>
       <p:sp>
         <p:nvSpPr>
-          <p:cNvPr id="64" name="TextBox 63"/>
+          <p:cNvPr id="65" name="TextBox 64"/>
           <p:cNvSpPr txBox="1"/>
           <p:nvPr/>
         </p:nvSpPr>
@@ -41713,14 +43040,14 @@
                 </a:solidFill>
                 <a:latin typeface="Calibri"/>
               </a:rPr>
-              <a:t>ต้นทุน ณ ตอนขยับ</a:t>
-            </a:r>
-          </a:p>
-        </p:txBody>
-      </p:sp>
-      <p:sp>
-        <p:nvSpPr>
-          <p:cNvPr id="65" name="Rectangle 64"/>
+              <a:t>เลขเอกสารอ้างอิง</a:t>
+            </a:r>
+          </a:p>
+        </p:txBody>
+      </p:sp>
+      <p:sp>
+        <p:nvSpPr>
+          <p:cNvPr id="66" name="Rectangle 65"/>
           <p:cNvSpPr/>
           <p:nvPr/>
         </p:nvSpPr>
@@ -41764,7 +43091,7 @@
       </p:sp>
       <p:sp>
         <p:nvSpPr>
-          <p:cNvPr id="66" name="TextBox 65"/>
+          <p:cNvPr id="67" name="TextBox 66"/>
           <p:cNvSpPr txBox="1"/>
           <p:nvPr/>
         </p:nvSpPr>
@@ -41792,14 +43119,14 @@
                 </a:solidFill>
                 <a:latin typeface="Consolas"/>
               </a:rPr>
-              <a:t>SerialNo</a:t>
-            </a:r>
-          </a:p>
-        </p:txBody>
-      </p:sp>
-      <p:sp>
-        <p:nvSpPr>
-          <p:cNvPr id="67" name="TextBox 66"/>
+              <a:t>Cost</a:t>
+            </a:r>
+          </a:p>
+        </p:txBody>
+      </p:sp>
+      <p:sp>
+        <p:nvSpPr>
+          <p:cNvPr id="68" name="TextBox 67"/>
           <p:cNvSpPr txBox="1"/>
           <p:nvPr/>
         </p:nvSpPr>
@@ -41827,14 +43154,14 @@
                 </a:solidFill>
                 <a:latin typeface="Consolas"/>
               </a:rPr>
-              <a:t>varchar(100)</a:t>
-            </a:r>
-          </a:p>
-        </p:txBody>
-      </p:sp>
-      <p:sp>
-        <p:nvSpPr>
-          <p:cNvPr id="68" name="TextBox 67"/>
+              <a:t>decimal(18,2)</a:t>
+            </a:r>
+          </a:p>
+        </p:txBody>
+      </p:sp>
+      <p:sp>
+        <p:nvSpPr>
+          <p:cNvPr id="69" name="TextBox 68"/>
           <p:cNvSpPr txBox="1"/>
           <p:nvPr/>
         </p:nvSpPr>
@@ -41869,7 +43196,7 @@
       </p:sp>
       <p:sp>
         <p:nvSpPr>
-          <p:cNvPr id="69" name="TextBox 68"/>
+          <p:cNvPr id="70" name="TextBox 69"/>
           <p:cNvSpPr txBox="1"/>
           <p:nvPr/>
         </p:nvSpPr>
@@ -41897,14 +43224,14 @@
                 </a:solidFill>
                 <a:latin typeface="Calibri"/>
               </a:rPr>
-              <a:t>ซีเรียล (ถ้ามี)</a:t>
-            </a:r>
-          </a:p>
-        </p:txBody>
-      </p:sp>
-      <p:sp>
-        <p:nvSpPr>
-          <p:cNvPr id="70" name="TextBox 69"/>
+              <a:t>ต้นทุน ณ ตอนขยับ</a:t>
+            </a:r>
+          </a:p>
+        </p:txBody>
+      </p:sp>
+      <p:sp>
+        <p:nvSpPr>
+          <p:cNvPr id="71" name="TextBox 70"/>
           <p:cNvSpPr txBox="1"/>
           <p:nvPr/>
         </p:nvSpPr>
@@ -41932,14 +43259,14 @@
                 </a:solidFill>
                 <a:latin typeface="Consolas"/>
               </a:rPr>
-              <a:t>Remarks</a:t>
-            </a:r>
-          </a:p>
-        </p:txBody>
-      </p:sp>
-      <p:sp>
-        <p:nvSpPr>
-          <p:cNvPr id="71" name="TextBox 70"/>
+              <a:t>SerialNo</a:t>
+            </a:r>
+          </a:p>
+        </p:txBody>
+      </p:sp>
+      <p:sp>
+        <p:nvSpPr>
+          <p:cNvPr id="72" name="TextBox 71"/>
           <p:cNvSpPr txBox="1"/>
           <p:nvPr/>
         </p:nvSpPr>
@@ -41967,14 +43294,14 @@
                 </a:solidFill>
                 <a:latin typeface="Consolas"/>
               </a:rPr>
-              <a:t>varchar(500)</a:t>
-            </a:r>
-          </a:p>
-        </p:txBody>
-      </p:sp>
-      <p:sp>
-        <p:nvSpPr>
-          <p:cNvPr id="72" name="TextBox 71"/>
+              <a:t>varchar(100)</a:t>
+            </a:r>
+          </a:p>
+        </p:txBody>
+      </p:sp>
+      <p:sp>
+        <p:nvSpPr>
+          <p:cNvPr id="73" name="TextBox 72"/>
           <p:cNvSpPr txBox="1"/>
           <p:nvPr/>
         </p:nvSpPr>
@@ -42009,7 +43336,7 @@
       </p:sp>
       <p:sp>
         <p:nvSpPr>
-          <p:cNvPr id="73" name="TextBox 72"/>
+          <p:cNvPr id="74" name="TextBox 73"/>
           <p:cNvSpPr txBox="1"/>
           <p:nvPr/>
         </p:nvSpPr>
@@ -42037,14 +43364,14 @@
                 </a:solidFill>
                 <a:latin typeface="Calibri"/>
               </a:rPr>
-              <a:t>หมายเหตุ</a:t>
-            </a:r>
-          </a:p>
-        </p:txBody>
-      </p:sp>
-      <p:sp>
-        <p:nvSpPr>
-          <p:cNvPr id="74" name="Rectangle 73"/>
+              <a:t>ซีเรียล (ถ้ามี)</a:t>
+            </a:r>
+          </a:p>
+        </p:txBody>
+      </p:sp>
+      <p:sp>
+        <p:nvSpPr>
+          <p:cNvPr id="75" name="Rectangle 74"/>
           <p:cNvSpPr/>
           <p:nvPr/>
         </p:nvSpPr>
@@ -42088,7 +43415,7 @@
       </p:sp>
       <p:sp>
         <p:nvSpPr>
-          <p:cNvPr id="75" name="TextBox 74"/>
+          <p:cNvPr id="76" name="TextBox 75"/>
           <p:cNvSpPr txBox="1"/>
           <p:nvPr/>
         </p:nvSpPr>
@@ -42116,14 +43443,14 @@
                 </a:solidFill>
                 <a:latin typeface="Consolas"/>
               </a:rPr>
-              <a:t>UserName</a:t>
-            </a:r>
-          </a:p>
-        </p:txBody>
-      </p:sp>
-      <p:sp>
-        <p:nvSpPr>
-          <p:cNvPr id="76" name="TextBox 75"/>
+              <a:t>Remarks</a:t>
+            </a:r>
+          </a:p>
+        </p:txBody>
+      </p:sp>
+      <p:sp>
+        <p:nvSpPr>
+          <p:cNvPr id="77" name="TextBox 76"/>
           <p:cNvSpPr txBox="1"/>
           <p:nvPr/>
         </p:nvSpPr>
@@ -42151,14 +43478,14 @@
                 </a:solidFill>
                 <a:latin typeface="Consolas"/>
               </a:rPr>
-              <a:t>varchar(100)</a:t>
-            </a:r>
-          </a:p>
-        </p:txBody>
-      </p:sp>
-      <p:sp>
-        <p:nvSpPr>
-          <p:cNvPr id="77" name="TextBox 76"/>
+              <a:t>varchar(500)</a:t>
+            </a:r>
+          </a:p>
+        </p:txBody>
+      </p:sp>
+      <p:sp>
+        <p:nvSpPr>
+          <p:cNvPr id="78" name="TextBox 77"/>
           <p:cNvSpPr txBox="1"/>
           <p:nvPr/>
         </p:nvSpPr>
@@ -42182,18 +43509,18 @@
             <a:r>
               <a:rPr sz="700" b="0" i="0">
                 <a:solidFill>
-                  <a:srgbClr val="B0B0B0"/>
-                </a:solidFill>
-                <a:latin typeface="Calibri"/>
-              </a:rPr>
-              <a:t>—</a:t>
-            </a:r>
-          </a:p>
-        </p:txBody>
-      </p:sp>
-      <p:sp>
-        <p:nvSpPr>
-          <p:cNvPr id="78" name="TextBox 77"/>
+                  <a:srgbClr val="6B7280"/>
+                </a:solidFill>
+                <a:latin typeface="Calibri"/>
+              </a:rPr>
+              <a:t>Y</a:t>
+            </a:r>
+          </a:p>
+        </p:txBody>
+      </p:sp>
+      <p:sp>
+        <p:nvSpPr>
+          <p:cNvPr id="79" name="TextBox 78"/>
           <p:cNvSpPr txBox="1"/>
           <p:nvPr/>
         </p:nvSpPr>
@@ -42221,14 +43548,14 @@
                 </a:solidFill>
                 <a:latin typeface="Calibri"/>
               </a:rPr>
-              <a:t>ผู้ทำรายการ</a:t>
-            </a:r>
-          </a:p>
-        </p:txBody>
-      </p:sp>
-      <p:sp>
-        <p:nvSpPr>
-          <p:cNvPr id="79" name="TextBox 78"/>
+              <a:t>หมายเหตุ</a:t>
+            </a:r>
+          </a:p>
+        </p:txBody>
+      </p:sp>
+      <p:sp>
+        <p:nvSpPr>
+          <p:cNvPr id="80" name="TextBox 79"/>
           <p:cNvSpPr txBox="1"/>
           <p:nvPr/>
         </p:nvSpPr>
@@ -42256,14 +43583,14 @@
                 </a:solidFill>
                 <a:latin typeface="Consolas"/>
               </a:rPr>
-              <a:t>Timestamp</a:t>
-            </a:r>
-          </a:p>
-        </p:txBody>
-      </p:sp>
-      <p:sp>
-        <p:nvSpPr>
-          <p:cNvPr id="80" name="TextBox 79"/>
+              <a:t>UserName</a:t>
+            </a:r>
+          </a:p>
+        </p:txBody>
+      </p:sp>
+      <p:sp>
+        <p:nvSpPr>
+          <p:cNvPr id="81" name="TextBox 80"/>
           <p:cNvSpPr txBox="1"/>
           <p:nvPr/>
         </p:nvSpPr>
@@ -42291,14 +43618,14 @@
                 </a:solidFill>
                 <a:latin typeface="Consolas"/>
               </a:rPr>
-              <a:t>datetime</a:t>
-            </a:r>
-          </a:p>
-        </p:txBody>
-      </p:sp>
-      <p:sp>
-        <p:nvSpPr>
-          <p:cNvPr id="81" name="TextBox 80"/>
+              <a:t>varchar(100)</a:t>
+            </a:r>
+          </a:p>
+        </p:txBody>
+      </p:sp>
+      <p:sp>
+        <p:nvSpPr>
+          <p:cNvPr id="82" name="TextBox 81"/>
           <p:cNvSpPr txBox="1"/>
           <p:nvPr/>
         </p:nvSpPr>
@@ -42333,7 +43660,7 @@
       </p:sp>
       <p:sp>
         <p:nvSpPr>
-          <p:cNvPr id="82" name="TextBox 81"/>
+          <p:cNvPr id="83" name="TextBox 82"/>
           <p:cNvSpPr txBox="1"/>
           <p:nvPr/>
         </p:nvSpPr>
@@ -42361,6 +43688,190 @@
                 </a:solidFill>
                 <a:latin typeface="Calibri"/>
               </a:rPr>
+              <a:t>ผู้ทำรายการ</a:t>
+            </a:r>
+          </a:p>
+        </p:txBody>
+      </p:sp>
+      <p:sp>
+        <p:nvSpPr>
+          <p:cNvPr id="84" name="Rectangle 83"/>
+          <p:cNvSpPr/>
+          <p:nvPr/>
+        </p:nvSpPr>
+        <p:spPr>
+          <a:xfrm>
+            <a:off x="658368" y="4668012"/>
+            <a:ext cx="10844784" cy="214884"/>
+          </a:xfrm>
+          <a:prstGeom prst="rect">
+            <a:avLst/>
+          </a:prstGeom>
+          <a:solidFill>
+            <a:srgbClr val="F3F6FB"/>
+          </a:solidFill>
+          <a:ln>
+            <a:noFill/>
+          </a:ln>
+          <a:effectLst/>
+        </p:spPr>
+        <p:style>
+          <a:lnRef idx="1">
+            <a:schemeClr val="accent1"/>
+          </a:lnRef>
+          <a:fillRef idx="3">
+            <a:schemeClr val="accent1"/>
+          </a:fillRef>
+          <a:effectRef idx="2">
+            <a:schemeClr val="accent1"/>
+          </a:effectRef>
+          <a:fontRef idx="minor">
+            <a:schemeClr val="lt1"/>
+          </a:fontRef>
+        </p:style>
+        <p:txBody>
+          <a:bodyPr rtlCol="0" anchor="ctr"/>
+          <a:lstStyle/>
+          <a:p>
+            <a:pPr algn="ctr"/>
+          </a:p>
+        </p:txBody>
+      </p:sp>
+      <p:sp>
+        <p:nvSpPr>
+          <p:cNvPr id="85" name="TextBox 84"/>
+          <p:cNvSpPr txBox="1"/>
+          <p:nvPr/>
+        </p:nvSpPr>
+        <p:spPr>
+          <a:xfrm>
+            <a:off x="685800" y="4668012"/>
+            <a:ext cx="2429560" cy="214884"/>
+          </a:xfrm>
+          <a:prstGeom prst="rect">
+            <a:avLst/>
+          </a:prstGeom>
+          <a:noFill/>
+        </p:spPr>
+        <p:txBody>
+          <a:bodyPr wrap="square" lIns="27432" rIns="27432" tIns="0" bIns="0" anchor="ctr">
+            <a:spAutoFit/>
+          </a:bodyPr>
+          <a:lstStyle/>
+          <a:p>
+            <a:pPr algn="l"/>
+            <a:r>
+              <a:rPr sz="850" b="1" i="0">
+                <a:solidFill>
+                  <a:srgbClr val="1E2D40"/>
+                </a:solidFill>
+                <a:latin typeface="Consolas"/>
+              </a:rPr>
+              <a:t>Timestamp</a:t>
+            </a:r>
+          </a:p>
+        </p:txBody>
+      </p:sp>
+      <p:sp>
+        <p:nvSpPr>
+          <p:cNvPr id="86" name="TextBox 85"/>
+          <p:cNvSpPr txBox="1"/>
+          <p:nvPr/>
+        </p:nvSpPr>
+        <p:spPr>
+          <a:xfrm>
+            <a:off x="3188512" y="4668012"/>
+            <a:ext cx="1994306" cy="214884"/>
+          </a:xfrm>
+          <a:prstGeom prst="rect">
+            <a:avLst/>
+          </a:prstGeom>
+          <a:noFill/>
+        </p:spPr>
+        <p:txBody>
+          <a:bodyPr wrap="square" lIns="27432" rIns="27432" tIns="0" bIns="0" anchor="ctr">
+            <a:spAutoFit/>
+          </a:bodyPr>
+          <a:lstStyle/>
+          <a:p>
+            <a:pPr algn="l"/>
+            <a:r>
+              <a:rPr sz="800" b="0" i="0">
+                <a:solidFill>
+                  <a:srgbClr val="2563EB"/>
+                </a:solidFill>
+                <a:latin typeface="Consolas"/>
+              </a:rPr>
+              <a:t>datetime</a:t>
+            </a:r>
+          </a:p>
+        </p:txBody>
+      </p:sp>
+      <p:sp>
+        <p:nvSpPr>
+          <p:cNvPr id="87" name="TextBox 86"/>
+          <p:cNvSpPr txBox="1"/>
+          <p:nvPr/>
+        </p:nvSpPr>
+        <p:spPr>
+          <a:xfrm>
+            <a:off x="5210251" y="4668012"/>
+            <a:ext cx="761695" cy="214884"/>
+          </a:xfrm>
+          <a:prstGeom prst="rect">
+            <a:avLst/>
+          </a:prstGeom>
+          <a:noFill/>
+        </p:spPr>
+        <p:txBody>
+          <a:bodyPr wrap="square" lIns="27432" rIns="27432" tIns="0" bIns="0" anchor="ctr">
+            <a:spAutoFit/>
+          </a:bodyPr>
+          <a:lstStyle/>
+          <a:p>
+            <a:pPr algn="ctr"/>
+            <a:r>
+              <a:rPr sz="700" b="0" i="0">
+                <a:solidFill>
+                  <a:srgbClr val="B0B0B0"/>
+                </a:solidFill>
+                <a:latin typeface="Calibri"/>
+              </a:rPr>
+              <a:t>—</a:t>
+            </a:r>
+          </a:p>
+        </p:txBody>
+      </p:sp>
+      <p:sp>
+        <p:nvSpPr>
+          <p:cNvPr id="88" name="TextBox 87"/>
+          <p:cNvSpPr txBox="1"/>
+          <p:nvPr/>
+        </p:nvSpPr>
+        <p:spPr>
+          <a:xfrm>
+            <a:off x="6779361" y="4668012"/>
+            <a:ext cx="4714646" cy="214884"/>
+          </a:xfrm>
+          <a:prstGeom prst="rect">
+            <a:avLst/>
+          </a:prstGeom>
+          <a:noFill/>
+        </p:spPr>
+        <p:txBody>
+          <a:bodyPr wrap="square" lIns="27432" rIns="27432" tIns="0" bIns="0" anchor="ctr">
+            <a:spAutoFit/>
+          </a:bodyPr>
+          <a:lstStyle/>
+          <a:p>
+            <a:pPr algn="l"/>
+            <a:r>
+              <a:rPr sz="850" b="0" i="0">
+                <a:solidFill>
+                  <a:srgbClr val="1E2D40"/>
+                </a:solidFill>
+                <a:latin typeface="Calibri"/>
+              </a:rPr>
               <a:t>เวลาที่ทำรายการ</a:t>
             </a:r>
           </a:p>
@@ -42368,7 +43879,7 @@
       </p:sp>
       <p:sp>
         <p:nvSpPr>
-          <p:cNvPr id="83" name="TextBox 82"/>
+          <p:cNvPr id="89" name="TextBox 88"/>
           <p:cNvSpPr txBox="1"/>
           <p:nvPr/>
         </p:nvSpPr>
@@ -42403,7 +43914,7 @@
       </p:sp>
       <p:sp>
         <p:nvSpPr>
-          <p:cNvPr id="84" name="TextBox 83"/>
+          <p:cNvPr id="90" name="TextBox 89"/>
           <p:cNvSpPr txBox="1"/>
           <p:nvPr/>
         </p:nvSpPr>
@@ -42438,7 +43949,7 @@
       </p:sp>
       <p:sp>
         <p:nvSpPr>
-          <p:cNvPr id="85" name="TextBox 84"/>
+          <p:cNvPr id="91" name="TextBox 90"/>
           <p:cNvSpPr txBox="1"/>
           <p:nvPr/>
         </p:nvSpPr>
@@ -42473,7 +43984,7 @@
       </p:sp>
       <p:sp>
         <p:nvSpPr>
-          <p:cNvPr id="86" name="TextBox 85"/>
+          <p:cNvPr id="92" name="TextBox 91"/>
           <p:cNvSpPr txBox="1"/>
           <p:nvPr/>
         </p:nvSpPr>
@@ -42508,7 +44019,7 @@
       </p:sp>
       <p:sp>
         <p:nvSpPr>
-          <p:cNvPr id="87" name="TextBox 86"/>
+          <p:cNvPr id="93" name="TextBox 92"/>
           <p:cNvSpPr txBox="1"/>
           <p:nvPr/>
         </p:nvSpPr>
@@ -42543,7 +44054,7 @@
       </p:sp>
       <p:sp>
         <p:nvSpPr>
-          <p:cNvPr id="88" name="TextBox 87"/>
+          <p:cNvPr id="94" name="TextBox 93"/>
           <p:cNvSpPr txBox="1"/>
           <p:nvPr/>
         </p:nvSpPr>
@@ -42578,7 +44089,7 @@
       </p:sp>
       <p:sp>
         <p:nvSpPr>
-          <p:cNvPr id="89" name="TextBox 88"/>
+          <p:cNvPr id="95" name="TextBox 94"/>
           <p:cNvSpPr txBox="1"/>
           <p:nvPr/>
         </p:nvSpPr>
@@ -42613,7 +44124,7 @@
       </p:sp>
       <p:sp>
         <p:nvSpPr>
-          <p:cNvPr id="90" name="TextBox 89"/>
+          <p:cNvPr id="96" name="TextBox 95"/>
           <p:cNvSpPr txBox="1"/>
           <p:nvPr/>
         </p:nvSpPr>
@@ -44899,7 +46410,7 @@
         <p:spPr>
           <a:xfrm>
             <a:off x="6217920" y="1444752"/>
-            <a:ext cx="5486400" cy="1719072"/>
+            <a:ext cx="5486400" cy="1933955"/>
           </a:xfrm>
           <a:prstGeom prst="rect">
             <a:avLst/>
@@ -45360,7 +46871,7 @@
                 </a:solidFill>
                 <a:latin typeface="Consolas"/>
               </a:rPr>
-              <a:t>PartNo</a:t>
+              <a:t>PartId</a:t>
             </a:r>
           </a:p>
         </p:txBody>
@@ -45395,7 +46906,7 @@
                 </a:solidFill>
                 <a:latin typeface="Consolas"/>
               </a:rPr>
-              <a:t>varchar(50)</a:t>
+              <a:t>int</a:t>
             </a:r>
           </a:p>
         </p:txBody>
@@ -45461,11 +46972,11 @@
             <a:r>
               <a:rPr sz="800" b="1" i="0">
                 <a:solidFill>
-                  <a:srgbClr val="B45309"/>
-                </a:solidFill>
-                <a:latin typeface="Calibri"/>
-              </a:rPr>
-              <a:t>~</a:t>
+                  <a:srgbClr val="059669"/>
+                </a:solidFill>
+                <a:latin typeface="Calibri"/>
+              </a:rPr>
+              <a:t>FK</a:t>
             </a:r>
           </a:p>
         </p:txBody>
@@ -45500,7 +47011,7 @@
                 </a:solidFill>
                 <a:latin typeface="Calibri"/>
               </a:rPr>
-              <a:t>อ้าง Part.PartNo</a:t>
+              <a:t>→ Part (Restrict)</a:t>
             </a:r>
           </a:p>
         </p:txBody>
@@ -45579,7 +47090,7 @@
                 </a:solidFill>
                 <a:latin typeface="Consolas"/>
               </a:rPr>
-              <a:t>Qty</a:t>
+              <a:t>PartNo</a:t>
             </a:r>
           </a:p>
         </p:txBody>
@@ -45614,7 +47125,7 @@
                 </a:solidFill>
                 <a:latin typeface="Consolas"/>
               </a:rPr>
-              <a:t>int</a:t>
+              <a:t>varchar(50)</a:t>
             </a:r>
           </a:p>
         </p:txBody>
@@ -45684,7 +47195,7 @@
                 </a:solidFill>
                 <a:latin typeface="Calibri"/>
               </a:rPr>
-              <a:t>จำนวน</a:t>
+              <a:t>snapshot</a:t>
             </a:r>
           </a:p>
         </p:txBody>
@@ -45719,7 +47230,7 @@
                 </a:solidFill>
                 <a:latin typeface="Consolas"/>
               </a:rPr>
-              <a:t>Condition</a:t>
+              <a:t>Qty</a:t>
             </a:r>
           </a:p>
         </p:txBody>
@@ -45754,7 +47265,7 @@
                 </a:solidFill>
                 <a:latin typeface="Consolas"/>
               </a:rPr>
-              <a:t>varchar(20)</a:t>
+              <a:t>int</a:t>
             </a:r>
           </a:p>
         </p:txBody>
@@ -45824,7 +47335,7 @@
                 </a:solidFill>
                 <a:latin typeface="Calibri"/>
               </a:rPr>
-              <a:t>Good | Defective</a:t>
+              <a:t>จำนวน</a:t>
             </a:r>
           </a:p>
         </p:txBody>
@@ -45903,7 +47414,7 @@
                 </a:solidFill>
                 <a:latin typeface="Consolas"/>
               </a:rPr>
-              <a:t>SerialNo</a:t>
+              <a:t>Condition</a:t>
             </a:r>
           </a:p>
         </p:txBody>
@@ -45938,7 +47449,7 @@
                 </a:solidFill>
                 <a:latin typeface="Consolas"/>
               </a:rPr>
-              <a:t>varchar(100)</a:t>
+              <a:t>varchar(20)</a:t>
             </a:r>
           </a:p>
         </p:txBody>
@@ -45969,11 +47480,11 @@
             <a:r>
               <a:rPr sz="700" b="0" i="0">
                 <a:solidFill>
-                  <a:srgbClr val="6B7280"/>
-                </a:solidFill>
-                <a:latin typeface="Calibri"/>
-              </a:rPr>
-              <a:t>Y</a:t>
+                  <a:srgbClr val="B0B0B0"/>
+                </a:solidFill>
+                <a:latin typeface="Calibri"/>
+              </a:rPr>
+              <a:t>—</a:t>
             </a:r>
           </a:p>
         </p:txBody>
@@ -46008,7 +47519,7 @@
                 </a:solidFill>
                 <a:latin typeface="Calibri"/>
               </a:rPr>
-              <a:t>ซีเรียล</a:t>
+              <a:t>Good | Defective</a:t>
             </a:r>
           </a:p>
         </p:txBody>
@@ -46043,7 +47554,7 @@
                 </a:solidFill>
                 <a:latin typeface="Consolas"/>
               </a:rPr>
-              <a:t>IsManualAdjust</a:t>
+              <a:t>SerialNo</a:t>
             </a:r>
           </a:p>
         </p:txBody>
@@ -46078,7 +47589,7 @@
                 </a:solidFill>
                 <a:latin typeface="Consolas"/>
               </a:rPr>
-              <a:t>tinyint(1)</a:t>
+              <a:t>varchar(100)</a:t>
             </a:r>
           </a:p>
         </p:txBody>
@@ -46109,11 +47620,11 @@
             <a:r>
               <a:rPr sz="700" b="0" i="0">
                 <a:solidFill>
-                  <a:srgbClr val="B0B0B0"/>
-                </a:solidFill>
-                <a:latin typeface="Calibri"/>
-              </a:rPr>
-              <a:t>—</a:t>
+                  <a:srgbClr val="6B7280"/>
+                </a:solidFill>
+                <a:latin typeface="Calibri"/>
+              </a:rPr>
+              <a:t>Y</a:t>
             </a:r>
           </a:p>
         </p:txBody>
@@ -46148,7 +47659,7 @@
                 </a:solidFill>
                 <a:latin typeface="Calibri"/>
               </a:rPr>
-              <a:t>ปรับมือ (ต้องมี Remarks)</a:t>
+              <a:t>ซีเรียล</a:t>
             </a:r>
           </a:p>
         </p:txBody>
@@ -46227,7 +47738,7 @@
                 </a:solidFill>
                 <a:latin typeface="Consolas"/>
               </a:rPr>
-              <a:t>Remarks</a:t>
+              <a:t>IsManualAdjust</a:t>
             </a:r>
           </a:p>
         </p:txBody>
@@ -46262,7 +47773,7 @@
                 </a:solidFill>
                 <a:latin typeface="Consolas"/>
               </a:rPr>
-              <a:t>varchar(500)</a:t>
+              <a:t>tinyint(1)</a:t>
             </a:r>
           </a:p>
         </p:txBody>
@@ -46293,11 +47804,11 @@
             <a:r>
               <a:rPr sz="700" b="0" i="0">
                 <a:solidFill>
-                  <a:srgbClr val="6B7280"/>
-                </a:solidFill>
-                <a:latin typeface="Calibri"/>
-              </a:rPr>
-              <a:t>Y</a:t>
+                  <a:srgbClr val="B0B0B0"/>
+                </a:solidFill>
+                <a:latin typeface="Calibri"/>
+              </a:rPr>
+              <a:t>—</a:t>
             </a:r>
           </a:p>
         </p:txBody>
@@ -46332,6 +47843,146 @@
                 </a:solidFill>
                 <a:latin typeface="Calibri"/>
               </a:rPr>
+              <a:t>ปรับมือ (ต้องมี Remarks)</a:t>
+            </a:r>
+          </a:p>
+        </p:txBody>
+      </p:sp>
+      <p:sp>
+        <p:nvSpPr>
+          <p:cNvPr id="103" name="TextBox 102"/>
+          <p:cNvSpPr txBox="1"/>
+          <p:nvPr/>
+        </p:nvSpPr>
+        <p:spPr>
+          <a:xfrm>
+            <a:off x="6263640" y="3163824"/>
+            <a:ext cx="1188720" cy="214884"/>
+          </a:xfrm>
+          <a:prstGeom prst="rect">
+            <a:avLst/>
+          </a:prstGeom>
+          <a:noFill/>
+        </p:spPr>
+        <p:txBody>
+          <a:bodyPr wrap="square" lIns="27432" rIns="27432" tIns="0" bIns="0" anchor="ctr">
+            <a:spAutoFit/>
+          </a:bodyPr>
+          <a:lstStyle/>
+          <a:p>
+            <a:pPr algn="l"/>
+            <a:r>
+              <a:rPr sz="850" b="1" i="0">
+                <a:solidFill>
+                  <a:srgbClr val="1E2D40"/>
+                </a:solidFill>
+                <a:latin typeface="Consolas"/>
+              </a:rPr>
+              <a:t>Remarks</a:t>
+            </a:r>
+          </a:p>
+        </p:txBody>
+      </p:sp>
+      <p:sp>
+        <p:nvSpPr>
+          <p:cNvPr id="104" name="TextBox 103"/>
+          <p:cNvSpPr txBox="1"/>
+          <p:nvPr/>
+        </p:nvSpPr>
+        <p:spPr>
+          <a:xfrm>
+            <a:off x="7525512" y="3163824"/>
+            <a:ext cx="969264" cy="214884"/>
+          </a:xfrm>
+          <a:prstGeom prst="rect">
+            <a:avLst/>
+          </a:prstGeom>
+          <a:noFill/>
+        </p:spPr>
+        <p:txBody>
+          <a:bodyPr wrap="square" lIns="27432" rIns="27432" tIns="0" bIns="0" anchor="ctr">
+            <a:spAutoFit/>
+          </a:bodyPr>
+          <a:lstStyle/>
+          <a:p>
+            <a:pPr algn="l"/>
+            <a:r>
+              <a:rPr sz="800" b="0" i="0">
+                <a:solidFill>
+                  <a:srgbClr val="2563EB"/>
+                </a:solidFill>
+                <a:latin typeface="Consolas"/>
+              </a:rPr>
+              <a:t>varchar(500)</a:t>
+            </a:r>
+          </a:p>
+        </p:txBody>
+      </p:sp>
+      <p:sp>
+        <p:nvSpPr>
+          <p:cNvPr id="105" name="TextBox 104"/>
+          <p:cNvSpPr txBox="1"/>
+          <p:nvPr/>
+        </p:nvSpPr>
+        <p:spPr>
+          <a:xfrm>
+            <a:off x="8522208" y="3163824"/>
+            <a:ext cx="384048" cy="214884"/>
+          </a:xfrm>
+          <a:prstGeom prst="rect">
+            <a:avLst/>
+          </a:prstGeom>
+          <a:noFill/>
+        </p:spPr>
+        <p:txBody>
+          <a:bodyPr wrap="square" lIns="27432" rIns="27432" tIns="0" bIns="0" anchor="ctr">
+            <a:spAutoFit/>
+          </a:bodyPr>
+          <a:lstStyle/>
+          <a:p>
+            <a:pPr algn="ctr"/>
+            <a:r>
+              <a:rPr sz="700" b="0" i="0">
+                <a:solidFill>
+                  <a:srgbClr val="6B7280"/>
+                </a:solidFill>
+                <a:latin typeface="Calibri"/>
+              </a:rPr>
+              <a:t>Y</a:t>
+            </a:r>
+          </a:p>
+        </p:txBody>
+      </p:sp>
+      <p:sp>
+        <p:nvSpPr>
+          <p:cNvPr id="106" name="TextBox 105"/>
+          <p:cNvSpPr txBox="1"/>
+          <p:nvPr/>
+        </p:nvSpPr>
+        <p:spPr>
+          <a:xfrm>
+            <a:off x="9336024" y="3163824"/>
+            <a:ext cx="2340864" cy="214884"/>
+          </a:xfrm>
+          <a:prstGeom prst="rect">
+            <a:avLst/>
+          </a:prstGeom>
+          <a:noFill/>
+        </p:spPr>
+        <p:txBody>
+          <a:bodyPr wrap="square" lIns="27432" rIns="27432" tIns="0" bIns="0" anchor="ctr">
+            <a:spAutoFit/>
+          </a:bodyPr>
+          <a:lstStyle/>
+          <a:p>
+            <a:pPr algn="l"/>
+            <a:r>
+              <a:rPr sz="850" b="0" i="0">
+                <a:solidFill>
+                  <a:srgbClr val="1E2D40"/>
+                </a:solidFill>
+                <a:latin typeface="Calibri"/>
+              </a:rPr>
               <a:t>หมายเหตุ</a:t>
             </a:r>
           </a:p>
@@ -46339,7 +47990,7 @@
       </p:sp>
       <p:sp>
         <p:nvSpPr>
-          <p:cNvPr id="103" name="TextBox 102"/>
+          <p:cNvPr id="107" name="TextBox 106"/>
           <p:cNvSpPr txBox="1"/>
           <p:nvPr/>
         </p:nvSpPr>
@@ -46374,7 +48025,7 @@
       </p:sp>
       <p:sp>
         <p:nvSpPr>
-          <p:cNvPr id="104" name="TextBox 103"/>
+          <p:cNvPr id="108" name="TextBox 107"/>
           <p:cNvSpPr txBox="1"/>
           <p:nvPr/>
         </p:nvSpPr>
@@ -46409,7 +48060,7 @@
       </p:sp>
       <p:sp>
         <p:nvSpPr>
-          <p:cNvPr id="105" name="TextBox 104"/>
+          <p:cNvPr id="109" name="TextBox 108"/>
           <p:cNvSpPr txBox="1"/>
           <p:nvPr/>
         </p:nvSpPr>
@@ -46444,7 +48095,7 @@
       </p:sp>
       <p:sp>
         <p:nvSpPr>
-          <p:cNvPr id="106" name="TextBox 105"/>
+          <p:cNvPr id="110" name="TextBox 109"/>
           <p:cNvSpPr txBox="1"/>
           <p:nvPr/>
         </p:nvSpPr>
@@ -46479,7 +48130,7 @@
       </p:sp>
       <p:sp>
         <p:nvSpPr>
-          <p:cNvPr id="107" name="TextBox 106"/>
+          <p:cNvPr id="111" name="TextBox 110"/>
           <p:cNvSpPr txBox="1"/>
           <p:nvPr/>
         </p:nvSpPr>
@@ -46514,7 +48165,7 @@
       </p:sp>
       <p:sp>
         <p:nvSpPr>
-          <p:cNvPr id="108" name="TextBox 107"/>
+          <p:cNvPr id="112" name="TextBox 111"/>
           <p:cNvSpPr txBox="1"/>
           <p:nvPr/>
         </p:nvSpPr>
@@ -46549,7 +48200,7 @@
       </p:sp>
       <p:sp>
         <p:nvSpPr>
-          <p:cNvPr id="109" name="TextBox 108"/>
+          <p:cNvPr id="113" name="TextBox 112"/>
           <p:cNvSpPr txBox="1"/>
           <p:nvPr/>
         </p:nvSpPr>
@@ -46584,7 +48235,7 @@
       </p:sp>
       <p:sp>
         <p:nvSpPr>
-          <p:cNvPr id="110" name="TextBox 109"/>
+          <p:cNvPr id="114" name="TextBox 113"/>
           <p:cNvSpPr txBox="1"/>
           <p:nvPr/>
         </p:nvSpPr>
@@ -51103,7 +52754,7 @@
         <p:spPr>
           <a:xfrm>
             <a:off x="457200" y="1444752"/>
-            <a:ext cx="5486400" cy="1933955"/>
+            <a:ext cx="5486400" cy="2148839"/>
           </a:xfrm>
           <a:prstGeom prst="rect">
             <a:avLst/>
@@ -51564,7 +53215,7 @@
                 </a:solidFill>
                 <a:latin typeface="Consolas"/>
               </a:rPr>
-              <a:t>PartNo</a:t>
+              <a:t>PartId</a:t>
             </a:r>
           </a:p>
         </p:txBody>
@@ -51599,7 +53250,7 @@
                 </a:solidFill>
                 <a:latin typeface="Consolas"/>
               </a:rPr>
-              <a:t>varchar(50)</a:t>
+              <a:t>int</a:t>
             </a:r>
           </a:p>
         </p:txBody>
@@ -51665,11 +53316,11 @@
             <a:r>
               <a:rPr sz="800" b="1" i="0">
                 <a:solidFill>
-                  <a:srgbClr val="B45309"/>
-                </a:solidFill>
-                <a:latin typeface="Calibri"/>
-              </a:rPr>
-              <a:t>~</a:t>
+                  <a:srgbClr val="059669"/>
+                </a:solidFill>
+                <a:latin typeface="Calibri"/>
+              </a:rPr>
+              <a:t>FK</a:t>
             </a:r>
           </a:p>
         </p:txBody>
@@ -51704,7 +53355,7 @@
                 </a:solidFill>
                 <a:latin typeface="Calibri"/>
               </a:rPr>
-              <a:t>อ้าง Part.PartNo</a:t>
+              <a:t>→ Part (Restrict)</a:t>
             </a:r>
           </a:p>
         </p:txBody>
@@ -51783,7 +53434,7 @@
                 </a:solidFill>
                 <a:latin typeface="Consolas"/>
               </a:rPr>
-              <a:t>Condition</a:t>
+              <a:t>PartNo</a:t>
             </a:r>
           </a:p>
         </p:txBody>
@@ -51818,7 +53469,7 @@
                 </a:solidFill>
                 <a:latin typeface="Consolas"/>
               </a:rPr>
-              <a:t>varchar(20)</a:t>
+              <a:t>varchar(50)</a:t>
             </a:r>
           </a:p>
         </p:txBody>
@@ -51888,7 +53539,7 @@
                 </a:solidFill>
                 <a:latin typeface="Calibri"/>
               </a:rPr>
-              <a:t>Good | Defective</a:t>
+              <a:t>snapshot</a:t>
             </a:r>
           </a:p>
         </p:txBody>
@@ -51923,7 +53574,7 @@
                 </a:solidFill>
                 <a:latin typeface="Consolas"/>
               </a:rPr>
-              <a:t>SourceType</a:t>
+              <a:t>Condition</a:t>
             </a:r>
           </a:p>
         </p:txBody>
@@ -52028,7 +53679,7 @@
                 </a:solidFill>
                 <a:latin typeface="Calibri"/>
               </a:rPr>
-              <a:t>Technician/GRG/LocalVendor</a:t>
+              <a:t>Good | Defective</a:t>
             </a:r>
           </a:p>
         </p:txBody>
@@ -52107,7 +53758,7 @@
                 </a:solidFill>
                 <a:latin typeface="Consolas"/>
               </a:rPr>
-              <a:t>LocationFromId</a:t>
+              <a:t>SourceType</a:t>
             </a:r>
           </a:p>
         </p:txBody>
@@ -52142,7 +53793,7 @@
                 </a:solidFill>
                 <a:latin typeface="Consolas"/>
               </a:rPr>
-              <a:t>int</a:t>
+              <a:t>varchar(20)</a:t>
             </a:r>
           </a:p>
         </p:txBody>
@@ -52212,7 +53863,7 @@
                 </a:solidFill>
                 <a:latin typeface="Calibri"/>
               </a:rPr>
-              <a:t>คลังต้นทาง</a:t>
+              <a:t>Technician/GRG/LocalVendor</a:t>
             </a:r>
           </a:p>
         </p:txBody>
@@ -52247,7 +53898,7 @@
                 </a:solidFill>
                 <a:latin typeface="Consolas"/>
               </a:rPr>
-              <a:t>LocationToId</a:t>
+              <a:t>LocationFromId</a:t>
             </a:r>
           </a:p>
         </p:txBody>
@@ -52352,7 +54003,7 @@
                 </a:solidFill>
                 <a:latin typeface="Calibri"/>
               </a:rPr>
-              <a:t>คลังปลายทาง</a:t>
+              <a:t>คลังต้นทาง</a:t>
             </a:r>
           </a:p>
         </p:txBody>
@@ -52431,7 +54082,7 @@
                 </a:solidFill>
                 <a:latin typeface="Consolas"/>
               </a:rPr>
-              <a:t>ReturnedBy</a:t>
+              <a:t>LocationToId</a:t>
             </a:r>
           </a:p>
         </p:txBody>
@@ -52466,7 +54117,7 @@
                 </a:solidFill>
                 <a:latin typeface="Consolas"/>
               </a:rPr>
-              <a:t>varchar(100)</a:t>
+              <a:t>int</a:t>
             </a:r>
           </a:p>
         </p:txBody>
@@ -52536,7 +54187,7 @@
                 </a:solidFill>
                 <a:latin typeface="Calibri"/>
               </a:rPr>
-              <a:t>ผู้คืน</a:t>
+              <a:t>คลังปลายทาง</a:t>
             </a:r>
           </a:p>
         </p:txBody>
@@ -52571,7 +54222,7 @@
                 </a:solidFill>
                 <a:latin typeface="Consolas"/>
               </a:rPr>
-              <a:t>CreatedAt</a:t>
+              <a:t>ReturnedBy</a:t>
             </a:r>
           </a:p>
         </p:txBody>
@@ -52606,7 +54257,7 @@
                 </a:solidFill>
                 <a:latin typeface="Consolas"/>
               </a:rPr>
-              <a:t>datetime</a:t>
+              <a:t>varchar(100)</a:t>
             </a:r>
           </a:p>
         </p:txBody>
@@ -52676,6 +54327,190 @@
                 </a:solidFill>
                 <a:latin typeface="Calibri"/>
               </a:rPr>
+              <a:t>ผู้คืน</a:t>
+            </a:r>
+          </a:p>
+        </p:txBody>
+      </p:sp>
+      <p:sp>
+        <p:nvSpPr>
+          <p:cNvPr id="56" name="Rectangle 55"/>
+          <p:cNvSpPr/>
+          <p:nvPr/>
+        </p:nvSpPr>
+        <p:spPr>
+          <a:xfrm>
+            <a:off x="475488" y="3378708"/>
+            <a:ext cx="5449824" cy="214884"/>
+          </a:xfrm>
+          <a:prstGeom prst="rect">
+            <a:avLst/>
+          </a:prstGeom>
+          <a:solidFill>
+            <a:srgbClr val="F3F6FB"/>
+          </a:solidFill>
+          <a:ln>
+            <a:noFill/>
+          </a:ln>
+          <a:effectLst/>
+        </p:spPr>
+        <p:style>
+          <a:lnRef idx="1">
+            <a:schemeClr val="accent1"/>
+          </a:lnRef>
+          <a:fillRef idx="3">
+            <a:schemeClr val="accent1"/>
+          </a:fillRef>
+          <a:effectRef idx="2">
+            <a:schemeClr val="accent1"/>
+          </a:effectRef>
+          <a:fontRef idx="minor">
+            <a:schemeClr val="lt1"/>
+          </a:fontRef>
+        </p:style>
+        <p:txBody>
+          <a:bodyPr rtlCol="0" anchor="ctr"/>
+          <a:lstStyle/>
+          <a:p>
+            <a:pPr algn="ctr"/>
+          </a:p>
+        </p:txBody>
+      </p:sp>
+      <p:sp>
+        <p:nvSpPr>
+          <p:cNvPr id="57" name="TextBox 56"/>
+          <p:cNvSpPr txBox="1"/>
+          <p:nvPr/>
+        </p:nvSpPr>
+        <p:spPr>
+          <a:xfrm>
+            <a:off x="502920" y="3378708"/>
+            <a:ext cx="1188720" cy="214884"/>
+          </a:xfrm>
+          <a:prstGeom prst="rect">
+            <a:avLst/>
+          </a:prstGeom>
+          <a:noFill/>
+        </p:spPr>
+        <p:txBody>
+          <a:bodyPr wrap="square" lIns="27432" rIns="27432" tIns="0" bIns="0" anchor="ctr">
+            <a:spAutoFit/>
+          </a:bodyPr>
+          <a:lstStyle/>
+          <a:p>
+            <a:pPr algn="l"/>
+            <a:r>
+              <a:rPr sz="850" b="1" i="0">
+                <a:solidFill>
+                  <a:srgbClr val="1E2D40"/>
+                </a:solidFill>
+                <a:latin typeface="Consolas"/>
+              </a:rPr>
+              <a:t>CreatedAt</a:t>
+            </a:r>
+          </a:p>
+        </p:txBody>
+      </p:sp>
+      <p:sp>
+        <p:nvSpPr>
+          <p:cNvPr id="58" name="TextBox 57"/>
+          <p:cNvSpPr txBox="1"/>
+          <p:nvPr/>
+        </p:nvSpPr>
+        <p:spPr>
+          <a:xfrm>
+            <a:off x="1764792" y="3378708"/>
+            <a:ext cx="969264" cy="214884"/>
+          </a:xfrm>
+          <a:prstGeom prst="rect">
+            <a:avLst/>
+          </a:prstGeom>
+          <a:noFill/>
+        </p:spPr>
+        <p:txBody>
+          <a:bodyPr wrap="square" lIns="27432" rIns="27432" tIns="0" bIns="0" anchor="ctr">
+            <a:spAutoFit/>
+          </a:bodyPr>
+          <a:lstStyle/>
+          <a:p>
+            <a:pPr algn="l"/>
+            <a:r>
+              <a:rPr sz="800" b="0" i="0">
+                <a:solidFill>
+                  <a:srgbClr val="2563EB"/>
+                </a:solidFill>
+                <a:latin typeface="Consolas"/>
+              </a:rPr>
+              <a:t>datetime</a:t>
+            </a:r>
+          </a:p>
+        </p:txBody>
+      </p:sp>
+      <p:sp>
+        <p:nvSpPr>
+          <p:cNvPr id="59" name="TextBox 58"/>
+          <p:cNvSpPr txBox="1"/>
+          <p:nvPr/>
+        </p:nvSpPr>
+        <p:spPr>
+          <a:xfrm>
+            <a:off x="2761488" y="3378708"/>
+            <a:ext cx="384048" cy="214884"/>
+          </a:xfrm>
+          <a:prstGeom prst="rect">
+            <a:avLst/>
+          </a:prstGeom>
+          <a:noFill/>
+        </p:spPr>
+        <p:txBody>
+          <a:bodyPr wrap="square" lIns="27432" rIns="27432" tIns="0" bIns="0" anchor="ctr">
+            <a:spAutoFit/>
+          </a:bodyPr>
+          <a:lstStyle/>
+          <a:p>
+            <a:pPr algn="ctr"/>
+            <a:r>
+              <a:rPr sz="700" b="0" i="0">
+                <a:solidFill>
+                  <a:srgbClr val="B0B0B0"/>
+                </a:solidFill>
+                <a:latin typeface="Calibri"/>
+              </a:rPr>
+              <a:t>—</a:t>
+            </a:r>
+          </a:p>
+        </p:txBody>
+      </p:sp>
+      <p:sp>
+        <p:nvSpPr>
+          <p:cNvPr id="60" name="TextBox 59"/>
+          <p:cNvSpPr txBox="1"/>
+          <p:nvPr/>
+        </p:nvSpPr>
+        <p:spPr>
+          <a:xfrm>
+            <a:off x="3575304" y="3378708"/>
+            <a:ext cx="2340864" cy="214884"/>
+          </a:xfrm>
+          <a:prstGeom prst="rect">
+            <a:avLst/>
+          </a:prstGeom>
+          <a:noFill/>
+        </p:spPr>
+        <p:txBody>
+          <a:bodyPr wrap="square" lIns="27432" rIns="27432" tIns="0" bIns="0" anchor="ctr">
+            <a:spAutoFit/>
+          </a:bodyPr>
+          <a:lstStyle/>
+          <a:p>
+            <a:pPr algn="l"/>
+            <a:r>
+              <a:rPr sz="850" b="0" i="0">
+                <a:solidFill>
+                  <a:srgbClr val="1E2D40"/>
+                </a:solidFill>
+                <a:latin typeface="Calibri"/>
+              </a:rPr>
               <a:t>เวลาสร้าง</a:t>
             </a:r>
           </a:p>
@@ -52683,7 +54518,7 @@
       </p:sp>
       <p:sp>
         <p:nvSpPr>
-          <p:cNvPr id="56" name="TextBox 55"/>
+          <p:cNvPr id="61" name="TextBox 60"/>
           <p:cNvSpPr txBox="1"/>
           <p:nvPr/>
         </p:nvSpPr>
@@ -52718,7 +54553,7 @@
       </p:sp>
       <p:sp>
         <p:nvSpPr>
-          <p:cNvPr id="57" name="Rectangle 56"/>
+          <p:cNvPr id="62" name="Rectangle 61"/>
           <p:cNvSpPr/>
           <p:nvPr/>
         </p:nvSpPr>
@@ -52762,7 +54597,7 @@
       </p:sp>
       <p:sp>
         <p:nvSpPr>
-          <p:cNvPr id="58" name="TextBox 57"/>
+          <p:cNvPr id="63" name="TextBox 62"/>
           <p:cNvSpPr txBox="1"/>
           <p:nvPr/>
         </p:nvSpPr>
@@ -52797,7 +54632,7 @@
       </p:sp>
       <p:sp>
         <p:nvSpPr>
-          <p:cNvPr id="59" name="TextBox 58"/>
+          <p:cNvPr id="64" name="TextBox 63"/>
           <p:cNvSpPr txBox="1"/>
           <p:nvPr/>
         </p:nvSpPr>
@@ -52832,7 +54667,7 @@
       </p:sp>
       <p:sp>
         <p:nvSpPr>
-          <p:cNvPr id="60" name="TextBox 59"/>
+          <p:cNvPr id="65" name="TextBox 64"/>
           <p:cNvSpPr txBox="1"/>
           <p:nvPr/>
         </p:nvSpPr>
@@ -52867,7 +54702,7 @@
       </p:sp>
       <p:sp>
         <p:nvSpPr>
-          <p:cNvPr id="61" name="TextBox 60"/>
+          <p:cNvPr id="66" name="TextBox 65"/>
           <p:cNvSpPr txBox="1"/>
           <p:nvPr/>
         </p:nvSpPr>
@@ -52902,7 +54737,7 @@
       </p:sp>
       <p:sp>
         <p:nvSpPr>
-          <p:cNvPr id="62" name="TextBox 61"/>
+          <p:cNvPr id="67" name="TextBox 66"/>
           <p:cNvSpPr txBox="1"/>
           <p:nvPr/>
         </p:nvSpPr>
@@ -52937,14 +54772,14 @@
       </p:sp>
       <p:sp>
         <p:nvSpPr>
-          <p:cNvPr id="63" name="Rectangle 62"/>
+          <p:cNvPr id="68" name="Rectangle 67"/>
           <p:cNvSpPr/>
           <p:nvPr/>
         </p:nvSpPr>
         <p:spPr>
           <a:xfrm>
             <a:off x="6217920" y="1444752"/>
-            <a:ext cx="5486400" cy="2793491"/>
+            <a:ext cx="5486400" cy="3008376"/>
           </a:xfrm>
           <a:prstGeom prst="rect">
             <a:avLst/>
@@ -52983,7 +54818,7 @@
       </p:sp>
       <p:sp>
         <p:nvSpPr>
-          <p:cNvPr id="64" name="TextBox 63"/>
+          <p:cNvPr id="69" name="TextBox 68"/>
           <p:cNvSpPr txBox="1"/>
           <p:nvPr/>
         </p:nvSpPr>
@@ -53018,7 +54853,7 @@
       </p:sp>
       <p:sp>
         <p:nvSpPr>
-          <p:cNvPr id="65" name="TextBox 64"/>
+          <p:cNvPr id="70" name="TextBox 69"/>
           <p:cNvSpPr txBox="1"/>
           <p:nvPr/>
         </p:nvSpPr>
@@ -53053,7 +54888,7 @@
       </p:sp>
       <p:sp>
         <p:nvSpPr>
-          <p:cNvPr id="66" name="TextBox 65"/>
+          <p:cNvPr id="71" name="TextBox 70"/>
           <p:cNvSpPr txBox="1"/>
           <p:nvPr/>
         </p:nvSpPr>
@@ -53088,7 +54923,7 @@
       </p:sp>
       <p:sp>
         <p:nvSpPr>
-          <p:cNvPr id="67" name="TextBox 66"/>
+          <p:cNvPr id="72" name="TextBox 71"/>
           <p:cNvSpPr txBox="1"/>
           <p:nvPr/>
         </p:nvSpPr>
@@ -53123,7 +54958,7 @@
       </p:sp>
       <p:sp>
         <p:nvSpPr>
-          <p:cNvPr id="68" name="TextBox 67"/>
+          <p:cNvPr id="73" name="TextBox 72"/>
           <p:cNvSpPr txBox="1"/>
           <p:nvPr/>
         </p:nvSpPr>
@@ -53158,7 +54993,7 @@
       </p:sp>
       <p:sp>
         <p:nvSpPr>
-          <p:cNvPr id="69" name="Rectangle 68"/>
+          <p:cNvPr id="74" name="Rectangle 73"/>
           <p:cNvSpPr/>
           <p:nvPr/>
         </p:nvSpPr>
@@ -53202,7 +55037,7 @@
       </p:sp>
       <p:sp>
         <p:nvSpPr>
-          <p:cNvPr id="70" name="TextBox 69"/>
+          <p:cNvPr id="75" name="TextBox 74"/>
           <p:cNvSpPr txBox="1"/>
           <p:nvPr/>
         </p:nvSpPr>
@@ -53230,14 +55065,14 @@
                 </a:solidFill>
                 <a:latin typeface="Consolas"/>
               </a:rPr>
-              <a:t>PartNo</a:t>
-            </a:r>
-          </a:p>
-        </p:txBody>
-      </p:sp>
-      <p:sp>
-        <p:nvSpPr>
-          <p:cNvPr id="71" name="TextBox 70"/>
+              <a:t>PartId</a:t>
+            </a:r>
+          </a:p>
+        </p:txBody>
+      </p:sp>
+      <p:sp>
+        <p:nvSpPr>
+          <p:cNvPr id="76" name="TextBox 75"/>
           <p:cNvSpPr txBox="1"/>
           <p:nvPr/>
         </p:nvSpPr>
@@ -53265,14 +55100,14 @@
                 </a:solidFill>
                 <a:latin typeface="Consolas"/>
               </a:rPr>
-              <a:t>varchar(50)</a:t>
-            </a:r>
-          </a:p>
-        </p:txBody>
-      </p:sp>
-      <p:sp>
-        <p:nvSpPr>
-          <p:cNvPr id="72" name="TextBox 71"/>
+              <a:t>int</a:t>
+            </a:r>
+          </a:p>
+        </p:txBody>
+      </p:sp>
+      <p:sp>
+        <p:nvSpPr>
+          <p:cNvPr id="77" name="TextBox 76"/>
           <p:cNvSpPr txBox="1"/>
           <p:nvPr/>
         </p:nvSpPr>
@@ -53307,7 +55142,7 @@
       </p:sp>
       <p:sp>
         <p:nvSpPr>
-          <p:cNvPr id="73" name="TextBox 72"/>
+          <p:cNvPr id="78" name="TextBox 77"/>
           <p:cNvSpPr txBox="1"/>
           <p:nvPr/>
         </p:nvSpPr>
@@ -53331,18 +55166,18 @@
             <a:r>
               <a:rPr sz="800" b="1" i="0">
                 <a:solidFill>
-                  <a:srgbClr val="B45309"/>
-                </a:solidFill>
-                <a:latin typeface="Calibri"/>
-              </a:rPr>
-              <a:t>~</a:t>
-            </a:r>
-          </a:p>
-        </p:txBody>
-      </p:sp>
-      <p:sp>
-        <p:nvSpPr>
-          <p:cNvPr id="74" name="TextBox 73"/>
+                  <a:srgbClr val="059669"/>
+                </a:solidFill>
+                <a:latin typeface="Calibri"/>
+              </a:rPr>
+              <a:t>FK</a:t>
+            </a:r>
+          </a:p>
+        </p:txBody>
+      </p:sp>
+      <p:sp>
+        <p:nvSpPr>
+          <p:cNvPr id="79" name="TextBox 78"/>
           <p:cNvSpPr txBox="1"/>
           <p:nvPr/>
         </p:nvSpPr>
@@ -53370,14 +55205,14 @@
                 </a:solidFill>
                 <a:latin typeface="Calibri"/>
               </a:rPr>
-              <a:t>อ้าง Part.PartNo</a:t>
-            </a:r>
-          </a:p>
-        </p:txBody>
-      </p:sp>
-      <p:sp>
-        <p:nvSpPr>
-          <p:cNvPr id="75" name="TextBox 74"/>
+              <a:t>→ Part (Restrict)</a:t>
+            </a:r>
+          </a:p>
+        </p:txBody>
+      </p:sp>
+      <p:sp>
+        <p:nvSpPr>
+          <p:cNvPr id="80" name="TextBox 79"/>
           <p:cNvSpPr txBox="1"/>
           <p:nvPr/>
         </p:nvSpPr>
@@ -53405,14 +55240,14 @@
                 </a:solidFill>
                 <a:latin typeface="Consolas"/>
               </a:rPr>
-              <a:t>Qty</a:t>
-            </a:r>
-          </a:p>
-        </p:txBody>
-      </p:sp>
-      <p:sp>
-        <p:nvSpPr>
-          <p:cNvPr id="76" name="TextBox 75"/>
+              <a:t>PartNo</a:t>
+            </a:r>
+          </a:p>
+        </p:txBody>
+      </p:sp>
+      <p:sp>
+        <p:nvSpPr>
+          <p:cNvPr id="81" name="TextBox 80"/>
           <p:cNvSpPr txBox="1"/>
           <p:nvPr/>
         </p:nvSpPr>
@@ -53440,14 +55275,14 @@
                 </a:solidFill>
                 <a:latin typeface="Consolas"/>
               </a:rPr>
-              <a:t>int</a:t>
-            </a:r>
-          </a:p>
-        </p:txBody>
-      </p:sp>
-      <p:sp>
-        <p:nvSpPr>
-          <p:cNvPr id="77" name="TextBox 76"/>
+              <a:t>varchar(50)</a:t>
+            </a:r>
+          </a:p>
+        </p:txBody>
+      </p:sp>
+      <p:sp>
+        <p:nvSpPr>
+          <p:cNvPr id="82" name="TextBox 81"/>
           <p:cNvSpPr txBox="1"/>
           <p:nvPr/>
         </p:nvSpPr>
@@ -53482,7 +55317,7 @@
       </p:sp>
       <p:sp>
         <p:nvSpPr>
-          <p:cNvPr id="78" name="TextBox 77"/>
+          <p:cNvPr id="83" name="TextBox 82"/>
           <p:cNvSpPr txBox="1"/>
           <p:nvPr/>
         </p:nvSpPr>
@@ -53510,14 +55345,14 @@
                 </a:solidFill>
                 <a:latin typeface="Calibri"/>
               </a:rPr>
-              <a:t>จำนวน</a:t>
-            </a:r>
-          </a:p>
-        </p:txBody>
-      </p:sp>
-      <p:sp>
-        <p:nvSpPr>
-          <p:cNvPr id="79" name="Rectangle 78"/>
+              <a:t>snapshot</a:t>
+            </a:r>
+          </a:p>
+        </p:txBody>
+      </p:sp>
+      <p:sp>
+        <p:nvSpPr>
+          <p:cNvPr id="84" name="Rectangle 83"/>
           <p:cNvSpPr/>
           <p:nvPr/>
         </p:nvSpPr>
@@ -53561,7 +55396,7 @@
       </p:sp>
       <p:sp>
         <p:nvSpPr>
-          <p:cNvPr id="80" name="TextBox 79"/>
+          <p:cNvPr id="85" name="TextBox 84"/>
           <p:cNvSpPr txBox="1"/>
           <p:nvPr/>
         </p:nvSpPr>
@@ -53589,14 +55424,14 @@
                 </a:solidFill>
                 <a:latin typeface="Consolas"/>
               </a:rPr>
-              <a:t>Condition</a:t>
-            </a:r>
-          </a:p>
-        </p:txBody>
-      </p:sp>
-      <p:sp>
-        <p:nvSpPr>
-          <p:cNvPr id="81" name="TextBox 80"/>
+              <a:t>Qty</a:t>
+            </a:r>
+          </a:p>
+        </p:txBody>
+      </p:sp>
+      <p:sp>
+        <p:nvSpPr>
+          <p:cNvPr id="86" name="TextBox 85"/>
           <p:cNvSpPr txBox="1"/>
           <p:nvPr/>
         </p:nvSpPr>
@@ -53624,14 +55459,14 @@
                 </a:solidFill>
                 <a:latin typeface="Consolas"/>
               </a:rPr>
-              <a:t>varchar(20)</a:t>
-            </a:r>
-          </a:p>
-        </p:txBody>
-      </p:sp>
-      <p:sp>
-        <p:nvSpPr>
-          <p:cNvPr id="82" name="TextBox 81"/>
+              <a:t>int</a:t>
+            </a:r>
+          </a:p>
+        </p:txBody>
+      </p:sp>
+      <p:sp>
+        <p:nvSpPr>
+          <p:cNvPr id="87" name="TextBox 86"/>
           <p:cNvSpPr txBox="1"/>
           <p:nvPr/>
         </p:nvSpPr>
@@ -53666,7 +55501,7 @@
       </p:sp>
       <p:sp>
         <p:nvSpPr>
-          <p:cNvPr id="83" name="TextBox 82"/>
+          <p:cNvPr id="88" name="TextBox 87"/>
           <p:cNvSpPr txBox="1"/>
           <p:nvPr/>
         </p:nvSpPr>
@@ -53694,14 +55529,14 @@
                 </a:solidFill>
                 <a:latin typeface="Calibri"/>
               </a:rPr>
-              <a:t>Good | Defective</a:t>
-            </a:r>
-          </a:p>
-        </p:txBody>
-      </p:sp>
-      <p:sp>
-        <p:nvSpPr>
-          <p:cNvPr id="84" name="TextBox 83"/>
+              <a:t>จำนวน</a:t>
+            </a:r>
+          </a:p>
+        </p:txBody>
+      </p:sp>
+      <p:sp>
+        <p:nvSpPr>
+          <p:cNvPr id="89" name="TextBox 88"/>
           <p:cNvSpPr txBox="1"/>
           <p:nvPr/>
         </p:nvSpPr>
@@ -53729,14 +55564,14 @@
                 </a:solidFill>
                 <a:latin typeface="Consolas"/>
               </a:rPr>
-              <a:t>FromLocationId</a:t>
-            </a:r>
-          </a:p>
-        </p:txBody>
-      </p:sp>
-      <p:sp>
-        <p:nvSpPr>
-          <p:cNvPr id="85" name="TextBox 84"/>
+              <a:t>Condition</a:t>
+            </a:r>
+          </a:p>
+        </p:txBody>
+      </p:sp>
+      <p:sp>
+        <p:nvSpPr>
+          <p:cNvPr id="90" name="TextBox 89"/>
           <p:cNvSpPr txBox="1"/>
           <p:nvPr/>
         </p:nvSpPr>
@@ -53764,14 +55599,14 @@
                 </a:solidFill>
                 <a:latin typeface="Consolas"/>
               </a:rPr>
-              <a:t>int</a:t>
-            </a:r>
-          </a:p>
-        </p:txBody>
-      </p:sp>
-      <p:sp>
-        <p:nvSpPr>
-          <p:cNvPr id="86" name="TextBox 85"/>
+              <a:t>varchar(20)</a:t>
+            </a:r>
+          </a:p>
+        </p:txBody>
+      </p:sp>
+      <p:sp>
+        <p:nvSpPr>
+          <p:cNvPr id="91" name="TextBox 90"/>
           <p:cNvSpPr txBox="1"/>
           <p:nvPr/>
         </p:nvSpPr>
@@ -53806,42 +55641,7 @@
       </p:sp>
       <p:sp>
         <p:nvSpPr>
-          <p:cNvPr id="87" name="TextBox 86"/>
-          <p:cNvSpPr txBox="1"/>
-          <p:nvPr/>
-        </p:nvSpPr>
-        <p:spPr>
-          <a:xfrm>
-            <a:off x="8906256" y="2304288"/>
-            <a:ext cx="384048" cy="214884"/>
-          </a:xfrm>
-          <a:prstGeom prst="rect">
-            <a:avLst/>
-          </a:prstGeom>
-          <a:noFill/>
-        </p:spPr>
-        <p:txBody>
-          <a:bodyPr wrap="square" lIns="27432" rIns="27432" tIns="0" bIns="0" anchor="ctr">
-            <a:spAutoFit/>
-          </a:bodyPr>
-          <a:lstStyle/>
-          <a:p>
-            <a:pPr algn="ctr"/>
-            <a:r>
-              <a:rPr sz="800" b="1" i="0">
-                <a:solidFill>
-                  <a:srgbClr val="B45309"/>
-                </a:solidFill>
-                <a:latin typeface="Calibri"/>
-              </a:rPr>
-              <a:t>~</a:t>
-            </a:r>
-          </a:p>
-        </p:txBody>
-      </p:sp>
-      <p:sp>
-        <p:nvSpPr>
-          <p:cNvPr id="88" name="TextBox 87"/>
+          <p:cNvPr id="92" name="TextBox 91"/>
           <p:cNvSpPr txBox="1"/>
           <p:nvPr/>
         </p:nvSpPr>
@@ -53869,14 +55669,14 @@
                 </a:solidFill>
                 <a:latin typeface="Calibri"/>
               </a:rPr>
-              <a:t>คลังต้นทาง</a:t>
-            </a:r>
-          </a:p>
-        </p:txBody>
-      </p:sp>
-      <p:sp>
-        <p:nvSpPr>
-          <p:cNvPr id="89" name="Rectangle 88"/>
+              <a:t>Good | Defective</a:t>
+            </a:r>
+          </a:p>
+        </p:txBody>
+      </p:sp>
+      <p:sp>
+        <p:nvSpPr>
+          <p:cNvPr id="93" name="Rectangle 92"/>
           <p:cNvSpPr/>
           <p:nvPr/>
         </p:nvSpPr>
@@ -53920,7 +55720,7 @@
       </p:sp>
       <p:sp>
         <p:nvSpPr>
-          <p:cNvPr id="90" name="TextBox 89"/>
+          <p:cNvPr id="94" name="TextBox 93"/>
           <p:cNvSpPr txBox="1"/>
           <p:nvPr/>
         </p:nvSpPr>
@@ -53948,14 +55748,14 @@
                 </a:solidFill>
                 <a:latin typeface="Consolas"/>
               </a:rPr>
-              <a:t>ToLocationId</a:t>
-            </a:r>
-          </a:p>
-        </p:txBody>
-      </p:sp>
-      <p:sp>
-        <p:nvSpPr>
-          <p:cNvPr id="91" name="TextBox 90"/>
+              <a:t>FromLocationId</a:t>
+            </a:r>
+          </a:p>
+        </p:txBody>
+      </p:sp>
+      <p:sp>
+        <p:nvSpPr>
+          <p:cNvPr id="95" name="TextBox 94"/>
           <p:cNvSpPr txBox="1"/>
           <p:nvPr/>
         </p:nvSpPr>
@@ -53990,7 +55790,7 @@
       </p:sp>
       <p:sp>
         <p:nvSpPr>
-          <p:cNvPr id="92" name="TextBox 91"/>
+          <p:cNvPr id="96" name="TextBox 95"/>
           <p:cNvSpPr txBox="1"/>
           <p:nvPr/>
         </p:nvSpPr>
@@ -54025,7 +55825,7 @@
       </p:sp>
       <p:sp>
         <p:nvSpPr>
-          <p:cNvPr id="93" name="TextBox 92"/>
+          <p:cNvPr id="97" name="TextBox 96"/>
           <p:cNvSpPr txBox="1"/>
           <p:nvPr/>
         </p:nvSpPr>
@@ -54060,7 +55860,7 @@
       </p:sp>
       <p:sp>
         <p:nvSpPr>
-          <p:cNvPr id="94" name="TextBox 93"/>
+          <p:cNvPr id="98" name="TextBox 97"/>
           <p:cNvSpPr txBox="1"/>
           <p:nvPr/>
         </p:nvSpPr>
@@ -54088,14 +55888,14 @@
                 </a:solidFill>
                 <a:latin typeface="Calibri"/>
               </a:rPr>
-              <a:t>คลังปลายทาง</a:t>
-            </a:r>
-          </a:p>
-        </p:txBody>
-      </p:sp>
-      <p:sp>
-        <p:nvSpPr>
-          <p:cNvPr id="95" name="TextBox 94"/>
+              <a:t>คลังต้นทาง</a:t>
+            </a:r>
+          </a:p>
+        </p:txBody>
+      </p:sp>
+      <p:sp>
+        <p:nvSpPr>
+          <p:cNvPr id="99" name="TextBox 98"/>
           <p:cNvSpPr txBox="1"/>
           <p:nvPr/>
         </p:nvSpPr>
@@ -54123,14 +55923,14 @@
                 </a:solidFill>
                 <a:latin typeface="Consolas"/>
               </a:rPr>
-              <a:t>Status</a:t>
-            </a:r>
-          </a:p>
-        </p:txBody>
-      </p:sp>
-      <p:sp>
-        <p:nvSpPr>
-          <p:cNvPr id="96" name="TextBox 95"/>
+              <a:t>ToLocationId</a:t>
+            </a:r>
+          </a:p>
+        </p:txBody>
+      </p:sp>
+      <p:sp>
+        <p:nvSpPr>
+          <p:cNvPr id="100" name="TextBox 99"/>
           <p:cNvSpPr txBox="1"/>
           <p:nvPr/>
         </p:nvSpPr>
@@ -54158,14 +55958,14 @@
                 </a:solidFill>
                 <a:latin typeface="Consolas"/>
               </a:rPr>
-              <a:t>varchar(20)</a:t>
-            </a:r>
-          </a:p>
-        </p:txBody>
-      </p:sp>
-      <p:sp>
-        <p:nvSpPr>
-          <p:cNvPr id="97" name="TextBox 96"/>
+              <a:t>int</a:t>
+            </a:r>
+          </a:p>
+        </p:txBody>
+      </p:sp>
+      <p:sp>
+        <p:nvSpPr>
+          <p:cNvPr id="101" name="TextBox 100"/>
           <p:cNvSpPr txBox="1"/>
           <p:nvPr/>
         </p:nvSpPr>
@@ -54200,7 +56000,42 @@
       </p:sp>
       <p:sp>
         <p:nvSpPr>
-          <p:cNvPr id="98" name="TextBox 97"/>
+          <p:cNvPr id="102" name="TextBox 101"/>
+          <p:cNvSpPr txBox="1"/>
+          <p:nvPr/>
+        </p:nvSpPr>
+        <p:spPr>
+          <a:xfrm>
+            <a:off x="8906256" y="2734056"/>
+            <a:ext cx="384048" cy="214884"/>
+          </a:xfrm>
+          <a:prstGeom prst="rect">
+            <a:avLst/>
+          </a:prstGeom>
+          <a:noFill/>
+        </p:spPr>
+        <p:txBody>
+          <a:bodyPr wrap="square" lIns="27432" rIns="27432" tIns="0" bIns="0" anchor="ctr">
+            <a:spAutoFit/>
+          </a:bodyPr>
+          <a:lstStyle/>
+          <a:p>
+            <a:pPr algn="ctr"/>
+            <a:r>
+              <a:rPr sz="800" b="1" i="0">
+                <a:solidFill>
+                  <a:srgbClr val="B45309"/>
+                </a:solidFill>
+                <a:latin typeface="Calibri"/>
+              </a:rPr>
+              <a:t>~</a:t>
+            </a:r>
+          </a:p>
+        </p:txBody>
+      </p:sp>
+      <p:sp>
+        <p:nvSpPr>
+          <p:cNvPr id="103" name="TextBox 102"/>
           <p:cNvSpPr txBox="1"/>
           <p:nvPr/>
         </p:nvSpPr>
@@ -54228,14 +56063,14 @@
                 </a:solidFill>
                 <a:latin typeface="Calibri"/>
               </a:rPr>
-              <a:t>Pending/Approved/InTransit/Received</a:t>
-            </a:r>
-          </a:p>
-        </p:txBody>
-      </p:sp>
-      <p:sp>
-        <p:nvSpPr>
-          <p:cNvPr id="99" name="Rectangle 98"/>
+              <a:t>คลังปลายทาง</a:t>
+            </a:r>
+          </a:p>
+        </p:txBody>
+      </p:sp>
+      <p:sp>
+        <p:nvSpPr>
+          <p:cNvPr id="104" name="Rectangle 103"/>
           <p:cNvSpPr/>
           <p:nvPr/>
         </p:nvSpPr>
@@ -54279,7 +56114,7 @@
       </p:sp>
       <p:sp>
         <p:nvSpPr>
-          <p:cNvPr id="100" name="TextBox 99"/>
+          <p:cNvPr id="105" name="TextBox 104"/>
           <p:cNvSpPr txBox="1"/>
           <p:nvPr/>
         </p:nvSpPr>
@@ -54307,14 +56142,14 @@
                 </a:solidFill>
                 <a:latin typeface="Consolas"/>
               </a:rPr>
-              <a:t>RequestedBy</a:t>
-            </a:r>
-          </a:p>
-        </p:txBody>
-      </p:sp>
-      <p:sp>
-        <p:nvSpPr>
-          <p:cNvPr id="101" name="TextBox 100"/>
+              <a:t>Status</a:t>
+            </a:r>
+          </a:p>
+        </p:txBody>
+      </p:sp>
+      <p:sp>
+        <p:nvSpPr>
+          <p:cNvPr id="106" name="TextBox 105"/>
           <p:cNvSpPr txBox="1"/>
           <p:nvPr/>
         </p:nvSpPr>
@@ -54342,14 +56177,14 @@
                 </a:solidFill>
                 <a:latin typeface="Consolas"/>
               </a:rPr>
-              <a:t>varchar(100)</a:t>
-            </a:r>
-          </a:p>
-        </p:txBody>
-      </p:sp>
-      <p:sp>
-        <p:nvSpPr>
-          <p:cNvPr id="102" name="TextBox 101"/>
+              <a:t>varchar(20)</a:t>
+            </a:r>
+          </a:p>
+        </p:txBody>
+      </p:sp>
+      <p:sp>
+        <p:nvSpPr>
+          <p:cNvPr id="107" name="TextBox 106"/>
           <p:cNvSpPr txBox="1"/>
           <p:nvPr/>
         </p:nvSpPr>
@@ -54384,7 +56219,7 @@
       </p:sp>
       <p:sp>
         <p:nvSpPr>
-          <p:cNvPr id="103" name="TextBox 102"/>
+          <p:cNvPr id="108" name="TextBox 107"/>
           <p:cNvSpPr txBox="1"/>
           <p:nvPr/>
         </p:nvSpPr>
@@ -54412,14 +56247,14 @@
                 </a:solidFill>
                 <a:latin typeface="Calibri"/>
               </a:rPr>
-              <a:t>ผู้ขอ</a:t>
-            </a:r>
-          </a:p>
-        </p:txBody>
-      </p:sp>
-      <p:sp>
-        <p:nvSpPr>
-          <p:cNvPr id="104" name="TextBox 103"/>
+              <a:t>Pending/Approved/InTransit/Received</a:t>
+            </a:r>
+          </a:p>
+        </p:txBody>
+      </p:sp>
+      <p:sp>
+        <p:nvSpPr>
+          <p:cNvPr id="109" name="TextBox 108"/>
           <p:cNvSpPr txBox="1"/>
           <p:nvPr/>
         </p:nvSpPr>
@@ -54447,14 +56282,14 @@
                 </a:solidFill>
                 <a:latin typeface="Consolas"/>
               </a:rPr>
-              <a:t>ApprovedBy</a:t>
-            </a:r>
-          </a:p>
-        </p:txBody>
-      </p:sp>
-      <p:sp>
-        <p:nvSpPr>
-          <p:cNvPr id="105" name="TextBox 104"/>
+              <a:t>RequestedBy</a:t>
+            </a:r>
+          </a:p>
+        </p:txBody>
+      </p:sp>
+      <p:sp>
+        <p:nvSpPr>
+          <p:cNvPr id="110" name="TextBox 109"/>
           <p:cNvSpPr txBox="1"/>
           <p:nvPr/>
         </p:nvSpPr>
@@ -54489,7 +56324,7 @@
       </p:sp>
       <p:sp>
         <p:nvSpPr>
-          <p:cNvPr id="106" name="TextBox 105"/>
+          <p:cNvPr id="111" name="TextBox 110"/>
           <p:cNvSpPr txBox="1"/>
           <p:nvPr/>
         </p:nvSpPr>
@@ -54513,18 +56348,18 @@
             <a:r>
               <a:rPr sz="700" b="0" i="0">
                 <a:solidFill>
-                  <a:srgbClr val="6B7280"/>
-                </a:solidFill>
-                <a:latin typeface="Calibri"/>
-              </a:rPr>
-              <a:t>Y</a:t>
-            </a:r>
-          </a:p>
-        </p:txBody>
-      </p:sp>
-      <p:sp>
-        <p:nvSpPr>
-          <p:cNvPr id="107" name="TextBox 106"/>
+                  <a:srgbClr val="B0B0B0"/>
+                </a:solidFill>
+                <a:latin typeface="Calibri"/>
+              </a:rPr>
+              <a:t>—</a:t>
+            </a:r>
+          </a:p>
+        </p:txBody>
+      </p:sp>
+      <p:sp>
+        <p:nvSpPr>
+          <p:cNvPr id="112" name="TextBox 111"/>
           <p:cNvSpPr txBox="1"/>
           <p:nvPr/>
         </p:nvSpPr>
@@ -54552,14 +56387,14 @@
                 </a:solidFill>
                 <a:latin typeface="Calibri"/>
               </a:rPr>
-              <a:t>ผู้อนุมัติ</a:t>
-            </a:r>
-          </a:p>
-        </p:txBody>
-      </p:sp>
-      <p:sp>
-        <p:nvSpPr>
-          <p:cNvPr id="108" name="Rectangle 107"/>
+              <a:t>ผู้ขอ</a:t>
+            </a:r>
+          </a:p>
+        </p:txBody>
+      </p:sp>
+      <p:sp>
+        <p:nvSpPr>
+          <p:cNvPr id="113" name="Rectangle 112"/>
           <p:cNvSpPr/>
           <p:nvPr/>
         </p:nvSpPr>
@@ -54603,7 +56438,7 @@
       </p:sp>
       <p:sp>
         <p:nvSpPr>
-          <p:cNvPr id="109" name="TextBox 108"/>
+          <p:cNvPr id="114" name="TextBox 113"/>
           <p:cNvSpPr txBox="1"/>
           <p:nvPr/>
         </p:nvSpPr>
@@ -54631,14 +56466,14 @@
                 </a:solidFill>
                 <a:latin typeface="Consolas"/>
               </a:rPr>
-              <a:t>CreatedAt</a:t>
-            </a:r>
-          </a:p>
-        </p:txBody>
-      </p:sp>
-      <p:sp>
-        <p:nvSpPr>
-          <p:cNvPr id="110" name="TextBox 109"/>
+              <a:t>ApprovedBy</a:t>
+            </a:r>
+          </a:p>
+        </p:txBody>
+      </p:sp>
+      <p:sp>
+        <p:nvSpPr>
+          <p:cNvPr id="115" name="TextBox 114"/>
           <p:cNvSpPr txBox="1"/>
           <p:nvPr/>
         </p:nvSpPr>
@@ -54666,14 +56501,14 @@
                 </a:solidFill>
                 <a:latin typeface="Consolas"/>
               </a:rPr>
-              <a:t>datetime</a:t>
-            </a:r>
-          </a:p>
-        </p:txBody>
-      </p:sp>
-      <p:sp>
-        <p:nvSpPr>
-          <p:cNvPr id="111" name="TextBox 110"/>
+              <a:t>varchar(100)</a:t>
+            </a:r>
+          </a:p>
+        </p:txBody>
+      </p:sp>
+      <p:sp>
+        <p:nvSpPr>
+          <p:cNvPr id="116" name="TextBox 115"/>
           <p:cNvSpPr txBox="1"/>
           <p:nvPr/>
         </p:nvSpPr>
@@ -54697,18 +56532,18 @@
             <a:r>
               <a:rPr sz="700" b="0" i="0">
                 <a:solidFill>
-                  <a:srgbClr val="B0B0B0"/>
-                </a:solidFill>
-                <a:latin typeface="Calibri"/>
-              </a:rPr>
-              <a:t>—</a:t>
-            </a:r>
-          </a:p>
-        </p:txBody>
-      </p:sp>
-      <p:sp>
-        <p:nvSpPr>
-          <p:cNvPr id="112" name="TextBox 111"/>
+                  <a:srgbClr val="6B7280"/>
+                </a:solidFill>
+                <a:latin typeface="Calibri"/>
+              </a:rPr>
+              <a:t>Y</a:t>
+            </a:r>
+          </a:p>
+        </p:txBody>
+      </p:sp>
+      <p:sp>
+        <p:nvSpPr>
+          <p:cNvPr id="117" name="TextBox 116"/>
           <p:cNvSpPr txBox="1"/>
           <p:nvPr/>
         </p:nvSpPr>
@@ -54736,14 +56571,14 @@
                 </a:solidFill>
                 <a:latin typeface="Calibri"/>
               </a:rPr>
-              <a:t>เวลาสร้าง</a:t>
-            </a:r>
-          </a:p>
-        </p:txBody>
-      </p:sp>
-      <p:sp>
-        <p:nvSpPr>
-          <p:cNvPr id="113" name="TextBox 112"/>
+              <a:t>ผู้อนุมัติ</a:t>
+            </a:r>
+          </a:p>
+        </p:txBody>
+      </p:sp>
+      <p:sp>
+        <p:nvSpPr>
+          <p:cNvPr id="118" name="TextBox 117"/>
           <p:cNvSpPr txBox="1"/>
           <p:nvPr/>
         </p:nvSpPr>
@@ -54771,14 +56606,14 @@
                 </a:solidFill>
                 <a:latin typeface="Consolas"/>
               </a:rPr>
-              <a:t>ApprovedAt</a:t>
-            </a:r>
-          </a:p>
-        </p:txBody>
-      </p:sp>
-      <p:sp>
-        <p:nvSpPr>
-          <p:cNvPr id="114" name="TextBox 113"/>
+              <a:t>CreatedAt</a:t>
+            </a:r>
+          </a:p>
+        </p:txBody>
+      </p:sp>
+      <p:sp>
+        <p:nvSpPr>
+          <p:cNvPr id="119" name="TextBox 118"/>
           <p:cNvSpPr txBox="1"/>
           <p:nvPr/>
         </p:nvSpPr>
@@ -54813,7 +56648,7 @@
       </p:sp>
       <p:sp>
         <p:nvSpPr>
-          <p:cNvPr id="115" name="TextBox 114"/>
+          <p:cNvPr id="120" name="TextBox 119"/>
           <p:cNvSpPr txBox="1"/>
           <p:nvPr/>
         </p:nvSpPr>
@@ -54837,18 +56672,18 @@
             <a:r>
               <a:rPr sz="700" b="0" i="0">
                 <a:solidFill>
-                  <a:srgbClr val="6B7280"/>
-                </a:solidFill>
-                <a:latin typeface="Calibri"/>
-              </a:rPr>
-              <a:t>Y</a:t>
-            </a:r>
-          </a:p>
-        </p:txBody>
-      </p:sp>
-      <p:sp>
-        <p:nvSpPr>
-          <p:cNvPr id="116" name="TextBox 115"/>
+                  <a:srgbClr val="B0B0B0"/>
+                </a:solidFill>
+                <a:latin typeface="Calibri"/>
+              </a:rPr>
+              <a:t>—</a:t>
+            </a:r>
+          </a:p>
+        </p:txBody>
+      </p:sp>
+      <p:sp>
+        <p:nvSpPr>
+          <p:cNvPr id="121" name="TextBox 120"/>
           <p:cNvSpPr txBox="1"/>
           <p:nvPr/>
         </p:nvSpPr>
@@ -54876,14 +56711,14 @@
                 </a:solidFill>
                 <a:latin typeface="Calibri"/>
               </a:rPr>
-              <a:t>เวลาอนุมัติ</a:t>
-            </a:r>
-          </a:p>
-        </p:txBody>
-      </p:sp>
-      <p:sp>
-        <p:nvSpPr>
-          <p:cNvPr id="117" name="Rectangle 116"/>
+              <a:t>เวลาสร้าง</a:t>
+            </a:r>
+          </a:p>
+        </p:txBody>
+      </p:sp>
+      <p:sp>
+        <p:nvSpPr>
+          <p:cNvPr id="122" name="Rectangle 121"/>
           <p:cNvSpPr/>
           <p:nvPr/>
         </p:nvSpPr>
@@ -54927,7 +56762,7 @@
       </p:sp>
       <p:sp>
         <p:nvSpPr>
-          <p:cNvPr id="118" name="TextBox 117"/>
+          <p:cNvPr id="123" name="TextBox 122"/>
           <p:cNvSpPr txBox="1"/>
           <p:nvPr/>
         </p:nvSpPr>
@@ -54955,14 +56790,14 @@
                 </a:solidFill>
                 <a:latin typeface="Consolas"/>
               </a:rPr>
-              <a:t>ConfirmedAt</a:t>
-            </a:r>
-          </a:p>
-        </p:txBody>
-      </p:sp>
-      <p:sp>
-        <p:nvSpPr>
-          <p:cNvPr id="119" name="TextBox 118"/>
+              <a:t>ApprovedAt</a:t>
+            </a:r>
+          </a:p>
+        </p:txBody>
+      </p:sp>
+      <p:sp>
+        <p:nvSpPr>
+          <p:cNvPr id="124" name="TextBox 123"/>
           <p:cNvSpPr txBox="1"/>
           <p:nvPr/>
         </p:nvSpPr>
@@ -54997,7 +56832,7 @@
       </p:sp>
       <p:sp>
         <p:nvSpPr>
-          <p:cNvPr id="120" name="TextBox 119"/>
+          <p:cNvPr id="125" name="TextBox 124"/>
           <p:cNvSpPr txBox="1"/>
           <p:nvPr/>
         </p:nvSpPr>
@@ -55032,7 +56867,7 @@
       </p:sp>
       <p:sp>
         <p:nvSpPr>
-          <p:cNvPr id="121" name="TextBox 120"/>
+          <p:cNvPr id="126" name="TextBox 125"/>
           <p:cNvSpPr txBox="1"/>
           <p:nvPr/>
         </p:nvSpPr>
@@ -55060,14 +56895,14 @@
                 </a:solidFill>
                 <a:latin typeface="Calibri"/>
               </a:rPr>
-              <a:t>เวลายืนยันส่ง</a:t>
-            </a:r>
-          </a:p>
-        </p:txBody>
-      </p:sp>
-      <p:sp>
-        <p:nvSpPr>
-          <p:cNvPr id="122" name="TextBox 121"/>
+              <a:t>เวลาอนุมัติ</a:t>
+            </a:r>
+          </a:p>
+        </p:txBody>
+      </p:sp>
+      <p:sp>
+        <p:nvSpPr>
+          <p:cNvPr id="127" name="TextBox 126"/>
           <p:cNvSpPr txBox="1"/>
           <p:nvPr/>
         </p:nvSpPr>
@@ -55095,14 +56930,14 @@
                 </a:solidFill>
                 <a:latin typeface="Consolas"/>
               </a:rPr>
-              <a:t>ReceivedAt</a:t>
-            </a:r>
-          </a:p>
-        </p:txBody>
-      </p:sp>
-      <p:sp>
-        <p:nvSpPr>
-          <p:cNvPr id="123" name="TextBox 122"/>
+              <a:t>ConfirmedAt</a:t>
+            </a:r>
+          </a:p>
+        </p:txBody>
+      </p:sp>
+      <p:sp>
+        <p:nvSpPr>
+          <p:cNvPr id="128" name="TextBox 127"/>
           <p:cNvSpPr txBox="1"/>
           <p:nvPr/>
         </p:nvSpPr>
@@ -55137,7 +56972,7 @@
       </p:sp>
       <p:sp>
         <p:nvSpPr>
-          <p:cNvPr id="124" name="TextBox 123"/>
+          <p:cNvPr id="129" name="TextBox 128"/>
           <p:cNvSpPr txBox="1"/>
           <p:nvPr/>
         </p:nvSpPr>
@@ -55172,7 +57007,7 @@
       </p:sp>
       <p:sp>
         <p:nvSpPr>
-          <p:cNvPr id="125" name="TextBox 124"/>
+          <p:cNvPr id="130" name="TextBox 129"/>
           <p:cNvSpPr txBox="1"/>
           <p:nvPr/>
         </p:nvSpPr>
@@ -55200,6 +57035,190 @@
                 </a:solidFill>
                 <a:latin typeface="Calibri"/>
               </a:rPr>
+              <a:t>เวลายืนยันส่ง</a:t>
+            </a:r>
+          </a:p>
+        </p:txBody>
+      </p:sp>
+      <p:sp>
+        <p:nvSpPr>
+          <p:cNvPr id="131" name="Rectangle 130"/>
+          <p:cNvSpPr/>
+          <p:nvPr/>
+        </p:nvSpPr>
+        <p:spPr>
+          <a:xfrm>
+            <a:off x="6236207" y="4238244"/>
+            <a:ext cx="5449824" cy="214884"/>
+          </a:xfrm>
+          <a:prstGeom prst="rect">
+            <a:avLst/>
+          </a:prstGeom>
+          <a:solidFill>
+            <a:srgbClr val="F3F6FB"/>
+          </a:solidFill>
+          <a:ln>
+            <a:noFill/>
+          </a:ln>
+          <a:effectLst/>
+        </p:spPr>
+        <p:style>
+          <a:lnRef idx="1">
+            <a:schemeClr val="accent1"/>
+          </a:lnRef>
+          <a:fillRef idx="3">
+            <a:schemeClr val="accent1"/>
+          </a:fillRef>
+          <a:effectRef idx="2">
+            <a:schemeClr val="accent1"/>
+          </a:effectRef>
+          <a:fontRef idx="minor">
+            <a:schemeClr val="lt1"/>
+          </a:fontRef>
+        </p:style>
+        <p:txBody>
+          <a:bodyPr rtlCol="0" anchor="ctr"/>
+          <a:lstStyle/>
+          <a:p>
+            <a:pPr algn="ctr"/>
+          </a:p>
+        </p:txBody>
+      </p:sp>
+      <p:sp>
+        <p:nvSpPr>
+          <p:cNvPr id="132" name="TextBox 131"/>
+          <p:cNvSpPr txBox="1"/>
+          <p:nvPr/>
+        </p:nvSpPr>
+        <p:spPr>
+          <a:xfrm>
+            <a:off x="6263640" y="4238244"/>
+            <a:ext cx="1188720" cy="214884"/>
+          </a:xfrm>
+          <a:prstGeom prst="rect">
+            <a:avLst/>
+          </a:prstGeom>
+          <a:noFill/>
+        </p:spPr>
+        <p:txBody>
+          <a:bodyPr wrap="square" lIns="27432" rIns="27432" tIns="0" bIns="0" anchor="ctr">
+            <a:spAutoFit/>
+          </a:bodyPr>
+          <a:lstStyle/>
+          <a:p>
+            <a:pPr algn="l"/>
+            <a:r>
+              <a:rPr sz="850" b="1" i="0">
+                <a:solidFill>
+                  <a:srgbClr val="1E2D40"/>
+                </a:solidFill>
+                <a:latin typeface="Consolas"/>
+              </a:rPr>
+              <a:t>ReceivedAt</a:t>
+            </a:r>
+          </a:p>
+        </p:txBody>
+      </p:sp>
+      <p:sp>
+        <p:nvSpPr>
+          <p:cNvPr id="133" name="TextBox 132"/>
+          <p:cNvSpPr txBox="1"/>
+          <p:nvPr/>
+        </p:nvSpPr>
+        <p:spPr>
+          <a:xfrm>
+            <a:off x="7525512" y="4238244"/>
+            <a:ext cx="969264" cy="214884"/>
+          </a:xfrm>
+          <a:prstGeom prst="rect">
+            <a:avLst/>
+          </a:prstGeom>
+          <a:noFill/>
+        </p:spPr>
+        <p:txBody>
+          <a:bodyPr wrap="square" lIns="27432" rIns="27432" tIns="0" bIns="0" anchor="ctr">
+            <a:spAutoFit/>
+          </a:bodyPr>
+          <a:lstStyle/>
+          <a:p>
+            <a:pPr algn="l"/>
+            <a:r>
+              <a:rPr sz="800" b="0" i="0">
+                <a:solidFill>
+                  <a:srgbClr val="2563EB"/>
+                </a:solidFill>
+                <a:latin typeface="Consolas"/>
+              </a:rPr>
+              <a:t>datetime</a:t>
+            </a:r>
+          </a:p>
+        </p:txBody>
+      </p:sp>
+      <p:sp>
+        <p:nvSpPr>
+          <p:cNvPr id="134" name="TextBox 133"/>
+          <p:cNvSpPr txBox="1"/>
+          <p:nvPr/>
+        </p:nvSpPr>
+        <p:spPr>
+          <a:xfrm>
+            <a:off x="8522208" y="4238244"/>
+            <a:ext cx="384048" cy="214884"/>
+          </a:xfrm>
+          <a:prstGeom prst="rect">
+            <a:avLst/>
+          </a:prstGeom>
+          <a:noFill/>
+        </p:spPr>
+        <p:txBody>
+          <a:bodyPr wrap="square" lIns="27432" rIns="27432" tIns="0" bIns="0" anchor="ctr">
+            <a:spAutoFit/>
+          </a:bodyPr>
+          <a:lstStyle/>
+          <a:p>
+            <a:pPr algn="ctr"/>
+            <a:r>
+              <a:rPr sz="700" b="0" i="0">
+                <a:solidFill>
+                  <a:srgbClr val="6B7280"/>
+                </a:solidFill>
+                <a:latin typeface="Calibri"/>
+              </a:rPr>
+              <a:t>Y</a:t>
+            </a:r>
+          </a:p>
+        </p:txBody>
+      </p:sp>
+      <p:sp>
+        <p:nvSpPr>
+          <p:cNvPr id="135" name="TextBox 134"/>
+          <p:cNvSpPr txBox="1"/>
+          <p:nvPr/>
+        </p:nvSpPr>
+        <p:spPr>
+          <a:xfrm>
+            <a:off x="9336024" y="4238244"/>
+            <a:ext cx="2340864" cy="214884"/>
+          </a:xfrm>
+          <a:prstGeom prst="rect">
+            <a:avLst/>
+          </a:prstGeom>
+          <a:noFill/>
+        </p:spPr>
+        <p:txBody>
+          <a:bodyPr wrap="square" lIns="27432" rIns="27432" tIns="0" bIns="0" anchor="ctr">
+            <a:spAutoFit/>
+          </a:bodyPr>
+          <a:lstStyle/>
+          <a:p>
+            <a:pPr algn="l"/>
+            <a:r>
+              <a:rPr sz="850" b="0" i="0">
+                <a:solidFill>
+                  <a:srgbClr val="1E2D40"/>
+                </a:solidFill>
+                <a:latin typeface="Calibri"/>
+              </a:rPr>
               <a:t>เวลารับปลายทาง</a:t>
             </a:r>
           </a:p>
@@ -55207,7 +57226,7 @@
       </p:sp>
       <p:sp>
         <p:nvSpPr>
-          <p:cNvPr id="126" name="TextBox 125"/>
+          <p:cNvPr id="136" name="TextBox 135"/>
           <p:cNvSpPr txBox="1"/>
           <p:nvPr/>
         </p:nvSpPr>
@@ -55242,7 +57261,7 @@
       </p:sp>
       <p:sp>
         <p:nvSpPr>
-          <p:cNvPr id="127" name="TextBox 126"/>
+          <p:cNvPr id="137" name="TextBox 136"/>
           <p:cNvSpPr txBox="1"/>
           <p:nvPr/>
         </p:nvSpPr>
@@ -55277,7 +57296,7 @@
       </p:sp>
       <p:sp>
         <p:nvSpPr>
-          <p:cNvPr id="128" name="TextBox 127"/>
+          <p:cNvPr id="138" name="TextBox 137"/>
           <p:cNvSpPr txBox="1"/>
           <p:nvPr/>
         </p:nvSpPr>
@@ -55312,7 +57331,7 @@
       </p:sp>
       <p:sp>
         <p:nvSpPr>
-          <p:cNvPr id="129" name="TextBox 128"/>
+          <p:cNvPr id="139" name="TextBox 138"/>
           <p:cNvSpPr txBox="1"/>
           <p:nvPr/>
         </p:nvSpPr>
@@ -55347,7 +57366,7 @@
       </p:sp>
       <p:sp>
         <p:nvSpPr>
-          <p:cNvPr id="130" name="TextBox 129"/>
+          <p:cNvPr id="140" name="TextBox 139"/>
           <p:cNvSpPr txBox="1"/>
           <p:nvPr/>
         </p:nvSpPr>
@@ -55382,7 +57401,7 @@
       </p:sp>
       <p:sp>
         <p:nvSpPr>
-          <p:cNvPr id="131" name="TextBox 130"/>
+          <p:cNvPr id="141" name="TextBox 140"/>
           <p:cNvSpPr txBox="1"/>
           <p:nvPr/>
         </p:nvSpPr>
@@ -55417,7 +57436,7 @@
       </p:sp>
       <p:sp>
         <p:nvSpPr>
-          <p:cNvPr id="132" name="TextBox 131"/>
+          <p:cNvPr id="142" name="TextBox 141"/>
           <p:cNvSpPr txBox="1"/>
           <p:nvPr/>
         </p:nvSpPr>
@@ -55452,7 +57471,7 @@
       </p:sp>
       <p:sp>
         <p:nvSpPr>
-          <p:cNvPr id="133" name="TextBox 132"/>
+          <p:cNvPr id="143" name="TextBox 142"/>
           <p:cNvSpPr txBox="1"/>
           <p:nvPr/>
         </p:nvSpPr>
